--- a/ledentsov/presentation/Интеллектуальная система адаптивной балансировки нагрузки для микросервисных и гибридных веб-архитектур.pptx
+++ b/ledentsov/presentation/Интеллектуальная система адаптивной балансировки нагрузки для микросервисных и гибридных веб-архитектур.pptx
@@ -17,6 +17,8 @@
     <p:sldId id="265" r:id="rId16"/>
     <p:sldId id="266" r:id="rId17"/>
     <p:sldId id="267" r:id="rId18"/>
+    <p:sldId id="268" r:id="rId19"/>
+    <p:sldId id="269" r:id="rId20"/>
   </p:sldIdLst>
   <p:sldSz cx="12191695" cy="6858000" type="screen4x3"/>
   <p:notesSz cx="6858000" cy="9144000"/>
@@ -3355,7 +3357,7 @@
                 </a:solidFill>
                 <a:latin typeface="Calibri"/>
               </a:rPr>
-              <a:t>Кому это нужно</a:t>
+              <a:t>Этап 2 — исправить то, что увидели</a:t>
             </a:r>
           </a:p>
         </p:txBody>
@@ -3394,9 +3396,71 @@
                 </a:solidFill>
                 <a:latin typeface="Calibri"/>
               </a:rPr>
-              <a:t>Признак клиента виден сразу: в одном API соседствуют операции, различающиеся по стоимости на порядок,</a:t>
-            </a:r>
-          </a:p>
+              <a:t>Шлюз, который оценивает нагрузку каждого запроса и раскладывает обращения по обработчикам.</a:t>
+            </a:r>
+          </a:p>
+        </p:txBody>
+      </p:sp>
+      <p:sp>
+        <p:nvSpPr>
+          <p:cNvPr id="4" name="TextBox 3"/>
+          <p:cNvSpPr txBox="1"/>
+          <p:nvPr/>
+        </p:nvSpPr>
+        <p:spPr>
+          <a:xfrm>
+            <a:off x="822960" y="2350008"/>
+            <a:ext cx="10545775" cy="329184"/>
+          </a:xfrm>
+          <a:prstGeom prst="rect">
+            <a:avLst/>
+          </a:prstGeom>
+          <a:noFill/>
+        </p:spPr>
+        <p:txBody>
+          <a:bodyPr wrap="square" lIns="0" rIns="0" tIns="0" bIns="0">
+            <a:spAutoFit/>
+          </a:bodyPr>
+          <a:lstStyle/>
+          <a:p>
+            <a:pPr algn="l">
+              <a:lnSpc>
+                <a:spcPct val="100000"/>
+              </a:lnSpc>
+            </a:pPr>
+            <a:r>
+              <a:rPr sz="1700" b="1">
+                <a:solidFill>
+                  <a:srgbClr val="1565C0"/>
+                </a:solidFill>
+                <a:latin typeface="Calibri"/>
+              </a:rPr>
+              <a:t>1. Оценка нагрузки запроса</a:t>
+            </a:r>
+          </a:p>
+        </p:txBody>
+      </p:sp>
+      <p:sp>
+        <p:nvSpPr>
+          <p:cNvPr id="5" name="TextBox 4"/>
+          <p:cNvSpPr txBox="1"/>
+          <p:nvPr/>
+        </p:nvSpPr>
+        <p:spPr>
+          <a:xfrm>
+            <a:off x="822960" y="2752344"/>
+            <a:ext cx="10545775" cy="658368"/>
+          </a:xfrm>
+          <a:prstGeom prst="rect">
+            <a:avLst/>
+          </a:prstGeom>
+          <a:noFill/>
+        </p:spPr>
+        <p:txBody>
+          <a:bodyPr wrap="square" lIns="0" rIns="0" tIns="0" bIns="0">
+            <a:spAutoFit/>
+          </a:bodyPr>
+          <a:lstStyle/>
           <a:p>
             <a:pPr algn="l">
               <a:lnSpc>
@@ -3404,27 +3468,27 @@
               </a:lnSpc>
             </a:pPr>
             <a:r>
-              <a:rPr sz="1500" b="0">
+              <a:rPr sz="1400" b="0">
                 <a:solidFill>
                   <a:srgbClr val="5B6B7A"/>
                 </a:solidFill>
                 <a:latin typeface="Calibri"/>
               </a:rPr>
-              <a:t>и команда уже столкнулась с необъяснимыми подтормаживаниями.</a:t>
-            </a:r>
-          </a:p>
-        </p:txBody>
-      </p:sp>
-      <p:sp>
-        <p:nvSpPr>
-          <p:cNvPr id="4" name="TextBox 3"/>
-          <p:cNvSpPr txBox="1"/>
-          <p:nvPr/>
-        </p:nvSpPr>
-        <p:spPr>
-          <a:xfrm>
-            <a:off x="822960" y="2350008"/>
-            <a:ext cx="5181447" cy="310896"/>
+              <a:t>По параметрам, которые прокси видит до обработки, предсказывается, на сколько миллисекунд запрос займёт движок для остальных.</a:t>
+            </a:r>
+          </a:p>
+        </p:txBody>
+      </p:sp>
+      <p:sp>
+        <p:nvSpPr>
+          <p:cNvPr id="6" name="TextBox 5"/>
+          <p:cNvSpPr txBox="1"/>
+          <p:nvPr/>
+        </p:nvSpPr>
+        <p:spPr>
+          <a:xfrm>
+            <a:off x="822960" y="3557016"/>
+            <a:ext cx="10545775" cy="329184"/>
           </a:xfrm>
           <a:prstGeom prst="rect">
             <a:avLst/>
@@ -3445,25 +3509,64 @@
             <a:r>
               <a:rPr sz="1700" b="1">
                 <a:solidFill>
-                  <a:srgbClr val="1A2027"/>
-                </a:solidFill>
-                <a:latin typeface="Calibri"/>
-              </a:rPr>
-              <a:t>Интернет-магазины</a:t>
-            </a:r>
-          </a:p>
-        </p:txBody>
-      </p:sp>
-      <p:sp>
-        <p:nvSpPr>
-          <p:cNvPr id="5" name="TextBox 4"/>
-          <p:cNvSpPr txBox="1"/>
-          <p:nvPr/>
-        </p:nvSpPr>
-        <p:spPr>
-          <a:xfrm>
-            <a:off x="822960" y="2715768"/>
-            <a:ext cx="5181447" cy="365760"/>
+                  <a:srgbClr val="1565C0"/>
+                </a:solidFill>
+                <a:latin typeface="Calibri"/>
+              </a:rPr>
+              <a:t>2. Допуск</a:t>
+            </a:r>
+          </a:p>
+        </p:txBody>
+      </p:sp>
+      <p:sp>
+        <p:nvSpPr>
+          <p:cNvPr id="7" name="TextBox 6"/>
+          <p:cNvSpPr txBox="1"/>
+          <p:nvPr/>
+        </p:nvSpPr>
+        <p:spPr>
+          <a:xfrm>
+            <a:off x="822960" y="3959352"/>
+            <a:ext cx="10545775" cy="658368"/>
+          </a:xfrm>
+          <a:prstGeom prst="rect">
+            <a:avLst/>
+          </a:prstGeom>
+          <a:noFill/>
+        </p:spPr>
+        <p:txBody>
+          <a:bodyPr wrap="square" lIns="0" rIns="0" tIns="0" bIns="0">
+            <a:spAutoFit/>
+          </a:bodyPr>
+          <a:lstStyle/>
+          <a:p>
+            <a:pPr algn="l">
+              <a:lnSpc>
+                <a:spcPct val="125000"/>
+              </a:lnSpc>
+            </a:pPr>
+            <a:r>
+              <a:rPr sz="1400" b="0">
+                <a:solidFill>
+                  <a:srgbClr val="5B6B7A"/>
+                </a:solidFill>
+                <a:latin typeface="Calibri"/>
+              </a:rPr>
+              <a:t>Запрос пускается в асинхронный движок, только если предсказанная блокировка не превышает порога. Порог задаёт компромисс между пропускной способностью и хвостом задержек.</a:t>
+            </a:r>
+          </a:p>
+        </p:txBody>
+      </p:sp>
+      <p:sp>
+        <p:nvSpPr>
+          <p:cNvPr id="8" name="TextBox 7"/>
+          <p:cNvSpPr txBox="1"/>
+          <p:nvPr/>
+        </p:nvSpPr>
+        <p:spPr>
+          <a:xfrm>
+            <a:off x="822960" y="4764024"/>
+            <a:ext cx="10545775" cy="329184"/>
           </a:xfrm>
           <a:prstGeom prst="rect">
             <a:avLst/>
@@ -3482,371 +3585,52 @@
               </a:lnSpc>
             </a:pPr>
             <a:r>
+              <a:rPr sz="1700" b="1">
+                <a:solidFill>
+                  <a:srgbClr val="1565C0"/>
+                </a:solidFill>
+                <a:latin typeface="Calibri"/>
+              </a:rPr>
+              <a:t>3. Выбор из допустимых</a:t>
+            </a:r>
+          </a:p>
+        </p:txBody>
+      </p:sp>
+      <p:sp>
+        <p:nvSpPr>
+          <p:cNvPr id="9" name="TextBox 8"/>
+          <p:cNvSpPr txBox="1"/>
+          <p:nvPr/>
+        </p:nvSpPr>
+        <p:spPr>
+          <a:xfrm>
+            <a:off x="822960" y="5166360"/>
+            <a:ext cx="10545775" cy="658368"/>
+          </a:xfrm>
+          <a:prstGeom prst="rect">
+            <a:avLst/>
+          </a:prstGeom>
+          <a:noFill/>
+        </p:spPr>
+        <p:txBody>
+          <a:bodyPr wrap="square" lIns="0" rIns="0" tIns="0" bIns="0">
+            <a:spAutoFit/>
+          </a:bodyPr>
+          <a:lstStyle/>
+          <a:p>
+            <a:pPr algn="l">
+              <a:lnSpc>
+                <a:spcPct val="125000"/>
+              </a:lnSpc>
+            </a:pPr>
+            <a:r>
               <a:rPr sz="1400" b="0">
                 <a:solidFill>
                   <a:srgbClr val="5B6B7A"/>
                 </a:solidFill>
                 <a:latin typeface="Calibri"/>
               </a:rPr>
-              <a:t>каталог и выгрузка отчётов</a:t>
-            </a:r>
-          </a:p>
-        </p:txBody>
-      </p:sp>
-      <p:sp>
-        <p:nvSpPr>
-          <p:cNvPr id="6" name="TextBox 5"/>
-          <p:cNvSpPr txBox="1"/>
-          <p:nvPr/>
-        </p:nvSpPr>
-        <p:spPr>
-          <a:xfrm>
-            <a:off x="6187287" y="2350008"/>
-            <a:ext cx="5181447" cy="310896"/>
-          </a:xfrm>
-          <a:prstGeom prst="rect">
-            <a:avLst/>
-          </a:prstGeom>
-          <a:noFill/>
-        </p:spPr>
-        <p:txBody>
-          <a:bodyPr wrap="square" lIns="0" rIns="0" tIns="0" bIns="0">
-            <a:spAutoFit/>
-          </a:bodyPr>
-          <a:lstStyle/>
-          <a:p>
-            <a:pPr algn="l">
-              <a:lnSpc>
-                <a:spcPct val="100000"/>
-              </a:lnSpc>
-            </a:pPr>
-            <a:r>
-              <a:rPr sz="1700" b="1">
-                <a:solidFill>
-                  <a:srgbClr val="1A2027"/>
-                </a:solidFill>
-                <a:latin typeface="Calibri"/>
-              </a:rPr>
-              <a:t>Финтех</a:t>
-            </a:r>
-          </a:p>
-        </p:txBody>
-      </p:sp>
-      <p:sp>
-        <p:nvSpPr>
-          <p:cNvPr id="7" name="TextBox 6"/>
-          <p:cNvSpPr txBox="1"/>
-          <p:nvPr/>
-        </p:nvSpPr>
-        <p:spPr>
-          <a:xfrm>
-            <a:off x="6187287" y="2715768"/>
-            <a:ext cx="5181447" cy="365760"/>
-          </a:xfrm>
-          <a:prstGeom prst="rect">
-            <a:avLst/>
-          </a:prstGeom>
-          <a:noFill/>
-        </p:spPr>
-        <p:txBody>
-          <a:bodyPr wrap="square" lIns="0" rIns="0" tIns="0" bIns="0">
-            <a:spAutoFit/>
-          </a:bodyPr>
-          <a:lstStyle/>
-          <a:p>
-            <a:pPr algn="l">
-              <a:lnSpc>
-                <a:spcPct val="100000"/>
-              </a:lnSpc>
-            </a:pPr>
-            <a:r>
-              <a:rPr sz="1400" b="0">
-                <a:solidFill>
-                  <a:srgbClr val="5B6B7A"/>
-                </a:solidFill>
-                <a:latin typeface="Calibri"/>
-              </a:rPr>
-              <a:t>проверка баланса и формирование выписки</a:t>
-            </a:r>
-          </a:p>
-        </p:txBody>
-      </p:sp>
-      <p:sp>
-        <p:nvSpPr>
-          <p:cNvPr id="8" name="TextBox 7"/>
-          <p:cNvSpPr txBox="1"/>
-          <p:nvPr/>
-        </p:nvSpPr>
-        <p:spPr>
-          <a:xfrm>
-            <a:off x="822960" y="3218688"/>
-            <a:ext cx="5181447" cy="310896"/>
-          </a:xfrm>
-          <a:prstGeom prst="rect">
-            <a:avLst/>
-          </a:prstGeom>
-          <a:noFill/>
-        </p:spPr>
-        <p:txBody>
-          <a:bodyPr wrap="square" lIns="0" rIns="0" tIns="0" bIns="0">
-            <a:spAutoFit/>
-          </a:bodyPr>
-          <a:lstStyle/>
-          <a:p>
-            <a:pPr algn="l">
-              <a:lnSpc>
-                <a:spcPct val="100000"/>
-              </a:lnSpc>
-            </a:pPr>
-            <a:r>
-              <a:rPr sz="1700" b="1">
-                <a:solidFill>
-                  <a:srgbClr val="1A2027"/>
-                </a:solidFill>
-                <a:latin typeface="Calibri"/>
-              </a:rPr>
-              <a:t>SaaS-сервисы</a:t>
-            </a:r>
-          </a:p>
-        </p:txBody>
-      </p:sp>
-      <p:sp>
-        <p:nvSpPr>
-          <p:cNvPr id="9" name="TextBox 8"/>
-          <p:cNvSpPr txBox="1"/>
-          <p:nvPr/>
-        </p:nvSpPr>
-        <p:spPr>
-          <a:xfrm>
-            <a:off x="822960" y="3584448"/>
-            <a:ext cx="5181447" cy="365760"/>
-          </a:xfrm>
-          <a:prstGeom prst="rect">
-            <a:avLst/>
-          </a:prstGeom>
-          <a:noFill/>
-        </p:spPr>
-        <p:txBody>
-          <a:bodyPr wrap="square" lIns="0" rIns="0" tIns="0" bIns="0">
-            <a:spAutoFit/>
-          </a:bodyPr>
-          <a:lstStyle/>
-          <a:p>
-            <a:pPr algn="l">
-              <a:lnSpc>
-                <a:spcPct val="100000"/>
-              </a:lnSpc>
-            </a:pPr>
-            <a:r>
-              <a:rPr sz="1400" b="0">
-                <a:solidFill>
-                  <a:srgbClr val="5B6B7A"/>
-                </a:solidFill>
-                <a:latin typeface="Calibri"/>
-              </a:rPr>
-              <a:t>интерфейс и экспорт данных</a:t>
-            </a:r>
-          </a:p>
-        </p:txBody>
-      </p:sp>
-      <p:sp>
-        <p:nvSpPr>
-          <p:cNvPr id="10" name="TextBox 9"/>
-          <p:cNvSpPr txBox="1"/>
-          <p:nvPr/>
-        </p:nvSpPr>
-        <p:spPr>
-          <a:xfrm>
-            <a:off x="6187287" y="3218688"/>
-            <a:ext cx="5181447" cy="310896"/>
-          </a:xfrm>
-          <a:prstGeom prst="rect">
-            <a:avLst/>
-          </a:prstGeom>
-          <a:noFill/>
-        </p:spPr>
-        <p:txBody>
-          <a:bodyPr wrap="square" lIns="0" rIns="0" tIns="0" bIns="0">
-            <a:spAutoFit/>
-          </a:bodyPr>
-          <a:lstStyle/>
-          <a:p>
-            <a:pPr algn="l">
-              <a:lnSpc>
-                <a:spcPct val="100000"/>
-              </a:lnSpc>
-            </a:pPr>
-            <a:r>
-              <a:rPr sz="1700" b="1">
-                <a:solidFill>
-                  <a:srgbClr val="1A2027"/>
-                </a:solidFill>
-                <a:latin typeface="Calibri"/>
-              </a:rPr>
-              <a:t>Медиасервисы</a:t>
-            </a:r>
-          </a:p>
-        </p:txBody>
-      </p:sp>
-      <p:sp>
-        <p:nvSpPr>
-          <p:cNvPr id="11" name="TextBox 10"/>
-          <p:cNvSpPr txBox="1"/>
-          <p:nvPr/>
-        </p:nvSpPr>
-        <p:spPr>
-          <a:xfrm>
-            <a:off x="6187287" y="3584448"/>
-            <a:ext cx="5181447" cy="365760"/>
-          </a:xfrm>
-          <a:prstGeom prst="rect">
-            <a:avLst/>
-          </a:prstGeom>
-          <a:noFill/>
-        </p:spPr>
-        <p:txBody>
-          <a:bodyPr wrap="square" lIns="0" rIns="0" tIns="0" bIns="0">
-            <a:spAutoFit/>
-          </a:bodyPr>
-          <a:lstStyle/>
-          <a:p>
-            <a:pPr algn="l">
-              <a:lnSpc>
-                <a:spcPct val="100000"/>
-              </a:lnSpc>
-            </a:pPr>
-            <a:r>
-              <a:rPr sz="1400" b="0">
-                <a:solidFill>
-                  <a:srgbClr val="5B6B7A"/>
-                </a:solidFill>
-                <a:latin typeface="Calibri"/>
-              </a:rPr>
-              <a:t>лента и обработка изображений</a:t>
-            </a:r>
-          </a:p>
-        </p:txBody>
-      </p:sp>
-      <p:sp>
-        <p:nvSpPr>
-          <p:cNvPr id="12" name="Rounded Rectangle 11"/>
-          <p:cNvSpPr/>
-          <p:nvPr/>
-        </p:nvSpPr>
-        <p:spPr>
-          <a:xfrm>
-            <a:off x="713232" y="4270248"/>
-            <a:ext cx="10765231" cy="1371600"/>
-          </a:xfrm>
-          <a:prstGeom prst="roundRect">
-            <a:avLst>
-              <a:gd name="adj" fmla="val 6000"/>
-            </a:avLst>
-          </a:prstGeom>
-          <a:solidFill>
-            <a:srgbClr val="F2F5F8"/>
-          </a:solidFill>
-          <a:ln>
-            <a:noFill/>
-          </a:ln>
-          <a:effectLst/>
-        </p:spPr>
-        <p:style>
-          <a:lnRef idx="1">
-            <a:schemeClr val="accent1"/>
-          </a:lnRef>
-          <a:fillRef idx="3">
-            <a:schemeClr val="accent1"/>
-          </a:fillRef>
-          <a:effectRef idx="2">
-            <a:schemeClr val="accent1"/>
-          </a:effectRef>
-          <a:fontRef idx="minor">
-            <a:schemeClr val="lt1"/>
-          </a:fontRef>
-        </p:style>
-        <p:txBody>
-          <a:bodyPr rtlCol="0" anchor="ctr"/>
-          <a:lstStyle/>
-          <a:p>
-            <a:pPr algn="ctr"/>
-          </a:p>
-        </p:txBody>
-      </p:sp>
-      <p:sp>
-        <p:nvSpPr>
-          <p:cNvPr id="13" name="TextBox 12"/>
-          <p:cNvSpPr txBox="1"/>
-          <p:nvPr/>
-        </p:nvSpPr>
-        <p:spPr>
-          <a:xfrm>
-            <a:off x="932688" y="4434840"/>
-            <a:ext cx="10326319" cy="329184"/>
-          </a:xfrm>
-          <a:prstGeom prst="rect">
-            <a:avLst/>
-          </a:prstGeom>
-          <a:noFill/>
-        </p:spPr>
-        <p:txBody>
-          <a:bodyPr wrap="square" lIns="0" rIns="0" tIns="0" bIns="0">
-            <a:spAutoFit/>
-          </a:bodyPr>
-          <a:lstStyle/>
-          <a:p>
-            <a:pPr algn="l">
-              <a:lnSpc>
-                <a:spcPct val="100000"/>
-              </a:lnSpc>
-            </a:pPr>
-            <a:r>
-              <a:rPr sz="1500" b="1">
-                <a:solidFill>
-                  <a:srgbClr val="1565C0"/>
-                </a:solidFill>
-                <a:latin typeface="Calibri"/>
-              </a:rPr>
-              <a:t>Смежное направление</a:t>
-            </a:r>
-          </a:p>
-        </p:txBody>
-      </p:sp>
-      <p:sp>
-        <p:nvSpPr>
-          <p:cNvPr id="14" name="TextBox 13"/>
-          <p:cNvSpPr txBox="1"/>
-          <p:nvPr/>
-        </p:nvSpPr>
-        <p:spPr>
-          <a:xfrm>
-            <a:off x="932688" y="4818888"/>
-            <a:ext cx="10326319" cy="713232"/>
-          </a:xfrm>
-          <a:prstGeom prst="rect">
-            <a:avLst/>
-          </a:prstGeom>
-          <a:noFill/>
-        </p:spPr>
-        <p:txBody>
-          <a:bodyPr wrap="square" lIns="0" rIns="0" tIns="0" bIns="0">
-            <a:spAutoFit/>
-          </a:bodyPr>
-          <a:lstStyle/>
-          <a:p>
-            <a:pPr algn="l">
-              <a:lnSpc>
-                <a:spcPct val="120000"/>
-              </a:lnSpc>
-            </a:pPr>
-            <a:r>
-              <a:rPr sz="1300" b="0">
-                <a:solidFill>
-                  <a:srgbClr val="5B6B7A"/>
-                </a:solidFill>
-                <a:latin typeface="Calibri"/>
-              </a:rPr>
-              <a:t>Обслуживание языковых моделей: стоимость запроса меняется на порядки в зависимости от числа токенов, а распределяют запросы всё тем же счётом соединений. Механизм тот же — но мы там ничего не измеряли и выдавать это за проверенное не будем.</a:t>
+              <a:t>Среди допустимых движков выбирается менее занятый. Именно здесь, и только здесь, обучаемая модель даёт втрое меньше пострадавших запросов, чем правило.</a:t>
             </a:r>
           </a:p>
         </p:txBody>
@@ -3911,7 +3695,7 @@
                 </a:solidFill>
                 <a:latin typeface="Calibri"/>
               </a:rPr>
-              <a:t>Модель и то, чего пока нет</a:t>
+              <a:t>Сколько это стоит клиенту</a:t>
             </a:r>
           </a:p>
         </p:txBody>
@@ -3925,7 +3709,46 @@
         <p:spPr>
           <a:xfrm>
             <a:off x="822960" y="1481328"/>
-            <a:ext cx="5090007" cy="329184"/>
+            <a:ext cx="10545775" cy="685800"/>
+          </a:xfrm>
+          <a:prstGeom prst="rect">
+            <a:avLst/>
+          </a:prstGeom>
+          <a:noFill/>
+        </p:spPr>
+        <p:txBody>
+          <a:bodyPr wrap="square" lIns="0" rIns="0" tIns="0" bIns="0">
+            <a:spAutoFit/>
+          </a:bodyPr>
+          <a:lstStyle/>
+          <a:p>
+            <a:pPr algn="l">
+              <a:lnSpc>
+                <a:spcPct val="125000"/>
+              </a:lnSpc>
+            </a:pPr>
+            <a:r>
+              <a:rPr sz="1500" b="0">
+                <a:solidFill>
+                  <a:srgbClr val="5B6B7A"/>
+                </a:solidFill>
+                <a:latin typeface="Calibri"/>
+              </a:rPr>
+              <a:t>Сравнивать пропускную способность саму по себе бессмысленно: нагрузить сильнее можно всегда, если согласиться, что люди будут ждать.</a:t>
+            </a:r>
+          </a:p>
+        </p:txBody>
+      </p:sp>
+      <p:sp>
+        <p:nvSpPr>
+          <p:cNvPr id="4" name="TextBox 3"/>
+          <p:cNvSpPr txBox="1"/>
+          <p:nvPr/>
+        </p:nvSpPr>
+        <p:spPr>
+          <a:xfrm>
+            <a:off x="822960" y="2350008"/>
+            <a:ext cx="10545775" cy="365760"/>
           </a:xfrm>
           <a:prstGeom prst="rect">
             <a:avLst/>
@@ -3944,74 +3767,905 @@
               </a:lnSpc>
             </a:pPr>
             <a:r>
-              <a:rPr sz="1700" b="1">
+              <a:rPr sz="1400" b="0">
                 <a:solidFill>
                   <a:srgbClr val="1A2027"/>
                 </a:solidFill>
                 <a:latin typeface="Calibri"/>
               </a:rPr>
-              <a:t>За что платят</a:t>
-            </a:r>
-          </a:p>
-        </p:txBody>
-      </p:sp>
-      <p:sp>
-        <p:nvSpPr>
-          <p:cNvPr id="4" name="TextBox 3"/>
-          <p:cNvSpPr txBox="1"/>
-          <p:nvPr/>
-        </p:nvSpPr>
-        <p:spPr>
-          <a:xfrm>
-            <a:off x="822960" y="1883664"/>
-            <a:ext cx="5090007" cy="2377440"/>
-          </a:xfrm>
-          <a:prstGeom prst="rect">
-            <a:avLst/>
-          </a:prstGeom>
-          <a:noFill/>
-        </p:spPr>
-        <p:txBody>
-          <a:bodyPr wrap="square" lIns="0" rIns="0" tIns="0" bIns="0">
-            <a:spAutoFit/>
-          </a:bodyPr>
-          <a:lstStyle/>
-          <a:p>
-            <a:pPr algn="l">
-              <a:lnSpc>
-                <a:spcPct val="125000"/>
+              <a:t>Осмысленный вопрос — сколько запросов система держит, не нарушая обещания по отклику:</a:t>
+            </a:r>
+          </a:p>
+        </p:txBody>
+      </p:sp>
+      <p:sp>
+        <p:nvSpPr>
+          <p:cNvPr id="5" name="TextBox 4"/>
+          <p:cNvSpPr txBox="1"/>
+          <p:nvPr/>
+        </p:nvSpPr>
+        <p:spPr>
+          <a:xfrm>
+            <a:off x="822960" y="2825496"/>
+            <a:ext cx="4640141" cy="310896"/>
+          </a:xfrm>
+          <a:prstGeom prst="rect">
+            <a:avLst/>
+          </a:prstGeom>
+          <a:noFill/>
+        </p:spPr>
+        <p:txBody>
+          <a:bodyPr wrap="square" lIns="0" rIns="0" tIns="0" bIns="0">
+            <a:spAutoFit/>
+          </a:bodyPr>
+          <a:lstStyle/>
+          <a:p>
+            <a:pPr algn="l">
+              <a:lnSpc>
+                <a:spcPct val="100000"/>
+              </a:lnSpc>
+            </a:pPr>
+            <a:r>
+              <a:rPr sz="1200" b="1">
+                <a:solidFill>
+                  <a:srgbClr val="5B6B7A"/>
+                </a:solidFill>
+                <a:latin typeface="Calibri"/>
+              </a:rPr>
+              <a:t>Обещание</a:t>
+            </a:r>
+          </a:p>
+        </p:txBody>
+      </p:sp>
+      <p:sp>
+        <p:nvSpPr>
+          <p:cNvPr id="6" name="TextBox 5"/>
+          <p:cNvSpPr txBox="1"/>
+          <p:nvPr/>
+        </p:nvSpPr>
+        <p:spPr>
+          <a:xfrm>
+            <a:off x="5463101" y="2825496"/>
+            <a:ext cx="2952817" cy="310896"/>
+          </a:xfrm>
+          <a:prstGeom prst="rect">
+            <a:avLst/>
+          </a:prstGeom>
+          <a:noFill/>
+        </p:spPr>
+        <p:txBody>
+          <a:bodyPr wrap="square" lIns="0" rIns="0" tIns="0" bIns="0">
+            <a:spAutoFit/>
+          </a:bodyPr>
+          <a:lstStyle/>
+          <a:p>
+            <a:pPr algn="l">
+              <a:lnSpc>
+                <a:spcPct val="100000"/>
+              </a:lnSpc>
+            </a:pPr>
+            <a:r>
+              <a:rPr sz="1200" b="1">
+                <a:solidFill>
+                  <a:srgbClr val="5B6B7A"/>
+                </a:solidFill>
+                <a:latin typeface="Calibri"/>
+              </a:rPr>
+              <a:t>least_conn</a:t>
+            </a:r>
+          </a:p>
+        </p:txBody>
+      </p:sp>
+      <p:sp>
+        <p:nvSpPr>
+          <p:cNvPr id="7" name="TextBox 6"/>
+          <p:cNvSpPr txBox="1"/>
+          <p:nvPr/>
+        </p:nvSpPr>
+        <p:spPr>
+          <a:xfrm>
+            <a:off x="8415918" y="2825496"/>
+            <a:ext cx="2952817" cy="310896"/>
+          </a:xfrm>
+          <a:prstGeom prst="rect">
+            <a:avLst/>
+          </a:prstGeom>
+          <a:noFill/>
+        </p:spPr>
+        <p:txBody>
+          <a:bodyPr wrap="square" lIns="0" rIns="0" tIns="0" bIns="0">
+            <a:spAutoFit/>
+          </a:bodyPr>
+          <a:lstStyle/>
+          <a:p>
+            <a:pPr algn="l">
+              <a:lnSpc>
+                <a:spcPct val="100000"/>
+              </a:lnSpc>
+            </a:pPr>
+            <a:r>
+              <a:rPr sz="1200" b="1">
+                <a:solidFill>
+                  <a:srgbClr val="5B6B7A"/>
+                </a:solidFill>
+                <a:latin typeface="Calibri"/>
+              </a:rPr>
+              <a:t>Наш модуль</a:t>
+            </a:r>
+          </a:p>
+        </p:txBody>
+      </p:sp>
+      <p:sp>
+        <p:nvSpPr>
+          <p:cNvPr id="8" name="Rounded Rectangle 7"/>
+          <p:cNvSpPr/>
+          <p:nvPr/>
+        </p:nvSpPr>
+        <p:spPr>
+          <a:xfrm>
+            <a:off x="713232" y="3145536"/>
+            <a:ext cx="10765231" cy="384048"/>
+          </a:xfrm>
+          <a:prstGeom prst="roundRect">
+            <a:avLst>
+              <a:gd name="adj" fmla="val 6000"/>
+            </a:avLst>
+          </a:prstGeom>
+          <a:solidFill>
+            <a:srgbClr val="F2F5F8"/>
+          </a:solidFill>
+          <a:ln>
+            <a:noFill/>
+          </a:ln>
+          <a:effectLst/>
+        </p:spPr>
+        <p:style>
+          <a:lnRef idx="1">
+            <a:schemeClr val="accent1"/>
+          </a:lnRef>
+          <a:fillRef idx="3">
+            <a:schemeClr val="accent1"/>
+          </a:fillRef>
+          <a:effectRef idx="2">
+            <a:schemeClr val="accent1"/>
+          </a:effectRef>
+          <a:fontRef idx="minor">
+            <a:schemeClr val="lt1"/>
+          </a:fontRef>
+        </p:style>
+        <p:txBody>
+          <a:bodyPr rtlCol="0" anchor="ctr"/>
+          <a:lstStyle/>
+          <a:p>
+            <a:pPr algn="ctr"/>
+          </a:p>
+        </p:txBody>
+      </p:sp>
+      <p:sp>
+        <p:nvSpPr>
+          <p:cNvPr id="9" name="TextBox 8"/>
+          <p:cNvSpPr txBox="1"/>
+          <p:nvPr/>
+        </p:nvSpPr>
+        <p:spPr>
+          <a:xfrm>
+            <a:off x="822960" y="3218688"/>
+            <a:ext cx="4640141" cy="329184"/>
+          </a:xfrm>
+          <a:prstGeom prst="rect">
+            <a:avLst/>
+          </a:prstGeom>
+          <a:noFill/>
+        </p:spPr>
+        <p:txBody>
+          <a:bodyPr wrap="square" lIns="0" rIns="0" tIns="0" bIns="0">
+            <a:spAutoFit/>
+          </a:bodyPr>
+          <a:lstStyle/>
+          <a:p>
+            <a:pPr algn="l">
+              <a:lnSpc>
+                <a:spcPct val="100000"/>
               </a:lnSpc>
             </a:pPr>
             <a:r>
               <a:rPr sz="1300" b="0">
                 <a:solidFill>
+                  <a:srgbClr val="1A2027"/>
+                </a:solidFill>
+                <a:latin typeface="Calibri"/>
+              </a:rPr>
+              <a:t>p95 не хуже 100 мс</a:t>
+            </a:r>
+          </a:p>
+        </p:txBody>
+      </p:sp>
+      <p:sp>
+        <p:nvSpPr>
+          <p:cNvPr id="10" name="TextBox 9"/>
+          <p:cNvSpPr txBox="1"/>
+          <p:nvPr/>
+        </p:nvSpPr>
+        <p:spPr>
+          <a:xfrm>
+            <a:off x="5463101" y="3218688"/>
+            <a:ext cx="2952817" cy="329184"/>
+          </a:xfrm>
+          <a:prstGeom prst="rect">
+            <a:avLst/>
+          </a:prstGeom>
+          <a:noFill/>
+        </p:spPr>
+        <p:txBody>
+          <a:bodyPr wrap="square" lIns="0" rIns="0" tIns="0" bIns="0">
+            <a:spAutoFit/>
+          </a:bodyPr>
+          <a:lstStyle/>
+          <a:p>
+            <a:pPr algn="l">
+              <a:lnSpc>
+                <a:spcPct val="100000"/>
+              </a:lnSpc>
+            </a:pPr>
+            <a:r>
+              <a:rPr sz="1300" b="0">
+                <a:solidFill>
+                  <a:srgbClr val="1A2027"/>
+                </a:solidFill>
+                <a:latin typeface="Calibri"/>
+              </a:rPr>
+              <a:t>37,8 запр./с</a:t>
+            </a:r>
+          </a:p>
+        </p:txBody>
+      </p:sp>
+      <p:sp>
+        <p:nvSpPr>
+          <p:cNvPr id="11" name="TextBox 10"/>
+          <p:cNvSpPr txBox="1"/>
+          <p:nvPr/>
+        </p:nvSpPr>
+        <p:spPr>
+          <a:xfrm>
+            <a:off x="8415918" y="3218688"/>
+            <a:ext cx="2952817" cy="329184"/>
+          </a:xfrm>
+          <a:prstGeom prst="rect">
+            <a:avLst/>
+          </a:prstGeom>
+          <a:noFill/>
+        </p:spPr>
+        <p:txBody>
+          <a:bodyPr wrap="square" lIns="0" rIns="0" tIns="0" bIns="0">
+            <a:spAutoFit/>
+          </a:bodyPr>
+          <a:lstStyle/>
+          <a:p>
+            <a:pPr algn="l">
+              <a:lnSpc>
+                <a:spcPct val="100000"/>
+              </a:lnSpc>
+            </a:pPr>
+            <a:r>
+              <a:rPr sz="1300" b="1">
+                <a:solidFill>
+                  <a:srgbClr val="2E7D32"/>
+                </a:solidFill>
+                <a:latin typeface="Calibri"/>
+              </a:rPr>
+              <a:t>59,2 запр./с</a:t>
+            </a:r>
+          </a:p>
+        </p:txBody>
+      </p:sp>
+      <p:sp>
+        <p:nvSpPr>
+          <p:cNvPr id="12" name="Rounded Rectangle 11"/>
+          <p:cNvSpPr/>
+          <p:nvPr/>
+        </p:nvSpPr>
+        <p:spPr>
+          <a:xfrm>
+            <a:off x="713232" y="3529584"/>
+            <a:ext cx="10765231" cy="384048"/>
+          </a:xfrm>
+          <a:prstGeom prst="roundRect">
+            <a:avLst>
+              <a:gd name="adj" fmla="val 6000"/>
+            </a:avLst>
+          </a:prstGeom>
+          <a:solidFill>
+            <a:srgbClr val="FFFFFF"/>
+          </a:solidFill>
+          <a:ln>
+            <a:noFill/>
+          </a:ln>
+          <a:effectLst/>
+        </p:spPr>
+        <p:style>
+          <a:lnRef idx="1">
+            <a:schemeClr val="accent1"/>
+          </a:lnRef>
+          <a:fillRef idx="3">
+            <a:schemeClr val="accent1"/>
+          </a:fillRef>
+          <a:effectRef idx="2">
+            <a:schemeClr val="accent1"/>
+          </a:effectRef>
+          <a:fontRef idx="minor">
+            <a:schemeClr val="lt1"/>
+          </a:fontRef>
+        </p:style>
+        <p:txBody>
+          <a:bodyPr rtlCol="0" anchor="ctr"/>
+          <a:lstStyle/>
+          <a:p>
+            <a:pPr algn="ctr"/>
+          </a:p>
+        </p:txBody>
+      </p:sp>
+      <p:sp>
+        <p:nvSpPr>
+          <p:cNvPr id="13" name="TextBox 12"/>
+          <p:cNvSpPr txBox="1"/>
+          <p:nvPr/>
+        </p:nvSpPr>
+        <p:spPr>
+          <a:xfrm>
+            <a:off x="822960" y="3602736"/>
+            <a:ext cx="4640141" cy="329184"/>
+          </a:xfrm>
+          <a:prstGeom prst="rect">
+            <a:avLst/>
+          </a:prstGeom>
+          <a:noFill/>
+        </p:spPr>
+        <p:txBody>
+          <a:bodyPr wrap="square" lIns="0" rIns="0" tIns="0" bIns="0">
+            <a:spAutoFit/>
+          </a:bodyPr>
+          <a:lstStyle/>
+          <a:p>
+            <a:pPr algn="l">
+              <a:lnSpc>
+                <a:spcPct val="100000"/>
+              </a:lnSpc>
+            </a:pPr>
+            <a:r>
+              <a:rPr sz="1300" b="0">
+                <a:solidFill>
+                  <a:srgbClr val="1A2027"/>
+                </a:solidFill>
+                <a:latin typeface="Calibri"/>
+              </a:rPr>
+              <a:t>p95 не хуже 200 мс</a:t>
+            </a:r>
+          </a:p>
+        </p:txBody>
+      </p:sp>
+      <p:sp>
+        <p:nvSpPr>
+          <p:cNvPr id="14" name="TextBox 13"/>
+          <p:cNvSpPr txBox="1"/>
+          <p:nvPr/>
+        </p:nvSpPr>
+        <p:spPr>
+          <a:xfrm>
+            <a:off x="5463101" y="3602736"/>
+            <a:ext cx="2952817" cy="329184"/>
+          </a:xfrm>
+          <a:prstGeom prst="rect">
+            <a:avLst/>
+          </a:prstGeom>
+          <a:noFill/>
+        </p:spPr>
+        <p:txBody>
+          <a:bodyPr wrap="square" lIns="0" rIns="0" tIns="0" bIns="0">
+            <a:spAutoFit/>
+          </a:bodyPr>
+          <a:lstStyle/>
+          <a:p>
+            <a:pPr algn="l">
+              <a:lnSpc>
+                <a:spcPct val="100000"/>
+              </a:lnSpc>
+            </a:pPr>
+            <a:r>
+              <a:rPr sz="1300" b="1">
+                <a:solidFill>
                   <a:srgbClr val="5B6B7A"/>
                 </a:solidFill>
                 <a:latin typeface="Calibri"/>
               </a:rPr>
-              <a:t>Меньше серверов при том же качестве отклика: сегодня проблему закрывают избыточностью.</a:t>
-            </a:r>
-          </a:p>
-          <a:p>
-            <a:pPr algn="l">
-              <a:lnSpc>
-                <a:spcPct val="125000"/>
+              <a:t>62,3 запр./с</a:t>
+            </a:r>
+          </a:p>
+        </p:txBody>
+      </p:sp>
+      <p:sp>
+        <p:nvSpPr>
+          <p:cNvPr id="15" name="TextBox 14"/>
+          <p:cNvSpPr txBox="1"/>
+          <p:nvPr/>
+        </p:nvSpPr>
+        <p:spPr>
+          <a:xfrm>
+            <a:off x="8415918" y="3602736"/>
+            <a:ext cx="2952817" cy="329184"/>
+          </a:xfrm>
+          <a:prstGeom prst="rect">
+            <a:avLst/>
+          </a:prstGeom>
+          <a:noFill/>
+        </p:spPr>
+        <p:txBody>
+          <a:bodyPr wrap="square" lIns="0" rIns="0" tIns="0" bIns="0">
+            <a:spAutoFit/>
+          </a:bodyPr>
+          <a:lstStyle/>
+          <a:p>
+            <a:pPr algn="l">
+              <a:lnSpc>
+                <a:spcPct val="100000"/>
               </a:lnSpc>
             </a:pPr>
             <a:r>
               <a:rPr sz="1300" b="0">
                 <a:solidFill>
+                  <a:srgbClr val="1A2027"/>
+                </a:solidFill>
+                <a:latin typeface="Calibri"/>
+              </a:rPr>
+              <a:t>59,2 запр./с</a:t>
+            </a:r>
+          </a:p>
+        </p:txBody>
+      </p:sp>
+      <p:sp>
+        <p:nvSpPr>
+          <p:cNvPr id="16" name="Rounded Rectangle 15"/>
+          <p:cNvSpPr/>
+          <p:nvPr/>
+        </p:nvSpPr>
+        <p:spPr>
+          <a:xfrm>
+            <a:off x="822960" y="4197096"/>
+            <a:ext cx="3344570" cy="1417320"/>
+          </a:xfrm>
+          <a:prstGeom prst="roundRect">
+            <a:avLst>
+              <a:gd name="adj" fmla="val 6000"/>
+            </a:avLst>
+          </a:prstGeom>
+          <a:solidFill>
+            <a:srgbClr val="F2F5F8"/>
+          </a:solidFill>
+          <a:ln>
+            <a:noFill/>
+          </a:ln>
+          <a:effectLst/>
+        </p:spPr>
+        <p:style>
+          <a:lnRef idx="1">
+            <a:schemeClr val="accent1"/>
+          </a:lnRef>
+          <a:fillRef idx="3">
+            <a:schemeClr val="accent1"/>
+          </a:fillRef>
+          <a:effectRef idx="2">
+            <a:schemeClr val="accent1"/>
+          </a:effectRef>
+          <a:fontRef idx="minor">
+            <a:schemeClr val="lt1"/>
+          </a:fontRef>
+        </p:style>
+        <p:txBody>
+          <a:bodyPr rtlCol="0" anchor="ctr"/>
+          <a:lstStyle/>
+          <a:p>
+            <a:pPr algn="ctr"/>
+          </a:p>
+        </p:txBody>
+      </p:sp>
+      <p:sp>
+        <p:nvSpPr>
+          <p:cNvPr id="17" name="TextBox 16"/>
+          <p:cNvSpPr txBox="1"/>
+          <p:nvPr/>
+        </p:nvSpPr>
+        <p:spPr>
+          <a:xfrm>
+            <a:off x="1042416" y="4379976"/>
+            <a:ext cx="2905658" cy="603504"/>
+          </a:xfrm>
+          <a:prstGeom prst="rect">
+            <a:avLst/>
+          </a:prstGeom>
+          <a:noFill/>
+        </p:spPr>
+        <p:txBody>
+          <a:bodyPr wrap="square" lIns="0" rIns="0" tIns="0" bIns="0">
+            <a:spAutoFit/>
+          </a:bodyPr>
+          <a:lstStyle/>
+          <a:p>
+            <a:pPr algn="l">
+              <a:lnSpc>
+                <a:spcPct val="100000"/>
+              </a:lnSpc>
+            </a:pPr>
+            <a:r>
+              <a:rPr sz="3000" b="1">
+                <a:solidFill>
+                  <a:srgbClr val="2E7D32"/>
+                </a:solidFill>
+                <a:latin typeface="Calibri"/>
+              </a:rPr>
+              <a:t>+57 %</a:t>
+            </a:r>
+          </a:p>
+        </p:txBody>
+      </p:sp>
+      <p:sp>
+        <p:nvSpPr>
+          <p:cNvPr id="18" name="TextBox 17"/>
+          <p:cNvSpPr txBox="1"/>
+          <p:nvPr/>
+        </p:nvSpPr>
+        <p:spPr>
+          <a:xfrm>
+            <a:off x="1042416" y="5001768"/>
+            <a:ext cx="2905658" cy="484632"/>
+          </a:xfrm>
+          <a:prstGeom prst="rect">
+            <a:avLst/>
+          </a:prstGeom>
+          <a:noFill/>
+        </p:spPr>
+        <p:txBody>
+          <a:bodyPr wrap="square" lIns="0" rIns="0" tIns="0" bIns="0">
+            <a:spAutoFit/>
+          </a:bodyPr>
+          <a:lstStyle/>
+          <a:p>
+            <a:pPr algn="l">
+              <a:lnSpc>
+                <a:spcPct val="115000"/>
+              </a:lnSpc>
+            </a:pPr>
+            <a:r>
+              <a:rPr sz="1200" b="0">
+                <a:solidFill>
                   <a:srgbClr val="5B6B7A"/>
                 </a:solidFill>
                 <a:latin typeface="Calibri"/>
               </a:rPr>
-              <a:t/>
-            </a:r>
-          </a:p>
-          <a:p>
-            <a:pPr algn="l">
-              <a:lnSpc>
-                <a:spcPct val="125000"/>
+              <a:t>нагрузки при строгом</a:t>
+            </a:r>
+          </a:p>
+          <a:p>
+            <a:pPr algn="l">
+              <a:lnSpc>
+                <a:spcPct val="115000"/>
+              </a:lnSpc>
+            </a:pPr>
+            <a:r>
+              <a:rPr sz="1200" b="0">
+                <a:solidFill>
+                  <a:srgbClr val="5B6B7A"/>
+                </a:solidFill>
+                <a:latin typeface="Calibri"/>
+              </a:rPr>
+              <a:t>обещании по отклику</a:t>
+            </a:r>
+          </a:p>
+        </p:txBody>
+      </p:sp>
+      <p:sp>
+        <p:nvSpPr>
+          <p:cNvPr id="19" name="Rounded Rectangle 18"/>
+          <p:cNvSpPr/>
+          <p:nvPr/>
+        </p:nvSpPr>
+        <p:spPr>
+          <a:xfrm>
+            <a:off x="4423562" y="4197096"/>
+            <a:ext cx="3344570" cy="1417320"/>
+          </a:xfrm>
+          <a:prstGeom prst="roundRect">
+            <a:avLst>
+              <a:gd name="adj" fmla="val 6000"/>
+            </a:avLst>
+          </a:prstGeom>
+          <a:solidFill>
+            <a:srgbClr val="F2F5F8"/>
+          </a:solidFill>
+          <a:ln>
+            <a:noFill/>
+          </a:ln>
+          <a:effectLst/>
+        </p:spPr>
+        <p:style>
+          <a:lnRef idx="1">
+            <a:schemeClr val="accent1"/>
+          </a:lnRef>
+          <a:fillRef idx="3">
+            <a:schemeClr val="accent1"/>
+          </a:fillRef>
+          <a:effectRef idx="2">
+            <a:schemeClr val="accent1"/>
+          </a:effectRef>
+          <a:fontRef idx="minor">
+            <a:schemeClr val="lt1"/>
+          </a:fontRef>
+        </p:style>
+        <p:txBody>
+          <a:bodyPr rtlCol="0" anchor="ctr"/>
+          <a:lstStyle/>
+          <a:p>
+            <a:pPr algn="ctr"/>
+          </a:p>
+        </p:txBody>
+      </p:sp>
+      <p:sp>
+        <p:nvSpPr>
+          <p:cNvPr id="20" name="TextBox 19"/>
+          <p:cNvSpPr txBox="1"/>
+          <p:nvPr/>
+        </p:nvSpPr>
+        <p:spPr>
+          <a:xfrm>
+            <a:off x="4643018" y="4379976"/>
+            <a:ext cx="2905658" cy="603504"/>
+          </a:xfrm>
+          <a:prstGeom prst="rect">
+            <a:avLst/>
+          </a:prstGeom>
+          <a:noFill/>
+        </p:spPr>
+        <p:txBody>
+          <a:bodyPr wrap="square" lIns="0" rIns="0" tIns="0" bIns="0">
+            <a:spAutoFit/>
+          </a:bodyPr>
+          <a:lstStyle/>
+          <a:p>
+            <a:pPr algn="l">
+              <a:lnSpc>
+                <a:spcPct val="100000"/>
+              </a:lnSpc>
+            </a:pPr>
+            <a:r>
+              <a:rPr sz="3000" b="1">
+                <a:solidFill>
+                  <a:srgbClr val="2E7D32"/>
+                </a:solidFill>
+                <a:latin typeface="Calibri"/>
+              </a:rPr>
+              <a:t>657 тыс. ₽</a:t>
+            </a:r>
+          </a:p>
+        </p:txBody>
+      </p:sp>
+      <p:sp>
+        <p:nvSpPr>
+          <p:cNvPr id="21" name="TextBox 20"/>
+          <p:cNvSpPr txBox="1"/>
+          <p:nvPr/>
+        </p:nvSpPr>
+        <p:spPr>
+          <a:xfrm>
+            <a:off x="4643018" y="5001768"/>
+            <a:ext cx="2905658" cy="484632"/>
+          </a:xfrm>
+          <a:prstGeom prst="rect">
+            <a:avLst/>
+          </a:prstGeom>
+          <a:noFill/>
+        </p:spPr>
+        <p:txBody>
+          <a:bodyPr wrap="square" lIns="0" rIns="0" tIns="0" bIns="0">
+            <a:spAutoFit/>
+          </a:bodyPr>
+          <a:lstStyle/>
+          <a:p>
+            <a:pPr algn="l">
+              <a:lnSpc>
+                <a:spcPct val="115000"/>
+              </a:lnSpc>
+            </a:pPr>
+            <a:r>
+              <a:rPr sz="1200" b="0">
+                <a:solidFill>
+                  <a:srgbClr val="5B6B7A"/>
+                </a:solidFill>
+                <a:latin typeface="Calibri"/>
+              </a:rPr>
+              <a:t>экономии в год</a:t>
+            </a:r>
+          </a:p>
+          <a:p>
+            <a:pPr algn="l">
+              <a:lnSpc>
+                <a:spcPct val="115000"/>
+              </a:lnSpc>
+            </a:pPr>
+            <a:r>
+              <a:rPr sz="1200" b="0">
+                <a:solidFill>
+                  <a:srgbClr val="5B6B7A"/>
+                </a:solidFill>
+                <a:latin typeface="Calibri"/>
+              </a:rPr>
+              <a:t>при 1000 запросах в секунду</a:t>
+            </a:r>
+          </a:p>
+        </p:txBody>
+      </p:sp>
+      <p:sp>
+        <p:nvSpPr>
+          <p:cNvPr id="22" name="Rounded Rectangle 21"/>
+          <p:cNvSpPr/>
+          <p:nvPr/>
+        </p:nvSpPr>
+        <p:spPr>
+          <a:xfrm>
+            <a:off x="8024164" y="4197096"/>
+            <a:ext cx="3344570" cy="1417320"/>
+          </a:xfrm>
+          <a:prstGeom prst="roundRect">
+            <a:avLst>
+              <a:gd name="adj" fmla="val 6000"/>
+            </a:avLst>
+          </a:prstGeom>
+          <a:solidFill>
+            <a:srgbClr val="F2F5F8"/>
+          </a:solidFill>
+          <a:ln>
+            <a:noFill/>
+          </a:ln>
+          <a:effectLst/>
+        </p:spPr>
+        <p:style>
+          <a:lnRef idx="1">
+            <a:schemeClr val="accent1"/>
+          </a:lnRef>
+          <a:fillRef idx="3">
+            <a:schemeClr val="accent1"/>
+          </a:fillRef>
+          <a:effectRef idx="2">
+            <a:schemeClr val="accent1"/>
+          </a:effectRef>
+          <a:fontRef idx="minor">
+            <a:schemeClr val="lt1"/>
+          </a:fontRef>
+        </p:style>
+        <p:txBody>
+          <a:bodyPr rtlCol="0" anchor="ctr"/>
+          <a:lstStyle/>
+          <a:p>
+            <a:pPr algn="ctr"/>
+          </a:p>
+        </p:txBody>
+      </p:sp>
+      <p:sp>
+        <p:nvSpPr>
+          <p:cNvPr id="23" name="TextBox 22"/>
+          <p:cNvSpPr txBox="1"/>
+          <p:nvPr/>
+        </p:nvSpPr>
+        <p:spPr>
+          <a:xfrm>
+            <a:off x="8243620" y="4379976"/>
+            <a:ext cx="2905658" cy="603504"/>
+          </a:xfrm>
+          <a:prstGeom prst="rect">
+            <a:avLst/>
+          </a:prstGeom>
+          <a:noFill/>
+        </p:spPr>
+        <p:txBody>
+          <a:bodyPr wrap="square" lIns="0" rIns="0" tIns="0" bIns="0">
+            <a:spAutoFit/>
+          </a:bodyPr>
+          <a:lstStyle/>
+          <a:p>
+            <a:pPr algn="l">
+              <a:lnSpc>
+                <a:spcPct val="100000"/>
+              </a:lnSpc>
+            </a:pPr>
+            <a:r>
+              <a:rPr sz="3000" b="1">
+                <a:solidFill>
+                  <a:srgbClr val="C62828"/>
+                </a:solidFill>
+                <a:latin typeface="Calibri"/>
+              </a:rPr>
+              <a:t>0 ₽</a:t>
+            </a:r>
+          </a:p>
+        </p:txBody>
+      </p:sp>
+      <p:sp>
+        <p:nvSpPr>
+          <p:cNvPr id="24" name="TextBox 23"/>
+          <p:cNvSpPr txBox="1"/>
+          <p:nvPr/>
+        </p:nvSpPr>
+        <p:spPr>
+          <a:xfrm>
+            <a:off x="8243620" y="5001768"/>
+            <a:ext cx="2905658" cy="484632"/>
+          </a:xfrm>
+          <a:prstGeom prst="rect">
+            <a:avLst/>
+          </a:prstGeom>
+          <a:noFill/>
+        </p:spPr>
+        <p:txBody>
+          <a:bodyPr wrap="square" lIns="0" rIns="0" tIns="0" bIns="0">
+            <a:spAutoFit/>
+          </a:bodyPr>
+          <a:lstStyle/>
+          <a:p>
+            <a:pPr algn="l">
+              <a:lnSpc>
+                <a:spcPct val="115000"/>
+              </a:lnSpc>
+            </a:pPr>
+            <a:r>
+              <a:rPr sz="1200" b="0">
+                <a:solidFill>
+                  <a:srgbClr val="5B6B7A"/>
+                </a:solidFill>
+                <a:latin typeface="Calibri"/>
+              </a:rPr>
+              <a:t>экономии при мягком</a:t>
+            </a:r>
+          </a:p>
+          <a:p>
+            <a:pPr algn="l">
+              <a:lnSpc>
+                <a:spcPct val="115000"/>
+              </a:lnSpc>
+            </a:pPr>
+            <a:r>
+              <a:rPr sz="1200" b="0">
+                <a:solidFill>
+                  <a:srgbClr val="5B6B7A"/>
+                </a:solidFill>
+                <a:latin typeface="Calibri"/>
+              </a:rPr>
+              <a:t>обещании — продавать не надо</a:t>
+            </a:r>
+          </a:p>
+        </p:txBody>
+      </p:sp>
+      <p:sp>
+        <p:nvSpPr>
+          <p:cNvPr id="25" name="TextBox 24"/>
+          <p:cNvSpPr txBox="1"/>
+          <p:nvPr/>
+        </p:nvSpPr>
+        <p:spPr>
+          <a:xfrm>
+            <a:off x="822960" y="5843016"/>
+            <a:ext cx="10545775" cy="457200"/>
+          </a:xfrm>
+          <a:prstGeom prst="rect">
+            <a:avLst/>
+          </a:prstGeom>
+          <a:noFill/>
+        </p:spPr>
+        <p:txBody>
+          <a:bodyPr wrap="square" lIns="0" rIns="0" tIns="0" bIns="0">
+            <a:spAutoFit/>
+          </a:bodyPr>
+          <a:lstStyle/>
+          <a:p>
+            <a:pPr algn="l">
+              <a:lnSpc>
+                <a:spcPct val="120000"/>
               </a:lnSpc>
             </a:pPr>
             <a:r>
@@ -4021,213 +4675,7 @@
                 </a:solidFill>
                 <a:latin typeface="Calibri"/>
               </a:rPr>
-              <a:t>Меньше работы инженеров: альтернатива — вручную выносить тяжёлые операции в отдельные сервисы, это месяцы работы команды.</a:t>
-            </a:r>
-          </a:p>
-          <a:p>
-            <a:pPr algn="l">
-              <a:lnSpc>
-                <a:spcPct val="125000"/>
-              </a:lnSpc>
-            </a:pPr>
-            <a:r>
-              <a:rPr sz="1300" b="0">
-                <a:solidFill>
-                  <a:srgbClr val="5B6B7A"/>
-                </a:solidFill>
-                <a:latin typeface="Calibri"/>
-              </a:rPr>
-              <a:t/>
-            </a:r>
-          </a:p>
-          <a:p>
-            <a:pPr algn="l">
-              <a:lnSpc>
-                <a:spcPct val="125000"/>
-              </a:lnSpc>
-            </a:pPr>
-            <a:r>
-              <a:rPr sz="1300" b="0">
-                <a:solidFill>
-                  <a:srgbClr val="5B6B7A"/>
-                </a:solidFill>
-                <a:latin typeface="Calibri"/>
-              </a:rPr>
-              <a:t>Открытое ядро: диагностика и маршрутизатор открыты и служат доказательством; платное — панель управления, интеграции с Envoy и Kubernetes, поддержка.</a:t>
-            </a:r>
-          </a:p>
-        </p:txBody>
-      </p:sp>
-      <p:sp>
-        <p:nvSpPr>
-          <p:cNvPr id="5" name="TextBox 4"/>
-          <p:cNvSpPr txBox="1"/>
-          <p:nvPr/>
-        </p:nvSpPr>
-        <p:spPr>
-          <a:xfrm>
-            <a:off x="6278727" y="1481328"/>
-            <a:ext cx="5090007" cy="329184"/>
-          </a:xfrm>
-          <a:prstGeom prst="rect">
-            <a:avLst/>
-          </a:prstGeom>
-          <a:noFill/>
-        </p:spPr>
-        <p:txBody>
-          <a:bodyPr wrap="square" lIns="0" rIns="0" tIns="0" bIns="0">
-            <a:spAutoFit/>
-          </a:bodyPr>
-          <a:lstStyle/>
-          <a:p>
-            <a:pPr algn="l">
-              <a:lnSpc>
-                <a:spcPct val="100000"/>
-              </a:lnSpc>
-            </a:pPr>
-            <a:r>
-              <a:rPr sz="1700" b="1">
-                <a:solidFill>
-                  <a:srgbClr val="C62828"/>
-                </a:solidFill>
-                <a:latin typeface="Calibri"/>
-              </a:rPr>
-              <a:t>Чего пока нет</a:t>
-            </a:r>
-          </a:p>
-        </p:txBody>
-      </p:sp>
-      <p:sp>
-        <p:nvSpPr>
-          <p:cNvPr id="6" name="TextBox 5"/>
-          <p:cNvSpPr txBox="1"/>
-          <p:nvPr/>
-        </p:nvSpPr>
-        <p:spPr>
-          <a:xfrm>
-            <a:off x="6278727" y="1883664"/>
-            <a:ext cx="5090007" cy="2377440"/>
-          </a:xfrm>
-          <a:prstGeom prst="rect">
-            <a:avLst/>
-          </a:prstGeom>
-          <a:noFill/>
-        </p:spPr>
-        <p:txBody>
-          <a:bodyPr wrap="square" lIns="0" rIns="0" tIns="0" bIns="0">
-            <a:spAutoFit/>
-          </a:bodyPr>
-          <a:lstStyle/>
-          <a:p>
-            <a:pPr algn="l">
-              <a:lnSpc>
-                <a:spcPct val="125000"/>
-              </a:lnSpc>
-            </a:pPr>
-            <a:r>
-              <a:rPr sz="1300" b="0">
-                <a:solidFill>
-                  <a:srgbClr val="5B6B7A"/>
-                </a:solidFill>
-                <a:latin typeface="Calibri"/>
-              </a:rPr>
-              <a:t>Ни одного платящего клиента. Цену никто не подтверждал.</a:t>
-            </a:r>
-          </a:p>
-          <a:p>
-            <a:pPr algn="l">
-              <a:lnSpc>
-                <a:spcPct val="125000"/>
-              </a:lnSpc>
-            </a:pPr>
-            <a:r>
-              <a:rPr sz="1300" b="0">
-                <a:solidFill>
-                  <a:srgbClr val="5B6B7A"/>
-                </a:solidFill>
-                <a:latin typeface="Calibri"/>
-              </a:rPr>
-              <a:t/>
-            </a:r>
-          </a:p>
-          <a:p>
-            <a:pPr algn="l">
-              <a:lnSpc>
-                <a:spcPct val="125000"/>
-              </a:lnSpc>
-            </a:pPr>
-            <a:r>
-              <a:rPr sz="1300" b="0">
-                <a:solidFill>
-                  <a:srgbClr val="5B6B7A"/>
-                </a:solidFill>
-                <a:latin typeface="Calibri"/>
-              </a:rPr>
-              <a:t>Эффект на боевом трафике настоящей компании не проверен: все замеры сделаны на одной машине.</a:t>
-            </a:r>
-          </a:p>
-          <a:p>
-            <a:pPr algn="l">
-              <a:lnSpc>
-                <a:spcPct val="125000"/>
-              </a:lnSpc>
-            </a:pPr>
-            <a:r>
-              <a:rPr sz="1300" b="0">
-                <a:solidFill>
-                  <a:srgbClr val="5B6B7A"/>
-                </a:solidFill>
-                <a:latin typeface="Calibri"/>
-              </a:rPr>
-              <a:t/>
-            </a:r>
-          </a:p>
-          <a:p>
-            <a:pPr algn="l">
-              <a:lnSpc>
-                <a:spcPct val="125000"/>
-              </a:lnSpc>
-            </a:pPr>
-            <a:r>
-              <a:rPr sz="1300" b="0">
-                <a:solidFill>
-                  <a:srgbClr val="5B6B7A"/>
-                </a:solidFill>
-                <a:latin typeface="Calibri"/>
-              </a:rPr>
-              <a:t>Размер рынка не оценён. Поведение при масштабировании на много обработчиков не измерено.</a:t>
-            </a:r>
-          </a:p>
-          <a:p>
-            <a:pPr algn="l">
-              <a:lnSpc>
-                <a:spcPct val="125000"/>
-              </a:lnSpc>
-            </a:pPr>
-            <a:r>
-              <a:rPr sz="1300" b="0">
-                <a:solidFill>
-                  <a:srgbClr val="5B6B7A"/>
-                </a:solidFill>
-                <a:latin typeface="Calibri"/>
-              </a:rPr>
-              <a:t/>
-            </a:r>
-          </a:p>
-          <a:p>
-            <a:pPr algn="l">
-              <a:lnSpc>
-                <a:spcPct val="125000"/>
-              </a:lnSpc>
-            </a:pPr>
-            <a:r>
-              <a:rPr sz="1300" b="0">
-                <a:solidFill>
-                  <a:srgbClr val="5B6B7A"/>
-                </a:solidFill>
-                <a:latin typeface="Calibri"/>
-              </a:rPr>
-              <a:t>Это гипотезы, а не результаты, и мы их так и называем.</a:t>
+              <a:t>Цены — публичный прейскурант Yandex Cloud. Последнее число не оговорка мелким шрифтом: из него следует, кому этот продукт не нужен.</a:t>
             </a:r>
           </a:p>
         </p:txBody>
@@ -4241,6 +4689,943 @@
 </file>
 
 <file path=ppt/slides/slide12.xml><?xml version="1.0" encoding="utf-8"?>
+<p:sld xmlns:a="http://schemas.openxmlformats.org/drawingml/2006/main" xmlns:p="http://schemas.openxmlformats.org/presentationml/2006/main" xmlns:r="http://schemas.openxmlformats.org/officeDocument/2006/relationships">
+  <p:cSld>
+    <p:bg>
+      <p:bgPr>
+        <a:solidFill>
+          <a:srgbClr val="FFFFFF"/>
+        </a:solidFill>
+        <a:effectLst/>
+      </p:bgPr>
+    </p:bg>
+    <p:spTree>
+      <p:nvGrpSpPr>
+        <p:cNvPr id="1" name=""/>
+        <p:cNvGrpSpPr/>
+        <p:nvPr/>
+      </p:nvGrpSpPr>
+      <p:grpSpPr/>
+      <p:sp>
+        <p:nvSpPr>
+          <p:cNvPr id="2" name="TextBox 1"/>
+          <p:cNvSpPr txBox="1"/>
+          <p:nvPr/>
+        </p:nvSpPr>
+        <p:spPr>
+          <a:xfrm>
+            <a:off x="822960" y="566928"/>
+            <a:ext cx="10545775" cy="868680"/>
+          </a:xfrm>
+          <a:prstGeom prst="rect">
+            <a:avLst/>
+          </a:prstGeom>
+          <a:noFill/>
+        </p:spPr>
+        <p:txBody>
+          <a:bodyPr wrap="square" lIns="0" rIns="0" tIns="0" bIns="0">
+            <a:spAutoFit/>
+          </a:bodyPr>
+          <a:lstStyle/>
+          <a:p>
+            <a:pPr algn="l">
+              <a:lnSpc>
+                <a:spcPct val="100000"/>
+              </a:lnSpc>
+            </a:pPr>
+            <a:r>
+              <a:rPr sz="3000" b="1">
+                <a:solidFill>
+                  <a:srgbClr val="1A2027"/>
+                </a:solidFill>
+                <a:latin typeface="Calibri"/>
+              </a:rPr>
+              <a:t>Кому это нужно</a:t>
+            </a:r>
+          </a:p>
+        </p:txBody>
+      </p:sp>
+      <p:sp>
+        <p:nvSpPr>
+          <p:cNvPr id="3" name="TextBox 2"/>
+          <p:cNvSpPr txBox="1"/>
+          <p:nvPr/>
+        </p:nvSpPr>
+        <p:spPr>
+          <a:xfrm>
+            <a:off x="822960" y="1481328"/>
+            <a:ext cx="10545775" cy="685800"/>
+          </a:xfrm>
+          <a:prstGeom prst="rect">
+            <a:avLst/>
+          </a:prstGeom>
+          <a:noFill/>
+        </p:spPr>
+        <p:txBody>
+          <a:bodyPr wrap="square" lIns="0" rIns="0" tIns="0" bIns="0">
+            <a:spAutoFit/>
+          </a:bodyPr>
+          <a:lstStyle/>
+          <a:p>
+            <a:pPr algn="l">
+              <a:lnSpc>
+                <a:spcPct val="125000"/>
+              </a:lnSpc>
+            </a:pPr>
+            <a:r>
+              <a:rPr sz="1500" b="0">
+                <a:solidFill>
+                  <a:srgbClr val="5B6B7A"/>
+                </a:solidFill>
+                <a:latin typeface="Calibri"/>
+              </a:rPr>
+              <a:t>Признак клиента виден сразу: в одном API соседствуют операции, различающиеся по стоимости на порядок,</a:t>
+            </a:r>
+          </a:p>
+          <a:p>
+            <a:pPr algn="l">
+              <a:lnSpc>
+                <a:spcPct val="125000"/>
+              </a:lnSpc>
+            </a:pPr>
+            <a:r>
+              <a:rPr sz="1500" b="0">
+                <a:solidFill>
+                  <a:srgbClr val="5B6B7A"/>
+                </a:solidFill>
+                <a:latin typeface="Calibri"/>
+              </a:rPr>
+              <a:t>и команда уже столкнулась с необъяснимыми подтормаживаниями.</a:t>
+            </a:r>
+          </a:p>
+        </p:txBody>
+      </p:sp>
+      <p:sp>
+        <p:nvSpPr>
+          <p:cNvPr id="4" name="TextBox 3"/>
+          <p:cNvSpPr txBox="1"/>
+          <p:nvPr/>
+        </p:nvSpPr>
+        <p:spPr>
+          <a:xfrm>
+            <a:off x="822960" y="2350008"/>
+            <a:ext cx="5181447" cy="310896"/>
+          </a:xfrm>
+          <a:prstGeom prst="rect">
+            <a:avLst/>
+          </a:prstGeom>
+          <a:noFill/>
+        </p:spPr>
+        <p:txBody>
+          <a:bodyPr wrap="square" lIns="0" rIns="0" tIns="0" bIns="0">
+            <a:spAutoFit/>
+          </a:bodyPr>
+          <a:lstStyle/>
+          <a:p>
+            <a:pPr algn="l">
+              <a:lnSpc>
+                <a:spcPct val="100000"/>
+              </a:lnSpc>
+            </a:pPr>
+            <a:r>
+              <a:rPr sz="1700" b="1">
+                <a:solidFill>
+                  <a:srgbClr val="1A2027"/>
+                </a:solidFill>
+                <a:latin typeface="Calibri"/>
+              </a:rPr>
+              <a:t>Интернет-магазины</a:t>
+            </a:r>
+          </a:p>
+        </p:txBody>
+      </p:sp>
+      <p:sp>
+        <p:nvSpPr>
+          <p:cNvPr id="5" name="TextBox 4"/>
+          <p:cNvSpPr txBox="1"/>
+          <p:nvPr/>
+        </p:nvSpPr>
+        <p:spPr>
+          <a:xfrm>
+            <a:off x="822960" y="2715768"/>
+            <a:ext cx="5181447" cy="365760"/>
+          </a:xfrm>
+          <a:prstGeom prst="rect">
+            <a:avLst/>
+          </a:prstGeom>
+          <a:noFill/>
+        </p:spPr>
+        <p:txBody>
+          <a:bodyPr wrap="square" lIns="0" rIns="0" tIns="0" bIns="0">
+            <a:spAutoFit/>
+          </a:bodyPr>
+          <a:lstStyle/>
+          <a:p>
+            <a:pPr algn="l">
+              <a:lnSpc>
+                <a:spcPct val="100000"/>
+              </a:lnSpc>
+            </a:pPr>
+            <a:r>
+              <a:rPr sz="1400" b="0">
+                <a:solidFill>
+                  <a:srgbClr val="5B6B7A"/>
+                </a:solidFill>
+                <a:latin typeface="Calibri"/>
+              </a:rPr>
+              <a:t>каталог и выгрузка отчётов</a:t>
+            </a:r>
+          </a:p>
+        </p:txBody>
+      </p:sp>
+      <p:sp>
+        <p:nvSpPr>
+          <p:cNvPr id="6" name="TextBox 5"/>
+          <p:cNvSpPr txBox="1"/>
+          <p:nvPr/>
+        </p:nvSpPr>
+        <p:spPr>
+          <a:xfrm>
+            <a:off x="6187287" y="2350008"/>
+            <a:ext cx="5181447" cy="310896"/>
+          </a:xfrm>
+          <a:prstGeom prst="rect">
+            <a:avLst/>
+          </a:prstGeom>
+          <a:noFill/>
+        </p:spPr>
+        <p:txBody>
+          <a:bodyPr wrap="square" lIns="0" rIns="0" tIns="0" bIns="0">
+            <a:spAutoFit/>
+          </a:bodyPr>
+          <a:lstStyle/>
+          <a:p>
+            <a:pPr algn="l">
+              <a:lnSpc>
+                <a:spcPct val="100000"/>
+              </a:lnSpc>
+            </a:pPr>
+            <a:r>
+              <a:rPr sz="1700" b="1">
+                <a:solidFill>
+                  <a:srgbClr val="1A2027"/>
+                </a:solidFill>
+                <a:latin typeface="Calibri"/>
+              </a:rPr>
+              <a:t>Финтех</a:t>
+            </a:r>
+          </a:p>
+        </p:txBody>
+      </p:sp>
+      <p:sp>
+        <p:nvSpPr>
+          <p:cNvPr id="7" name="TextBox 6"/>
+          <p:cNvSpPr txBox="1"/>
+          <p:nvPr/>
+        </p:nvSpPr>
+        <p:spPr>
+          <a:xfrm>
+            <a:off x="6187287" y="2715768"/>
+            <a:ext cx="5181447" cy="365760"/>
+          </a:xfrm>
+          <a:prstGeom prst="rect">
+            <a:avLst/>
+          </a:prstGeom>
+          <a:noFill/>
+        </p:spPr>
+        <p:txBody>
+          <a:bodyPr wrap="square" lIns="0" rIns="0" tIns="0" bIns="0">
+            <a:spAutoFit/>
+          </a:bodyPr>
+          <a:lstStyle/>
+          <a:p>
+            <a:pPr algn="l">
+              <a:lnSpc>
+                <a:spcPct val="100000"/>
+              </a:lnSpc>
+            </a:pPr>
+            <a:r>
+              <a:rPr sz="1400" b="0">
+                <a:solidFill>
+                  <a:srgbClr val="5B6B7A"/>
+                </a:solidFill>
+                <a:latin typeface="Calibri"/>
+              </a:rPr>
+              <a:t>проверка баланса и формирование выписки</a:t>
+            </a:r>
+          </a:p>
+        </p:txBody>
+      </p:sp>
+      <p:sp>
+        <p:nvSpPr>
+          <p:cNvPr id="8" name="TextBox 7"/>
+          <p:cNvSpPr txBox="1"/>
+          <p:nvPr/>
+        </p:nvSpPr>
+        <p:spPr>
+          <a:xfrm>
+            <a:off x="822960" y="3218688"/>
+            <a:ext cx="5181447" cy="310896"/>
+          </a:xfrm>
+          <a:prstGeom prst="rect">
+            <a:avLst/>
+          </a:prstGeom>
+          <a:noFill/>
+        </p:spPr>
+        <p:txBody>
+          <a:bodyPr wrap="square" lIns="0" rIns="0" tIns="0" bIns="0">
+            <a:spAutoFit/>
+          </a:bodyPr>
+          <a:lstStyle/>
+          <a:p>
+            <a:pPr algn="l">
+              <a:lnSpc>
+                <a:spcPct val="100000"/>
+              </a:lnSpc>
+            </a:pPr>
+            <a:r>
+              <a:rPr sz="1700" b="1">
+                <a:solidFill>
+                  <a:srgbClr val="1A2027"/>
+                </a:solidFill>
+                <a:latin typeface="Calibri"/>
+              </a:rPr>
+              <a:t>SaaS-сервисы</a:t>
+            </a:r>
+          </a:p>
+        </p:txBody>
+      </p:sp>
+      <p:sp>
+        <p:nvSpPr>
+          <p:cNvPr id="9" name="TextBox 8"/>
+          <p:cNvSpPr txBox="1"/>
+          <p:nvPr/>
+        </p:nvSpPr>
+        <p:spPr>
+          <a:xfrm>
+            <a:off x="822960" y="3584448"/>
+            <a:ext cx="5181447" cy="365760"/>
+          </a:xfrm>
+          <a:prstGeom prst="rect">
+            <a:avLst/>
+          </a:prstGeom>
+          <a:noFill/>
+        </p:spPr>
+        <p:txBody>
+          <a:bodyPr wrap="square" lIns="0" rIns="0" tIns="0" bIns="0">
+            <a:spAutoFit/>
+          </a:bodyPr>
+          <a:lstStyle/>
+          <a:p>
+            <a:pPr algn="l">
+              <a:lnSpc>
+                <a:spcPct val="100000"/>
+              </a:lnSpc>
+            </a:pPr>
+            <a:r>
+              <a:rPr sz="1400" b="0">
+                <a:solidFill>
+                  <a:srgbClr val="5B6B7A"/>
+                </a:solidFill>
+                <a:latin typeface="Calibri"/>
+              </a:rPr>
+              <a:t>интерфейс и экспорт данных</a:t>
+            </a:r>
+          </a:p>
+        </p:txBody>
+      </p:sp>
+      <p:sp>
+        <p:nvSpPr>
+          <p:cNvPr id="10" name="TextBox 9"/>
+          <p:cNvSpPr txBox="1"/>
+          <p:nvPr/>
+        </p:nvSpPr>
+        <p:spPr>
+          <a:xfrm>
+            <a:off x="6187287" y="3218688"/>
+            <a:ext cx="5181447" cy="310896"/>
+          </a:xfrm>
+          <a:prstGeom prst="rect">
+            <a:avLst/>
+          </a:prstGeom>
+          <a:noFill/>
+        </p:spPr>
+        <p:txBody>
+          <a:bodyPr wrap="square" lIns="0" rIns="0" tIns="0" bIns="0">
+            <a:spAutoFit/>
+          </a:bodyPr>
+          <a:lstStyle/>
+          <a:p>
+            <a:pPr algn="l">
+              <a:lnSpc>
+                <a:spcPct val="100000"/>
+              </a:lnSpc>
+            </a:pPr>
+            <a:r>
+              <a:rPr sz="1700" b="1">
+                <a:solidFill>
+                  <a:srgbClr val="1A2027"/>
+                </a:solidFill>
+                <a:latin typeface="Calibri"/>
+              </a:rPr>
+              <a:t>Медиасервисы</a:t>
+            </a:r>
+          </a:p>
+        </p:txBody>
+      </p:sp>
+      <p:sp>
+        <p:nvSpPr>
+          <p:cNvPr id="11" name="TextBox 10"/>
+          <p:cNvSpPr txBox="1"/>
+          <p:nvPr/>
+        </p:nvSpPr>
+        <p:spPr>
+          <a:xfrm>
+            <a:off x="6187287" y="3584448"/>
+            <a:ext cx="5181447" cy="365760"/>
+          </a:xfrm>
+          <a:prstGeom prst="rect">
+            <a:avLst/>
+          </a:prstGeom>
+          <a:noFill/>
+        </p:spPr>
+        <p:txBody>
+          <a:bodyPr wrap="square" lIns="0" rIns="0" tIns="0" bIns="0">
+            <a:spAutoFit/>
+          </a:bodyPr>
+          <a:lstStyle/>
+          <a:p>
+            <a:pPr algn="l">
+              <a:lnSpc>
+                <a:spcPct val="100000"/>
+              </a:lnSpc>
+            </a:pPr>
+            <a:r>
+              <a:rPr sz="1400" b="0">
+                <a:solidFill>
+                  <a:srgbClr val="5B6B7A"/>
+                </a:solidFill>
+                <a:latin typeface="Calibri"/>
+              </a:rPr>
+              <a:t>лента и обработка изображений</a:t>
+            </a:r>
+          </a:p>
+        </p:txBody>
+      </p:sp>
+      <p:sp>
+        <p:nvSpPr>
+          <p:cNvPr id="12" name="Rounded Rectangle 11"/>
+          <p:cNvSpPr/>
+          <p:nvPr/>
+        </p:nvSpPr>
+        <p:spPr>
+          <a:xfrm>
+            <a:off x="713232" y="4270248"/>
+            <a:ext cx="10765231" cy="1371600"/>
+          </a:xfrm>
+          <a:prstGeom prst="roundRect">
+            <a:avLst>
+              <a:gd name="adj" fmla="val 6000"/>
+            </a:avLst>
+          </a:prstGeom>
+          <a:solidFill>
+            <a:srgbClr val="F2F5F8"/>
+          </a:solidFill>
+          <a:ln>
+            <a:noFill/>
+          </a:ln>
+          <a:effectLst/>
+        </p:spPr>
+        <p:style>
+          <a:lnRef idx="1">
+            <a:schemeClr val="accent1"/>
+          </a:lnRef>
+          <a:fillRef idx="3">
+            <a:schemeClr val="accent1"/>
+          </a:fillRef>
+          <a:effectRef idx="2">
+            <a:schemeClr val="accent1"/>
+          </a:effectRef>
+          <a:fontRef idx="minor">
+            <a:schemeClr val="lt1"/>
+          </a:fontRef>
+        </p:style>
+        <p:txBody>
+          <a:bodyPr rtlCol="0" anchor="ctr"/>
+          <a:lstStyle/>
+          <a:p>
+            <a:pPr algn="ctr"/>
+          </a:p>
+        </p:txBody>
+      </p:sp>
+      <p:sp>
+        <p:nvSpPr>
+          <p:cNvPr id="13" name="TextBox 12"/>
+          <p:cNvSpPr txBox="1"/>
+          <p:nvPr/>
+        </p:nvSpPr>
+        <p:spPr>
+          <a:xfrm>
+            <a:off x="932688" y="4434840"/>
+            <a:ext cx="10326319" cy="329184"/>
+          </a:xfrm>
+          <a:prstGeom prst="rect">
+            <a:avLst/>
+          </a:prstGeom>
+          <a:noFill/>
+        </p:spPr>
+        <p:txBody>
+          <a:bodyPr wrap="square" lIns="0" rIns="0" tIns="0" bIns="0">
+            <a:spAutoFit/>
+          </a:bodyPr>
+          <a:lstStyle/>
+          <a:p>
+            <a:pPr algn="l">
+              <a:lnSpc>
+                <a:spcPct val="100000"/>
+              </a:lnSpc>
+            </a:pPr>
+            <a:r>
+              <a:rPr sz="1500" b="1">
+                <a:solidFill>
+                  <a:srgbClr val="1565C0"/>
+                </a:solidFill>
+                <a:latin typeface="Calibri"/>
+              </a:rPr>
+              <a:t>Смежное направление</a:t>
+            </a:r>
+          </a:p>
+        </p:txBody>
+      </p:sp>
+      <p:sp>
+        <p:nvSpPr>
+          <p:cNvPr id="14" name="TextBox 13"/>
+          <p:cNvSpPr txBox="1"/>
+          <p:nvPr/>
+        </p:nvSpPr>
+        <p:spPr>
+          <a:xfrm>
+            <a:off x="932688" y="4818888"/>
+            <a:ext cx="10326319" cy="713232"/>
+          </a:xfrm>
+          <a:prstGeom prst="rect">
+            <a:avLst/>
+          </a:prstGeom>
+          <a:noFill/>
+        </p:spPr>
+        <p:txBody>
+          <a:bodyPr wrap="square" lIns="0" rIns="0" tIns="0" bIns="0">
+            <a:spAutoFit/>
+          </a:bodyPr>
+          <a:lstStyle/>
+          <a:p>
+            <a:pPr algn="l">
+              <a:lnSpc>
+                <a:spcPct val="120000"/>
+              </a:lnSpc>
+            </a:pPr>
+            <a:r>
+              <a:rPr sz="1300" b="0">
+                <a:solidFill>
+                  <a:srgbClr val="5B6B7A"/>
+                </a:solidFill>
+                <a:latin typeface="Calibri"/>
+              </a:rPr>
+              <a:t>Обслуживание языковых моделей: стоимость запроса меняется на порядки в зависимости от числа токенов, а распределяют запросы всё тем же счётом соединений. Механизм тот же — но мы там ничего не измеряли и выдавать это за проверенное не будем.</a:t>
+            </a:r>
+          </a:p>
+        </p:txBody>
+      </p:sp>
+    </p:spTree>
+  </p:cSld>
+  <p:clrMapOvr>
+    <a:masterClrMapping/>
+  </p:clrMapOvr>
+</p:sld>
+</file>
+
+<file path=ppt/slides/slide13.xml><?xml version="1.0" encoding="utf-8"?>
+<p:sld xmlns:a="http://schemas.openxmlformats.org/drawingml/2006/main" xmlns:p="http://schemas.openxmlformats.org/presentationml/2006/main" xmlns:r="http://schemas.openxmlformats.org/officeDocument/2006/relationships">
+  <p:cSld>
+    <p:bg>
+      <p:bgPr>
+        <a:solidFill>
+          <a:srgbClr val="FFFFFF"/>
+        </a:solidFill>
+        <a:effectLst/>
+      </p:bgPr>
+    </p:bg>
+    <p:spTree>
+      <p:nvGrpSpPr>
+        <p:cNvPr id="1" name=""/>
+        <p:cNvGrpSpPr/>
+        <p:nvPr/>
+      </p:nvGrpSpPr>
+      <p:grpSpPr/>
+      <p:sp>
+        <p:nvSpPr>
+          <p:cNvPr id="2" name="TextBox 1"/>
+          <p:cNvSpPr txBox="1"/>
+          <p:nvPr/>
+        </p:nvSpPr>
+        <p:spPr>
+          <a:xfrm>
+            <a:off x="822960" y="566928"/>
+            <a:ext cx="10545775" cy="868680"/>
+          </a:xfrm>
+          <a:prstGeom prst="rect">
+            <a:avLst/>
+          </a:prstGeom>
+          <a:noFill/>
+        </p:spPr>
+        <p:txBody>
+          <a:bodyPr wrap="square" lIns="0" rIns="0" tIns="0" bIns="0">
+            <a:spAutoFit/>
+          </a:bodyPr>
+          <a:lstStyle/>
+          <a:p>
+            <a:pPr algn="l">
+              <a:lnSpc>
+                <a:spcPct val="100000"/>
+              </a:lnSpc>
+            </a:pPr>
+            <a:r>
+              <a:rPr sz="3000" b="1">
+                <a:solidFill>
+                  <a:srgbClr val="1A2027"/>
+                </a:solidFill>
+                <a:latin typeface="Calibri"/>
+              </a:rPr>
+              <a:t>Модель и то, чего пока нет</a:t>
+            </a:r>
+          </a:p>
+        </p:txBody>
+      </p:sp>
+      <p:sp>
+        <p:nvSpPr>
+          <p:cNvPr id="3" name="TextBox 2"/>
+          <p:cNvSpPr txBox="1"/>
+          <p:nvPr/>
+        </p:nvSpPr>
+        <p:spPr>
+          <a:xfrm>
+            <a:off x="822960" y="1481328"/>
+            <a:ext cx="5090007" cy="329184"/>
+          </a:xfrm>
+          <a:prstGeom prst="rect">
+            <a:avLst/>
+          </a:prstGeom>
+          <a:noFill/>
+        </p:spPr>
+        <p:txBody>
+          <a:bodyPr wrap="square" lIns="0" rIns="0" tIns="0" bIns="0">
+            <a:spAutoFit/>
+          </a:bodyPr>
+          <a:lstStyle/>
+          <a:p>
+            <a:pPr algn="l">
+              <a:lnSpc>
+                <a:spcPct val="100000"/>
+              </a:lnSpc>
+            </a:pPr>
+            <a:r>
+              <a:rPr sz="1700" b="1">
+                <a:solidFill>
+                  <a:srgbClr val="1A2027"/>
+                </a:solidFill>
+                <a:latin typeface="Calibri"/>
+              </a:rPr>
+              <a:t>За что платят</a:t>
+            </a:r>
+          </a:p>
+        </p:txBody>
+      </p:sp>
+      <p:sp>
+        <p:nvSpPr>
+          <p:cNvPr id="4" name="TextBox 3"/>
+          <p:cNvSpPr txBox="1"/>
+          <p:nvPr/>
+        </p:nvSpPr>
+        <p:spPr>
+          <a:xfrm>
+            <a:off x="822960" y="1883664"/>
+            <a:ext cx="5090007" cy="2377440"/>
+          </a:xfrm>
+          <a:prstGeom prst="rect">
+            <a:avLst/>
+          </a:prstGeom>
+          <a:noFill/>
+        </p:spPr>
+        <p:txBody>
+          <a:bodyPr wrap="square" lIns="0" rIns="0" tIns="0" bIns="0">
+            <a:spAutoFit/>
+          </a:bodyPr>
+          <a:lstStyle/>
+          <a:p>
+            <a:pPr algn="l">
+              <a:lnSpc>
+                <a:spcPct val="125000"/>
+              </a:lnSpc>
+            </a:pPr>
+            <a:r>
+              <a:rPr sz="1300" b="0">
+                <a:solidFill>
+                  <a:srgbClr val="5B6B7A"/>
+                </a:solidFill>
+                <a:latin typeface="Calibri"/>
+              </a:rPr>
+              <a:t>Меньше серверов при том же качестве отклика: сегодня проблему закрывают избыточностью.</a:t>
+            </a:r>
+          </a:p>
+          <a:p>
+            <a:pPr algn="l">
+              <a:lnSpc>
+                <a:spcPct val="125000"/>
+              </a:lnSpc>
+            </a:pPr>
+            <a:r>
+              <a:rPr sz="1300" b="0">
+                <a:solidFill>
+                  <a:srgbClr val="5B6B7A"/>
+                </a:solidFill>
+                <a:latin typeface="Calibri"/>
+              </a:rPr>
+              <a:t/>
+            </a:r>
+          </a:p>
+          <a:p>
+            <a:pPr algn="l">
+              <a:lnSpc>
+                <a:spcPct val="125000"/>
+              </a:lnSpc>
+            </a:pPr>
+            <a:r>
+              <a:rPr sz="1300" b="0">
+                <a:solidFill>
+                  <a:srgbClr val="5B6B7A"/>
+                </a:solidFill>
+                <a:latin typeface="Calibri"/>
+              </a:rPr>
+              <a:t>Меньше работы инженеров: альтернатива — вручную выносить тяжёлые операции в отдельные сервисы, это месяцы работы команды.</a:t>
+            </a:r>
+          </a:p>
+          <a:p>
+            <a:pPr algn="l">
+              <a:lnSpc>
+                <a:spcPct val="125000"/>
+              </a:lnSpc>
+            </a:pPr>
+            <a:r>
+              <a:rPr sz="1300" b="0">
+                <a:solidFill>
+                  <a:srgbClr val="5B6B7A"/>
+                </a:solidFill>
+                <a:latin typeface="Calibri"/>
+              </a:rPr>
+              <a:t/>
+            </a:r>
+          </a:p>
+          <a:p>
+            <a:pPr algn="l">
+              <a:lnSpc>
+                <a:spcPct val="125000"/>
+              </a:lnSpc>
+            </a:pPr>
+            <a:r>
+              <a:rPr sz="1300" b="0">
+                <a:solidFill>
+                  <a:srgbClr val="5B6B7A"/>
+                </a:solidFill>
+                <a:latin typeface="Calibri"/>
+              </a:rPr>
+              <a:t>Открытое ядро: диагностика и маршрутизатор открыты и служат доказательством; платное — панель управления, интеграции с Envoy и Kubernetes, поддержка.</a:t>
+            </a:r>
+          </a:p>
+        </p:txBody>
+      </p:sp>
+      <p:sp>
+        <p:nvSpPr>
+          <p:cNvPr id="5" name="TextBox 4"/>
+          <p:cNvSpPr txBox="1"/>
+          <p:nvPr/>
+        </p:nvSpPr>
+        <p:spPr>
+          <a:xfrm>
+            <a:off x="6278727" y="1481328"/>
+            <a:ext cx="5090007" cy="329184"/>
+          </a:xfrm>
+          <a:prstGeom prst="rect">
+            <a:avLst/>
+          </a:prstGeom>
+          <a:noFill/>
+        </p:spPr>
+        <p:txBody>
+          <a:bodyPr wrap="square" lIns="0" rIns="0" tIns="0" bIns="0">
+            <a:spAutoFit/>
+          </a:bodyPr>
+          <a:lstStyle/>
+          <a:p>
+            <a:pPr algn="l">
+              <a:lnSpc>
+                <a:spcPct val="100000"/>
+              </a:lnSpc>
+            </a:pPr>
+            <a:r>
+              <a:rPr sz="1700" b="1">
+                <a:solidFill>
+                  <a:srgbClr val="C62828"/>
+                </a:solidFill>
+                <a:latin typeface="Calibri"/>
+              </a:rPr>
+              <a:t>Чего пока нет</a:t>
+            </a:r>
+          </a:p>
+        </p:txBody>
+      </p:sp>
+      <p:sp>
+        <p:nvSpPr>
+          <p:cNvPr id="6" name="TextBox 5"/>
+          <p:cNvSpPr txBox="1"/>
+          <p:nvPr/>
+        </p:nvSpPr>
+        <p:spPr>
+          <a:xfrm>
+            <a:off x="6278727" y="1883664"/>
+            <a:ext cx="5090007" cy="2377440"/>
+          </a:xfrm>
+          <a:prstGeom prst="rect">
+            <a:avLst/>
+          </a:prstGeom>
+          <a:noFill/>
+        </p:spPr>
+        <p:txBody>
+          <a:bodyPr wrap="square" lIns="0" rIns="0" tIns="0" bIns="0">
+            <a:spAutoFit/>
+          </a:bodyPr>
+          <a:lstStyle/>
+          <a:p>
+            <a:pPr algn="l">
+              <a:lnSpc>
+                <a:spcPct val="125000"/>
+              </a:lnSpc>
+            </a:pPr>
+            <a:r>
+              <a:rPr sz="1300" b="0">
+                <a:solidFill>
+                  <a:srgbClr val="5B6B7A"/>
+                </a:solidFill>
+                <a:latin typeface="Calibri"/>
+              </a:rPr>
+              <a:t>Ни одного платящего клиента. Цену никто не подтверждал.</a:t>
+            </a:r>
+          </a:p>
+          <a:p>
+            <a:pPr algn="l">
+              <a:lnSpc>
+                <a:spcPct val="125000"/>
+              </a:lnSpc>
+            </a:pPr>
+            <a:r>
+              <a:rPr sz="1300" b="0">
+                <a:solidFill>
+                  <a:srgbClr val="5B6B7A"/>
+                </a:solidFill>
+                <a:latin typeface="Calibri"/>
+              </a:rPr>
+              <a:t/>
+            </a:r>
+          </a:p>
+          <a:p>
+            <a:pPr algn="l">
+              <a:lnSpc>
+                <a:spcPct val="125000"/>
+              </a:lnSpc>
+            </a:pPr>
+            <a:r>
+              <a:rPr sz="1300" b="0">
+                <a:solidFill>
+                  <a:srgbClr val="5B6B7A"/>
+                </a:solidFill>
+                <a:latin typeface="Calibri"/>
+              </a:rPr>
+              <a:t>Эффект на боевом трафике настоящей компании не проверен: все замеры сделаны на одной машине.</a:t>
+            </a:r>
+          </a:p>
+          <a:p>
+            <a:pPr algn="l">
+              <a:lnSpc>
+                <a:spcPct val="125000"/>
+              </a:lnSpc>
+            </a:pPr>
+            <a:r>
+              <a:rPr sz="1300" b="0">
+                <a:solidFill>
+                  <a:srgbClr val="5B6B7A"/>
+                </a:solidFill>
+                <a:latin typeface="Calibri"/>
+              </a:rPr>
+              <a:t/>
+            </a:r>
+          </a:p>
+          <a:p>
+            <a:pPr algn="l">
+              <a:lnSpc>
+                <a:spcPct val="125000"/>
+              </a:lnSpc>
+            </a:pPr>
+            <a:r>
+              <a:rPr sz="1300" b="0">
+                <a:solidFill>
+                  <a:srgbClr val="5B6B7A"/>
+                </a:solidFill>
+                <a:latin typeface="Calibri"/>
+              </a:rPr>
+              <a:t>Размер рынка не оценён. Поведение при масштабировании на много обработчиков не измерено.</a:t>
+            </a:r>
+          </a:p>
+          <a:p>
+            <a:pPr algn="l">
+              <a:lnSpc>
+                <a:spcPct val="125000"/>
+              </a:lnSpc>
+            </a:pPr>
+            <a:r>
+              <a:rPr sz="1300" b="0">
+                <a:solidFill>
+                  <a:srgbClr val="5B6B7A"/>
+                </a:solidFill>
+                <a:latin typeface="Calibri"/>
+              </a:rPr>
+              <a:t/>
+            </a:r>
+          </a:p>
+          <a:p>
+            <a:pPr algn="l">
+              <a:lnSpc>
+                <a:spcPct val="125000"/>
+              </a:lnSpc>
+            </a:pPr>
+            <a:r>
+              <a:rPr sz="1300" b="0">
+                <a:solidFill>
+                  <a:srgbClr val="5B6B7A"/>
+                </a:solidFill>
+                <a:latin typeface="Calibri"/>
+              </a:rPr>
+              <a:t>Это гипотезы, а не результаты, и мы их так и называем.</a:t>
+            </a:r>
+          </a:p>
+        </p:txBody>
+      </p:sp>
+    </p:spTree>
+  </p:cSld>
+  <p:clrMapOvr>
+    <a:masterClrMapping/>
+  </p:clrMapOvr>
+</p:sld>
+</file>
+
+<file path=ppt/slides/slide14.xml><?xml version="1.0" encoding="utf-8"?>
 <p:sld xmlns:a="http://schemas.openxmlformats.org/drawingml/2006/main" xmlns:p="http://schemas.openxmlformats.org/presentationml/2006/main" xmlns:r="http://schemas.openxmlformats.org/officeDocument/2006/relationships">
   <p:cSld>
     <p:bg>
@@ -4809,7 +6194,7 @@
                 </a:solidFill>
                 <a:latin typeface="Calibri"/>
               </a:rPr>
-              <a:t>123 мс</a:t>
+              <a:t>125 мс</a:t>
             </a:r>
           </a:p>
         </p:txBody>
@@ -5473,7 +6858,7 @@
                 </a:solidFill>
                 <a:latin typeface="Calibri"/>
               </a:rPr>
-              <a:t>658 мс</a:t>
+              <a:t>640 мс</a:t>
             </a:r>
           </a:p>
         </p:txBody>
@@ -5512,7 +6897,7 @@
                 </a:solidFill>
                 <a:latin typeface="Calibri"/>
               </a:rPr>
-              <a:t>Один адрес. Разница в 65 раз.</a:t>
+              <a:t>Один адрес. Разница в 61 раз.</a:t>
             </a:r>
           </a:p>
         </p:txBody>
@@ -6153,7 +7538,7 @@
                 </a:solidFill>
                 <a:latin typeface="Calibri"/>
               </a:rPr>
-              <a:t>9 мс против 123 мс</a:t>
+              <a:t>9 мс против 125 мс</a:t>
             </a:r>
           </a:p>
         </p:txBody>
@@ -6277,7 +7662,7 @@
                 </a:solidFill>
                 <a:latin typeface="Calibri"/>
               </a:rPr>
-              <a:t>разброс 65 раз внутри адреса</a:t>
+              <a:t>разброс до 85 раз внутри адреса</a:t>
             </a:r>
           </a:p>
         </p:txBody>
@@ -7968,7 +9353,7 @@
                 </a:solidFill>
                 <a:latin typeface="Calibri"/>
               </a:rPr>
-              <a:t>Где это не работает</a:t>
+              <a:t>Проверено не на своём стенде</a:t>
             </a:r>
           </a:p>
         </p:txBody>
@@ -8007,21 +9392,138 @@
                 </a:solidFill>
                 <a:latin typeface="Calibri"/>
               </a:rPr>
-              <a:t>Границы применимости мы определили и измерили, а не замолчали. Это часть результата.</a:t>
-            </a:r>
-          </a:p>
-        </p:txBody>
-      </p:sp>
-      <p:sp>
-        <p:nvSpPr>
-          <p:cNvPr id="4" name="Rounded Rectangle 3"/>
+              <a:t>Свой стенд писали мы, и он мог быть устроен так, чтобы подтвердить нашу мысль. Поэтому проверка сделана дважды на чужом.</a:t>
+            </a:r>
+          </a:p>
+        </p:txBody>
+      </p:sp>
+      <p:sp>
+        <p:nvSpPr>
+          <p:cNvPr id="4" name="TextBox 3"/>
+          <p:cNvSpPr txBox="1"/>
+          <p:nvPr/>
+        </p:nvSpPr>
+        <p:spPr>
+          <a:xfrm>
+            <a:off x="822960" y="2350008"/>
+            <a:ext cx="10545775" cy="365760"/>
+          </a:xfrm>
+          <a:prstGeom prst="rect">
+            <a:avLst/>
+          </a:prstGeom>
+          <a:noFill/>
+        </p:spPr>
+        <p:txBody>
+          <a:bodyPr wrap="square" lIns="0" rIns="0" tIns="0" bIns="0">
+            <a:spAutoFit/>
+          </a:bodyPr>
+          <a:lstStyle/>
+          <a:p>
+            <a:pPr algn="l">
+              <a:lnSpc>
+                <a:spcPct val="100000"/>
+              </a:lnSpc>
+            </a:pPr>
+            <a:r>
+              <a:rPr sz="1400" b="0">
+                <a:solidFill>
+                  <a:srgbClr val="1A2027"/>
+                </a:solidFill>
+                <a:latin typeface="Calibri"/>
+              </a:rPr>
+              <a:t>PostgREST поверх PostgreSQL, 300 000 строк. Нашего кода в пути запроса нет. Один и тот же адрес:</a:t>
+            </a:r>
+          </a:p>
+        </p:txBody>
+      </p:sp>
+      <p:sp>
+        <p:nvSpPr>
+          <p:cNvPr id="5" name="TextBox 4"/>
+          <p:cNvSpPr txBox="1"/>
+          <p:nvPr/>
+        </p:nvSpPr>
+        <p:spPr>
+          <a:xfrm>
+            <a:off x="822960" y="2825496"/>
+            <a:ext cx="8149008" cy="310896"/>
+          </a:xfrm>
+          <a:prstGeom prst="rect">
+            <a:avLst/>
+          </a:prstGeom>
+          <a:noFill/>
+        </p:spPr>
+        <p:txBody>
+          <a:bodyPr wrap="square" lIns="0" rIns="0" tIns="0" bIns="0">
+            <a:spAutoFit/>
+          </a:bodyPr>
+          <a:lstStyle/>
+          <a:p>
+            <a:pPr algn="l">
+              <a:lnSpc>
+                <a:spcPct val="100000"/>
+              </a:lnSpc>
+            </a:pPr>
+            <a:r>
+              <a:rPr sz="1200" b="1">
+                <a:solidFill>
+                  <a:srgbClr val="5B6B7A"/>
+                </a:solidFill>
+                <a:latin typeface="Calibri"/>
+              </a:rPr>
+              <a:t>Обращение к /orders</a:t>
+            </a:r>
+          </a:p>
+        </p:txBody>
+      </p:sp>
+      <p:sp>
+        <p:nvSpPr>
+          <p:cNvPr id="6" name="TextBox 5"/>
+          <p:cNvSpPr txBox="1"/>
+          <p:nvPr/>
+        </p:nvSpPr>
+        <p:spPr>
+          <a:xfrm>
+            <a:off x="8971968" y="2825496"/>
+            <a:ext cx="2396767" cy="310896"/>
+          </a:xfrm>
+          <a:prstGeom prst="rect">
+            <a:avLst/>
+          </a:prstGeom>
+          <a:noFill/>
+        </p:spPr>
+        <p:txBody>
+          <a:bodyPr wrap="square" lIns="0" rIns="0" tIns="0" bIns="0">
+            <a:spAutoFit/>
+          </a:bodyPr>
+          <a:lstStyle/>
+          <a:p>
+            <a:pPr algn="l">
+              <a:lnSpc>
+                <a:spcPct val="100000"/>
+              </a:lnSpc>
+            </a:pPr>
+            <a:r>
+              <a:rPr sz="1200" b="1">
+                <a:solidFill>
+                  <a:srgbClr val="5B6B7A"/>
+                </a:solidFill>
+                <a:latin typeface="Calibri"/>
+              </a:rPr>
+              <a:t>Медиана</a:t>
+            </a:r>
+          </a:p>
+        </p:txBody>
+      </p:sp>
+      <p:sp>
+        <p:nvSpPr>
+          <p:cNvPr id="7" name="Rounded Rectangle 6"/>
           <p:cNvSpPr/>
           <p:nvPr/>
         </p:nvSpPr>
         <p:spPr>
           <a:xfrm>
-            <a:off x="713232" y="2350008"/>
-            <a:ext cx="10765231" cy="1078992"/>
+            <a:off x="713232" y="3145536"/>
+            <a:ext cx="10765231" cy="384048"/>
           </a:xfrm>
           <a:prstGeom prst="roundRect">
             <a:avLst>
@@ -8060,14 +9562,14 @@
       </p:sp>
       <p:sp>
         <p:nvSpPr>
-          <p:cNvPr id="5" name="TextBox 4"/>
-          <p:cNvSpPr txBox="1"/>
-          <p:nvPr/>
-        </p:nvSpPr>
-        <p:spPr>
-          <a:xfrm>
-            <a:off x="932688" y="2496312"/>
-            <a:ext cx="10326319" cy="329184"/>
+          <p:cNvPr id="8" name="TextBox 7"/>
+          <p:cNvSpPr txBox="1"/>
+          <p:nvPr/>
+        </p:nvSpPr>
+        <p:spPr>
+          <a:xfrm>
+            <a:off x="822960" y="3218688"/>
+            <a:ext cx="8149008" cy="329184"/>
           </a:xfrm>
           <a:prstGeom prst="rect">
             <a:avLst/>
@@ -8086,66 +9588,66 @@
               </a:lnSpc>
             </a:pPr>
             <a:r>
-              <a:rPr sz="1600" b="1">
-                <a:solidFill>
-                  <a:srgbClr val="C62828"/>
-                </a:solidFill>
-                <a:latin typeface="Calibri"/>
-              </a:rPr>
-              <a:t>На однородном потоке — вредно</a:t>
-            </a:r>
-          </a:p>
-        </p:txBody>
-      </p:sp>
-      <p:sp>
-        <p:nvSpPr>
-          <p:cNvPr id="6" name="TextBox 5"/>
-          <p:cNvSpPr txBox="1"/>
-          <p:nvPr/>
-        </p:nvSpPr>
-        <p:spPr>
-          <a:xfrm>
-            <a:off x="932688" y="2880360"/>
-            <a:ext cx="10326319" cy="475488"/>
-          </a:xfrm>
-          <a:prstGeom prst="rect">
-            <a:avLst/>
-          </a:prstGeom>
-          <a:noFill/>
-        </p:spPr>
-        <p:txBody>
-          <a:bodyPr wrap="square" lIns="0" rIns="0" tIns="0" bIns="0">
-            <a:spAutoFit/>
-          </a:bodyPr>
-          <a:lstStyle/>
-          <a:p>
-            <a:pPr algn="l">
-              <a:lnSpc>
-                <a:spcPct val="120000"/>
-              </a:lnSpc>
-            </a:pPr>
-            <a:r>
               <a:rPr sz="1300" b="0">
                 <a:solidFill>
-                  <a:srgbClr val="5B6B7A"/>
-                </a:solidFill>
-                <a:latin typeface="Calibri"/>
-              </a:rPr>
-              <a:t>Если все запросы одной природы, разносить их не по чему. Маршрутизация проигрывает асинхронному движку 43 % на чистом вводе-выводе.</a:t>
-            </a:r>
-          </a:p>
-        </p:txBody>
-      </p:sp>
-      <p:sp>
-        <p:nvSpPr>
-          <p:cNvPr id="7" name="Rounded Rectangle 6"/>
+                  <a:srgbClr val="1A2027"/>
+                </a:solidFill>
+                <a:latin typeface="Calibri"/>
+              </a:rPr>
+              <a:t>?limit=5</a:t>
+            </a:r>
+          </a:p>
+        </p:txBody>
+      </p:sp>
+      <p:sp>
+        <p:nvSpPr>
+          <p:cNvPr id="9" name="TextBox 8"/>
+          <p:cNvSpPr txBox="1"/>
+          <p:nvPr/>
+        </p:nvSpPr>
+        <p:spPr>
+          <a:xfrm>
+            <a:off x="8971968" y="3218688"/>
+            <a:ext cx="2396767" cy="329184"/>
+          </a:xfrm>
+          <a:prstGeom prst="rect">
+            <a:avLst/>
+          </a:prstGeom>
+          <a:noFill/>
+        </p:spPr>
+        <p:txBody>
+          <a:bodyPr wrap="square" lIns="0" rIns="0" tIns="0" bIns="0">
+            <a:spAutoFit/>
+          </a:bodyPr>
+          <a:lstStyle/>
+          <a:p>
+            <a:pPr algn="l">
+              <a:lnSpc>
+                <a:spcPct val="100000"/>
+              </a:lnSpc>
+            </a:pPr>
+            <a:r>
+              <a:rPr sz="1300" b="0">
+                <a:solidFill>
+                  <a:srgbClr val="1A2027"/>
+                </a:solidFill>
+                <a:latin typeface="Calibri"/>
+              </a:rPr>
+              <a:t>2,0 мс</a:t>
+            </a:r>
+          </a:p>
+        </p:txBody>
+      </p:sp>
+      <p:sp>
+        <p:nvSpPr>
+          <p:cNvPr id="10" name="Rounded Rectangle 9"/>
           <p:cNvSpPr/>
           <p:nvPr/>
         </p:nvSpPr>
         <p:spPr>
           <a:xfrm>
-            <a:off x="713232" y="3575304"/>
-            <a:ext cx="10765231" cy="1078992"/>
+            <a:off x="713232" y="3529584"/>
+            <a:ext cx="10765231" cy="384048"/>
           </a:xfrm>
           <a:prstGeom prst="roundRect">
             <a:avLst>
@@ -8153,7 +9655,7 @@
             </a:avLst>
           </a:prstGeom>
           <a:solidFill>
-            <a:srgbClr val="F2F5F8"/>
+            <a:srgbClr val="FFFFFF"/>
           </a:solidFill>
           <a:ln>
             <a:noFill/>
@@ -8184,14 +9686,14 @@
       </p:sp>
       <p:sp>
         <p:nvSpPr>
-          <p:cNvPr id="8" name="TextBox 7"/>
-          <p:cNvSpPr txBox="1"/>
-          <p:nvPr/>
-        </p:nvSpPr>
-        <p:spPr>
-          <a:xfrm>
-            <a:off x="932688" y="3721608"/>
-            <a:ext cx="10326319" cy="329184"/>
+          <p:cNvPr id="11" name="TextBox 10"/>
+          <p:cNvSpPr txBox="1"/>
+          <p:nvPr/>
+        </p:nvSpPr>
+        <p:spPr>
+          <a:xfrm>
+            <a:off x="822960" y="3602736"/>
+            <a:ext cx="8149008" cy="329184"/>
           </a:xfrm>
           <a:prstGeom prst="rect">
             <a:avLst/>
@@ -8210,66 +9712,66 @@
               </a:lnSpc>
             </a:pPr>
             <a:r>
-              <a:rPr sz="1600" b="1">
-                <a:solidFill>
-                  <a:srgbClr val="C62828"/>
-                </a:solidFill>
-                <a:latin typeface="Calibri"/>
-              </a:rPr>
-              <a:t>Против least-connections — размен, не победа</a:t>
-            </a:r>
-          </a:p>
-        </p:txBody>
-      </p:sp>
-      <p:sp>
-        <p:nvSpPr>
-          <p:cNvPr id="9" name="TextBox 8"/>
-          <p:cNvSpPr txBox="1"/>
-          <p:nvPr/>
-        </p:nvSpPr>
-        <p:spPr>
-          <a:xfrm>
-            <a:off x="932688" y="4105656"/>
-            <a:ext cx="10326319" cy="475488"/>
-          </a:xfrm>
-          <a:prstGeom prst="rect">
-            <a:avLst/>
-          </a:prstGeom>
-          <a:noFill/>
-        </p:spPr>
-        <p:txBody>
-          <a:bodyPr wrap="square" lIns="0" rIns="0" tIns="0" bIns="0">
-            <a:spAutoFit/>
-          </a:bodyPr>
-          <a:lstStyle/>
-          <a:p>
-            <a:pPr algn="l">
-              <a:lnSpc>
-                <a:spcPct val="120000"/>
-              </a:lnSpc>
-            </a:pPr>
-            <a:r>
               <a:rPr sz="1300" b="0">
                 <a:solidFill>
-                  <a:srgbClr val="5B6B7A"/>
-                </a:solidFill>
-                <a:latin typeface="Calibri"/>
-              </a:rPr>
-              <a:t>Он выдаёт больше запросов в секунду, но у него тормозит 44 % лёгких обращений. Мы отдаём 20 % пропускной способности за шестикратное снижение хвоста.</a:t>
-            </a:r>
-          </a:p>
-        </p:txBody>
-      </p:sp>
-      <p:sp>
-        <p:nvSpPr>
-          <p:cNvPr id="10" name="Rounded Rectangle 9"/>
+                  <a:srgbClr val="1A2027"/>
+                </a:solidFill>
+                <a:latin typeface="Calibri"/>
+              </a:rPr>
+              <a:t>?limit=20000</a:t>
+            </a:r>
+          </a:p>
+        </p:txBody>
+      </p:sp>
+      <p:sp>
+        <p:nvSpPr>
+          <p:cNvPr id="12" name="TextBox 11"/>
+          <p:cNvSpPr txBox="1"/>
+          <p:nvPr/>
+        </p:nvSpPr>
+        <p:spPr>
+          <a:xfrm>
+            <a:off x="8971968" y="3602736"/>
+            <a:ext cx="2396767" cy="329184"/>
+          </a:xfrm>
+          <a:prstGeom prst="rect">
+            <a:avLst/>
+          </a:prstGeom>
+          <a:noFill/>
+        </p:spPr>
+        <p:txBody>
+          <a:bodyPr wrap="square" lIns="0" rIns="0" tIns="0" bIns="0">
+            <a:spAutoFit/>
+          </a:bodyPr>
+          <a:lstStyle/>
+          <a:p>
+            <a:pPr algn="l">
+              <a:lnSpc>
+                <a:spcPct val="100000"/>
+              </a:lnSpc>
+            </a:pPr>
+            <a:r>
+              <a:rPr sz="1300" b="0">
+                <a:solidFill>
+                  <a:srgbClr val="1A2027"/>
+                </a:solidFill>
+                <a:latin typeface="Calibri"/>
+              </a:rPr>
+              <a:t>49,1 мс</a:t>
+            </a:r>
+          </a:p>
+        </p:txBody>
+      </p:sp>
+      <p:sp>
+        <p:nvSpPr>
+          <p:cNvPr id="13" name="Rounded Rectangle 12"/>
           <p:cNvSpPr/>
           <p:nvPr/>
         </p:nvSpPr>
         <p:spPr>
           <a:xfrm>
-            <a:off x="713232" y="4800600"/>
-            <a:ext cx="10765231" cy="1078992"/>
+            <a:off x="713232" y="3913632"/>
+            <a:ext cx="10765231" cy="384048"/>
           </a:xfrm>
           <a:prstGeom prst="roundRect">
             <a:avLst>
@@ -8308,14 +9810,14 @@
       </p:sp>
       <p:sp>
         <p:nvSpPr>
-          <p:cNvPr id="11" name="TextBox 10"/>
-          <p:cNvSpPr txBox="1"/>
-          <p:nvPr/>
-        </p:nvSpPr>
-        <p:spPr>
-          <a:xfrm>
-            <a:off x="932688" y="4946904"/>
-            <a:ext cx="10326319" cy="329184"/>
+          <p:cNvPr id="14" name="TextBox 13"/>
+          <p:cNvSpPr txBox="1"/>
+          <p:nvPr/>
+        </p:nvSpPr>
+        <p:spPr>
+          <a:xfrm>
+            <a:off x="822960" y="3986784"/>
+            <a:ext cx="8149008" cy="329184"/>
           </a:xfrm>
           <a:prstGeom prst="rect">
             <a:avLst/>
@@ -8334,52 +9836,511 @@
               </a:lnSpc>
             </a:pPr>
             <a:r>
-              <a:rPr sz="1600" b="1">
+              <a:rPr sz="1300" b="0">
+                <a:solidFill>
+                  <a:srgbClr val="1A2027"/>
+                </a:solidFill>
+                <a:latin typeface="Calibri"/>
+              </a:rPr>
+              <a:t>?order=amount.desc&amp;limit=20000</a:t>
+            </a:r>
+          </a:p>
+        </p:txBody>
+      </p:sp>
+      <p:sp>
+        <p:nvSpPr>
+          <p:cNvPr id="15" name="TextBox 14"/>
+          <p:cNvSpPr txBox="1"/>
+          <p:nvPr/>
+        </p:nvSpPr>
+        <p:spPr>
+          <a:xfrm>
+            <a:off x="8971968" y="3986784"/>
+            <a:ext cx="2396767" cy="329184"/>
+          </a:xfrm>
+          <a:prstGeom prst="rect">
+            <a:avLst/>
+          </a:prstGeom>
+          <a:noFill/>
+        </p:spPr>
+        <p:txBody>
+          <a:bodyPr wrap="square" lIns="0" rIns="0" tIns="0" bIns="0">
+            <a:spAutoFit/>
+          </a:bodyPr>
+          <a:lstStyle/>
+          <a:p>
+            <a:pPr algn="l">
+              <a:lnSpc>
+                <a:spcPct val="100000"/>
+              </a:lnSpc>
+            </a:pPr>
+            <a:r>
+              <a:rPr sz="1300" b="1">
                 <a:solidFill>
                   <a:srgbClr val="C62828"/>
                 </a:solidFill>
                 <a:latin typeface="Calibri"/>
               </a:rPr>
-              <a:t>При деградации самого движка — преимущество теряется</a:t>
-            </a:r>
-          </a:p>
-        </p:txBody>
-      </p:sp>
-      <p:sp>
-        <p:nvSpPr>
-          <p:cNvPr id="12" name="TextBox 11"/>
-          <p:cNvSpPr txBox="1"/>
-          <p:nvPr/>
-        </p:nvSpPr>
-        <p:spPr>
-          <a:xfrm>
-            <a:off x="932688" y="5330952"/>
-            <a:ext cx="10326319" cy="475488"/>
-          </a:xfrm>
-          <a:prstGeom prst="rect">
-            <a:avLst/>
-          </a:prstGeom>
-          <a:noFill/>
-        </p:spPr>
-        <p:txBody>
-          <a:bodyPr wrap="square" lIns="0" rIns="0" tIns="0" bIns="0">
-            <a:spAutoFit/>
-          </a:bodyPr>
-          <a:lstStyle/>
-          <a:p>
-            <a:pPr algn="l">
-              <a:lnSpc>
-                <a:spcPct val="120000"/>
-              </a:lnSpc>
-            </a:pPr>
-            <a:r>
-              <a:rPr sz="1300" b="0">
+              <a:t>123,1 мс</a:t>
+            </a:r>
+          </a:p>
+        </p:txBody>
+      </p:sp>
+      <p:sp>
+        <p:nvSpPr>
+          <p:cNvPr id="16" name="TextBox 15"/>
+          <p:cNvSpPr txBox="1"/>
+          <p:nvPr/>
+        </p:nvSpPr>
+        <p:spPr>
+          <a:xfrm>
+            <a:off x="822960" y="4562856"/>
+            <a:ext cx="10545775" cy="402336"/>
+          </a:xfrm>
+          <a:prstGeom prst="rect">
+            <a:avLst/>
+          </a:prstGeom>
+          <a:noFill/>
+        </p:spPr>
+        <p:txBody>
+          <a:bodyPr wrap="square" lIns="0" rIns="0" tIns="0" bIns="0">
+            <a:spAutoFit/>
+          </a:bodyPr>
+          <a:lstStyle/>
+          <a:p>
+            <a:pPr algn="l">
+              <a:lnSpc>
+                <a:spcPct val="100000"/>
+              </a:lnSpc>
+            </a:pPr>
+            <a:r>
+              <a:rPr sz="1500" b="1">
+                <a:solidFill>
+                  <a:srgbClr val="1A2027"/>
+                </a:solidFill>
+                <a:latin typeface="Calibri"/>
+              </a:rPr>
+              <a:t>Разница в 72 раза. Инструмент сам, из одного журнала, определил, что дороже всего обходится сортировка.</a:t>
+            </a:r>
+          </a:p>
+        </p:txBody>
+      </p:sp>
+      <p:sp>
+        <p:nvSpPr>
+          <p:cNvPr id="17" name="Rounded Rectangle 16"/>
+          <p:cNvSpPr/>
+          <p:nvPr/>
+        </p:nvSpPr>
+        <p:spPr>
+          <a:xfrm>
+            <a:off x="822960" y="5093208"/>
+            <a:ext cx="3344570" cy="1234440"/>
+          </a:xfrm>
+          <a:prstGeom prst="roundRect">
+            <a:avLst>
+              <a:gd name="adj" fmla="val 6000"/>
+            </a:avLst>
+          </a:prstGeom>
+          <a:solidFill>
+            <a:srgbClr val="F2F5F8"/>
+          </a:solidFill>
+          <a:ln>
+            <a:noFill/>
+          </a:ln>
+          <a:effectLst/>
+        </p:spPr>
+        <p:style>
+          <a:lnRef idx="1">
+            <a:schemeClr val="accent1"/>
+          </a:lnRef>
+          <a:fillRef idx="3">
+            <a:schemeClr val="accent1"/>
+          </a:fillRef>
+          <a:effectRef idx="2">
+            <a:schemeClr val="accent1"/>
+          </a:effectRef>
+          <a:fontRef idx="minor">
+            <a:schemeClr val="lt1"/>
+          </a:fontRef>
+        </p:style>
+        <p:txBody>
+          <a:bodyPr rtlCol="0" anchor="ctr"/>
+          <a:lstStyle/>
+          <a:p>
+            <a:pPr algn="ctr"/>
+          </a:p>
+        </p:txBody>
+      </p:sp>
+      <p:sp>
+        <p:nvSpPr>
+          <p:cNvPr id="18" name="TextBox 17"/>
+          <p:cNvSpPr txBox="1"/>
+          <p:nvPr/>
+        </p:nvSpPr>
+        <p:spPr>
+          <a:xfrm>
+            <a:off x="1042416" y="5276088"/>
+            <a:ext cx="2905658" cy="603504"/>
+          </a:xfrm>
+          <a:prstGeom prst="rect">
+            <a:avLst/>
+          </a:prstGeom>
+          <a:noFill/>
+        </p:spPr>
+        <p:txBody>
+          <a:bodyPr wrap="square" lIns="0" rIns="0" tIns="0" bIns="0">
+            <a:spAutoFit/>
+          </a:bodyPr>
+          <a:lstStyle/>
+          <a:p>
+            <a:pPr algn="l">
+              <a:lnSpc>
+                <a:spcPct val="100000"/>
+              </a:lnSpc>
+            </a:pPr>
+            <a:r>
+              <a:rPr sz="3000" b="1">
+                <a:solidFill>
+                  <a:srgbClr val="1A2027"/>
+                </a:solidFill>
+                <a:latin typeface="Calibri"/>
+              </a:rPr>
+              <a:t>32 968</a:t>
+            </a:r>
+          </a:p>
+        </p:txBody>
+      </p:sp>
+      <p:sp>
+        <p:nvSpPr>
+          <p:cNvPr id="19" name="TextBox 18"/>
+          <p:cNvSpPr txBox="1"/>
+          <p:nvPr/>
+        </p:nvSpPr>
+        <p:spPr>
+          <a:xfrm>
+            <a:off x="1042416" y="5897880"/>
+            <a:ext cx="2905658" cy="301752"/>
+          </a:xfrm>
+          <a:prstGeom prst="rect">
+            <a:avLst/>
+          </a:prstGeom>
+          <a:noFill/>
+        </p:spPr>
+        <p:txBody>
+          <a:bodyPr wrap="square" lIns="0" rIns="0" tIns="0" bIns="0">
+            <a:spAutoFit/>
+          </a:bodyPr>
+          <a:lstStyle/>
+          <a:p>
+            <a:pPr algn="l">
+              <a:lnSpc>
+                <a:spcPct val="115000"/>
+              </a:lnSpc>
+            </a:pPr>
+            <a:r>
+              <a:rPr sz="1200" b="0">
                 <a:solidFill>
                   <a:srgbClr val="5B6B7A"/>
                 </a:solidFill>
                 <a:latin typeface="Calibri"/>
               </a:rPr>
-              <a:t>Если асинхронный движок лишается процессорного времени, обычная балансировка становится лучше. Подход опирается на то, что движок остаётся таким, каким его измерили.</a:t>
+              <a:t>функций в производственной</a:t>
+            </a:r>
+          </a:p>
+          <a:p>
+            <a:pPr algn="l">
+              <a:lnSpc>
+                <a:spcPct val="115000"/>
+              </a:lnSpc>
+            </a:pPr>
+            <a:r>
+              <a:rPr sz="1200" b="0">
+                <a:solidFill>
+                  <a:srgbClr val="5B6B7A"/>
+                </a:solidFill>
+                <a:latin typeface="Calibri"/>
+              </a:rPr>
+              <a:t>трассе Azure Functions</a:t>
+            </a:r>
+          </a:p>
+        </p:txBody>
+      </p:sp>
+      <p:sp>
+        <p:nvSpPr>
+          <p:cNvPr id="20" name="Rounded Rectangle 19"/>
+          <p:cNvSpPr/>
+          <p:nvPr/>
+        </p:nvSpPr>
+        <p:spPr>
+          <a:xfrm>
+            <a:off x="4423562" y="5093208"/>
+            <a:ext cx="3344570" cy="1234440"/>
+          </a:xfrm>
+          <a:prstGeom prst="roundRect">
+            <a:avLst>
+              <a:gd name="adj" fmla="val 6000"/>
+            </a:avLst>
+          </a:prstGeom>
+          <a:solidFill>
+            <a:srgbClr val="F2F5F8"/>
+          </a:solidFill>
+          <a:ln>
+            <a:noFill/>
+          </a:ln>
+          <a:effectLst/>
+        </p:spPr>
+        <p:style>
+          <a:lnRef idx="1">
+            <a:schemeClr val="accent1"/>
+          </a:lnRef>
+          <a:fillRef idx="3">
+            <a:schemeClr val="accent1"/>
+          </a:fillRef>
+          <a:effectRef idx="2">
+            <a:schemeClr val="accent1"/>
+          </a:effectRef>
+          <a:fontRef idx="minor">
+            <a:schemeClr val="lt1"/>
+          </a:fontRef>
+        </p:style>
+        <p:txBody>
+          <a:bodyPr rtlCol="0" anchor="ctr"/>
+          <a:lstStyle/>
+          <a:p>
+            <a:pPr algn="ctr"/>
+          </a:p>
+        </p:txBody>
+      </p:sp>
+      <p:sp>
+        <p:nvSpPr>
+          <p:cNvPr id="21" name="TextBox 20"/>
+          <p:cNvSpPr txBox="1"/>
+          <p:nvPr/>
+        </p:nvSpPr>
+        <p:spPr>
+          <a:xfrm>
+            <a:off x="4643018" y="5276088"/>
+            <a:ext cx="2905658" cy="603504"/>
+          </a:xfrm>
+          <a:prstGeom prst="rect">
+            <a:avLst/>
+          </a:prstGeom>
+          <a:noFill/>
+        </p:spPr>
+        <p:txBody>
+          <a:bodyPr wrap="square" lIns="0" rIns="0" tIns="0" bIns="0">
+            <a:spAutoFit/>
+          </a:bodyPr>
+          <a:lstStyle/>
+          <a:p>
+            <a:pPr algn="l">
+              <a:lnSpc>
+                <a:spcPct val="100000"/>
+              </a:lnSpc>
+            </a:pPr>
+            <a:r>
+              <a:rPr sz="3000" b="1">
+                <a:solidFill>
+                  <a:srgbClr val="1A2027"/>
+                </a:solidFill>
+                <a:latin typeface="Calibri"/>
+              </a:rPr>
+              <a:t>1,8 млрд</a:t>
+            </a:r>
+          </a:p>
+        </p:txBody>
+      </p:sp>
+      <p:sp>
+        <p:nvSpPr>
+          <p:cNvPr id="22" name="TextBox 21"/>
+          <p:cNvSpPr txBox="1"/>
+          <p:nvPr/>
+        </p:nvSpPr>
+        <p:spPr>
+          <a:xfrm>
+            <a:off x="4643018" y="5897880"/>
+            <a:ext cx="2905658" cy="301752"/>
+          </a:xfrm>
+          <a:prstGeom prst="rect">
+            <a:avLst/>
+          </a:prstGeom>
+          <a:noFill/>
+        </p:spPr>
+        <p:txBody>
+          <a:bodyPr wrap="square" lIns="0" rIns="0" tIns="0" bIns="0">
+            <a:spAutoFit/>
+          </a:bodyPr>
+          <a:lstStyle/>
+          <a:p>
+            <a:pPr algn="l">
+              <a:lnSpc>
+                <a:spcPct val="115000"/>
+              </a:lnSpc>
+            </a:pPr>
+            <a:r>
+              <a:rPr sz="1200" b="0">
+                <a:solidFill>
+                  <a:srgbClr val="5B6B7A"/>
+                </a:solidFill>
+                <a:latin typeface="Calibri"/>
+              </a:rPr>
+              <a:t>вызовов настоящих</a:t>
+            </a:r>
+          </a:p>
+          <a:p>
+            <a:pPr algn="l">
+              <a:lnSpc>
+                <a:spcPct val="115000"/>
+              </a:lnSpc>
+            </a:pPr>
+            <a:r>
+              <a:rPr sz="1200" b="0">
+                <a:solidFill>
+                  <a:srgbClr val="5B6B7A"/>
+                </a:solidFill>
+                <a:latin typeface="Calibri"/>
+              </a:rPr>
+              <a:t>клиентов Microsoft</a:t>
+            </a:r>
+          </a:p>
+        </p:txBody>
+      </p:sp>
+      <p:sp>
+        <p:nvSpPr>
+          <p:cNvPr id="23" name="Rounded Rectangle 22"/>
+          <p:cNvSpPr/>
+          <p:nvPr/>
+        </p:nvSpPr>
+        <p:spPr>
+          <a:xfrm>
+            <a:off x="8024164" y="5093208"/>
+            <a:ext cx="3344570" cy="1234440"/>
+          </a:xfrm>
+          <a:prstGeom prst="roundRect">
+            <a:avLst>
+              <a:gd name="adj" fmla="val 6000"/>
+            </a:avLst>
+          </a:prstGeom>
+          <a:solidFill>
+            <a:srgbClr val="F2F5F8"/>
+          </a:solidFill>
+          <a:ln>
+            <a:noFill/>
+          </a:ln>
+          <a:effectLst/>
+        </p:spPr>
+        <p:style>
+          <a:lnRef idx="1">
+            <a:schemeClr val="accent1"/>
+          </a:lnRef>
+          <a:fillRef idx="3">
+            <a:schemeClr val="accent1"/>
+          </a:fillRef>
+          <a:effectRef idx="2">
+            <a:schemeClr val="accent1"/>
+          </a:effectRef>
+          <a:fontRef idx="minor">
+            <a:schemeClr val="lt1"/>
+          </a:fontRef>
+        </p:style>
+        <p:txBody>
+          <a:bodyPr rtlCol="0" anchor="ctr"/>
+          <a:lstStyle/>
+          <a:p>
+            <a:pPr algn="ctr"/>
+          </a:p>
+        </p:txBody>
+      </p:sp>
+      <p:sp>
+        <p:nvSpPr>
+          <p:cNvPr id="24" name="TextBox 23"/>
+          <p:cNvSpPr txBox="1"/>
+          <p:nvPr/>
+        </p:nvSpPr>
+        <p:spPr>
+          <a:xfrm>
+            <a:off x="8243620" y="5276088"/>
+            <a:ext cx="2905658" cy="603504"/>
+          </a:xfrm>
+          <a:prstGeom prst="rect">
+            <a:avLst/>
+          </a:prstGeom>
+          <a:noFill/>
+        </p:spPr>
+        <p:txBody>
+          <a:bodyPr wrap="square" lIns="0" rIns="0" tIns="0" bIns="0">
+            <a:spAutoFit/>
+          </a:bodyPr>
+          <a:lstStyle/>
+          <a:p>
+            <a:pPr algn="l">
+              <a:lnSpc>
+                <a:spcPct val="100000"/>
+              </a:lnSpc>
+            </a:pPr>
+            <a:r>
+              <a:rPr sz="3000" b="1">
+                <a:solidFill>
+                  <a:srgbClr val="C62828"/>
+                </a:solidFill>
+                <a:latin typeface="Calibri"/>
+              </a:rPr>
+              <a:t>44,6 %</a:t>
+            </a:r>
+          </a:p>
+        </p:txBody>
+      </p:sp>
+      <p:sp>
+        <p:nvSpPr>
+          <p:cNvPr id="25" name="TextBox 24"/>
+          <p:cNvSpPr txBox="1"/>
+          <p:nvPr/>
+        </p:nvSpPr>
+        <p:spPr>
+          <a:xfrm>
+            <a:off x="8243620" y="5897880"/>
+            <a:ext cx="2905658" cy="301752"/>
+          </a:xfrm>
+          <a:prstGeom prst="rect">
+            <a:avLst/>
+          </a:prstGeom>
+          <a:noFill/>
+        </p:spPr>
+        <p:txBody>
+          <a:bodyPr wrap="square" lIns="0" rIns="0" tIns="0" bIns="0">
+            <a:spAutoFit/>
+          </a:bodyPr>
+          <a:lstStyle/>
+          <a:p>
+            <a:pPr algn="l">
+              <a:lnSpc>
+                <a:spcPct val="115000"/>
+              </a:lnSpc>
+            </a:pPr>
+            <a:r>
+              <a:rPr sz="1200" b="0">
+                <a:solidFill>
+                  <a:srgbClr val="5B6B7A"/>
+                </a:solidFill>
+                <a:latin typeface="Calibri"/>
+              </a:rPr>
+              <a:t>обработчиков расходятся</a:t>
+            </a:r>
+          </a:p>
+          <a:p>
+            <a:pPr algn="l">
+              <a:lnSpc>
+                <a:spcPct val="115000"/>
+              </a:lnSpc>
+            </a:pPr>
+            <a:r>
+              <a:rPr sz="1200" b="0">
+                <a:solidFill>
+                  <a:srgbClr val="5B6B7A"/>
+                </a:solidFill>
+                <a:latin typeface="Calibri"/>
+              </a:rPr>
+              <a:t>не меньше чем в 10 раз</a:t>
             </a:r>
           </a:p>
         </p:txBody>
@@ -8444,7 +10405,7 @@
                 </a:solidFill>
                 <a:latin typeface="Calibri"/>
               </a:rPr>
-              <a:t>Вход в продукт — не прокси, а диагностика</a:t>
+              <a:t>Где это не работает</a:t>
             </a:r>
           </a:p>
         </p:txBody>
@@ -8483,115 +10444,21 @@
                 </a:solidFill>
                 <a:latin typeface="Calibri"/>
               </a:rPr>
-              <a:t>Никто не поставит незнакомый прокси в путь боевых запросов. Но журнал обращений есть у всех,</a:t>
-            </a:r>
-          </a:p>
-          <a:p>
-            <a:pPr algn="l">
-              <a:lnSpc>
-                <a:spcPct val="125000"/>
-              </a:lnSpc>
-            </a:pPr>
-            <a:r>
-              <a:rPr sz="1500" b="0">
-                <a:solidFill>
-                  <a:srgbClr val="5B6B7A"/>
-                </a:solidFill>
-                <a:latin typeface="Calibri"/>
-              </a:rPr>
-              <a:t>и прочитать его — нулевой риск.</a:t>
-            </a:r>
-          </a:p>
-        </p:txBody>
-      </p:sp>
-      <p:sp>
-        <p:nvSpPr>
-          <p:cNvPr id="4" name="TextBox 3"/>
-          <p:cNvSpPr txBox="1"/>
-          <p:nvPr/>
-        </p:nvSpPr>
-        <p:spPr>
-          <a:xfrm>
-            <a:off x="822960" y="2350008"/>
-            <a:ext cx="10545775" cy="411480"/>
-          </a:xfrm>
-          <a:prstGeom prst="rect">
-            <a:avLst/>
-          </a:prstGeom>
-          <a:noFill/>
-        </p:spPr>
-        <p:txBody>
-          <a:bodyPr wrap="square" lIns="0" rIns="0" tIns="0" bIns="0">
-            <a:spAutoFit/>
-          </a:bodyPr>
-          <a:lstStyle/>
-          <a:p>
-            <a:pPr algn="l">
-              <a:lnSpc>
-                <a:spcPct val="100000"/>
-              </a:lnSpc>
-            </a:pPr>
-            <a:r>
-              <a:rPr sz="2200" b="1">
-                <a:solidFill>
-                  <a:srgbClr val="1565C0"/>
-                </a:solidFill>
-                <a:latin typeface="Calibri"/>
-              </a:rPr>
-              <a:t>LoadLens Diagnose</a:t>
-            </a:r>
-          </a:p>
-        </p:txBody>
-      </p:sp>
-      <p:sp>
-        <p:nvSpPr>
-          <p:cNvPr id="5" name="TextBox 4"/>
-          <p:cNvSpPr txBox="1"/>
-          <p:nvPr/>
-        </p:nvSpPr>
-        <p:spPr>
-          <a:xfrm>
-            <a:off x="822960" y="2852928"/>
-            <a:ext cx="10545775" cy="1371600"/>
-          </a:xfrm>
-          <a:prstGeom prst="rect">
-            <a:avLst/>
-          </a:prstGeom>
-          <a:noFill/>
-        </p:spPr>
-        <p:txBody>
-          <a:bodyPr wrap="square" lIns="0" rIns="0" tIns="0" bIns="0">
-            <a:spAutoFit/>
-          </a:bodyPr>
-          <a:lstStyle/>
-          <a:p>
-            <a:pPr algn="l">
-              <a:lnSpc>
-                <a:spcPct val="135000"/>
-              </a:lnSpc>
-            </a:pPr>
-            <a:r>
-              <a:rPr sz="1600" b="0">
-                <a:solidFill>
-                  <a:srgbClr val="1A2027"/>
-                </a:solidFill>
-                <a:latin typeface="Calibri"/>
-              </a:rPr>
-              <a:t>Читает обычный журнал nginx, JSON или CSV и показывает: насколько стоимость различается внутри каждого маршрута, объясняется ли разброс параметрами запроса и во сколько раз ошибается оценка по маршруту.</a:t>
-            </a:r>
-          </a:p>
-        </p:txBody>
-      </p:sp>
-      <p:sp>
-        <p:nvSpPr>
-          <p:cNvPr id="6" name="Rounded Rectangle 5"/>
+              <a:t>Границы применимости мы определили и измерили, а не замолчали. Это часть результата.</a:t>
+            </a:r>
+          </a:p>
+        </p:txBody>
+      </p:sp>
+      <p:sp>
+        <p:nvSpPr>
+          <p:cNvPr id="4" name="Rounded Rectangle 3"/>
           <p:cNvSpPr/>
           <p:nvPr/>
         </p:nvSpPr>
         <p:spPr>
           <a:xfrm>
-            <a:off x="822960" y="4343400"/>
-            <a:ext cx="3344570" cy="1371600"/>
+            <a:off x="713232" y="2350008"/>
+            <a:ext cx="10765231" cy="1078992"/>
           </a:xfrm>
           <a:prstGeom prst="roundRect">
             <a:avLst>
@@ -8630,14 +10497,14 @@
       </p:sp>
       <p:sp>
         <p:nvSpPr>
-          <p:cNvPr id="7" name="TextBox 6"/>
-          <p:cNvSpPr txBox="1"/>
-          <p:nvPr/>
-        </p:nvSpPr>
-        <p:spPr>
-          <a:xfrm>
-            <a:off x="1042416" y="4526280"/>
-            <a:ext cx="2905658" cy="603504"/>
+          <p:cNvPr id="5" name="TextBox 4"/>
+          <p:cNvSpPr txBox="1"/>
+          <p:nvPr/>
+        </p:nvSpPr>
+        <p:spPr>
+          <a:xfrm>
+            <a:off x="932688" y="2496312"/>
+            <a:ext cx="10326319" cy="329184"/>
           </a:xfrm>
           <a:prstGeom prst="rect">
             <a:avLst/>
@@ -8656,66 +10523,66 @@
               </a:lnSpc>
             </a:pPr>
             <a:r>
-              <a:rPr sz="3000" b="1">
-                <a:solidFill>
-                  <a:srgbClr val="1A2027"/>
-                </a:solidFill>
-                <a:latin typeface="Calibri"/>
-              </a:rPr>
-              <a:t>0</a:t>
-            </a:r>
-          </a:p>
-        </p:txBody>
-      </p:sp>
-      <p:sp>
-        <p:nvSpPr>
-          <p:cNvPr id="8" name="TextBox 7"/>
-          <p:cNvSpPr txBox="1"/>
-          <p:nvPr/>
-        </p:nvSpPr>
-        <p:spPr>
-          <a:xfrm>
-            <a:off x="1042416" y="5148072"/>
-            <a:ext cx="2905658" cy="438912"/>
-          </a:xfrm>
-          <a:prstGeom prst="rect">
-            <a:avLst/>
-          </a:prstGeom>
-          <a:noFill/>
-        </p:spPr>
-        <p:txBody>
-          <a:bodyPr wrap="square" lIns="0" rIns="0" tIns="0" bIns="0">
-            <a:spAutoFit/>
-          </a:bodyPr>
-          <a:lstStyle/>
-          <a:p>
-            <a:pPr algn="l">
-              <a:lnSpc>
-                <a:spcPct val="115000"/>
-              </a:lnSpc>
-            </a:pPr>
-            <a:r>
-              <a:rPr sz="1200" b="0">
+              <a:rPr sz="1600" b="1">
+                <a:solidFill>
+                  <a:srgbClr val="C62828"/>
+                </a:solidFill>
+                <a:latin typeface="Calibri"/>
+              </a:rPr>
+              <a:t>На однородном потоке — вредно</a:t>
+            </a:r>
+          </a:p>
+        </p:txBody>
+      </p:sp>
+      <p:sp>
+        <p:nvSpPr>
+          <p:cNvPr id="6" name="TextBox 5"/>
+          <p:cNvSpPr txBox="1"/>
+          <p:nvPr/>
+        </p:nvSpPr>
+        <p:spPr>
+          <a:xfrm>
+            <a:off x="932688" y="2880360"/>
+            <a:ext cx="10326319" cy="475488"/>
+          </a:xfrm>
+          <a:prstGeom prst="rect">
+            <a:avLst/>
+          </a:prstGeom>
+          <a:noFill/>
+        </p:spPr>
+        <p:txBody>
+          <a:bodyPr wrap="square" lIns="0" rIns="0" tIns="0" bIns="0">
+            <a:spAutoFit/>
+          </a:bodyPr>
+          <a:lstStyle/>
+          <a:p>
+            <a:pPr algn="l">
+              <a:lnSpc>
+                <a:spcPct val="120000"/>
+              </a:lnSpc>
+            </a:pPr>
+            <a:r>
+              <a:rPr sz="1300" b="0">
                 <a:solidFill>
                   <a:srgbClr val="5B6B7A"/>
                 </a:solidFill>
                 <a:latin typeface="Calibri"/>
               </a:rPr>
-              <a:t>изменений в коде сервиса</a:t>
-            </a:r>
-          </a:p>
-        </p:txBody>
-      </p:sp>
-      <p:sp>
-        <p:nvSpPr>
-          <p:cNvPr id="9" name="Rounded Rectangle 8"/>
+              <a:t>Если все запросы одной природы, разносить их не по чему. Маршрутизация проигрывает асинхронному движку 43 % на чистом вводе-выводе.</a:t>
+            </a:r>
+          </a:p>
+        </p:txBody>
+      </p:sp>
+      <p:sp>
+        <p:nvSpPr>
+          <p:cNvPr id="7" name="Rounded Rectangle 6"/>
           <p:cNvSpPr/>
           <p:nvPr/>
         </p:nvSpPr>
         <p:spPr>
           <a:xfrm>
-            <a:off x="4423562" y="4343400"/>
-            <a:ext cx="3344570" cy="1371600"/>
+            <a:off x="713232" y="3575304"/>
+            <a:ext cx="10765231" cy="1078992"/>
           </a:xfrm>
           <a:prstGeom prst="roundRect">
             <a:avLst>
@@ -8754,14 +10621,14 @@
       </p:sp>
       <p:sp>
         <p:nvSpPr>
-          <p:cNvPr id="10" name="TextBox 9"/>
-          <p:cNvSpPr txBox="1"/>
-          <p:nvPr/>
-        </p:nvSpPr>
-        <p:spPr>
-          <a:xfrm>
-            <a:off x="4643018" y="4526280"/>
-            <a:ext cx="2905658" cy="603504"/>
+          <p:cNvPr id="8" name="TextBox 7"/>
+          <p:cNvSpPr txBox="1"/>
+          <p:nvPr/>
+        </p:nvSpPr>
+        <p:spPr>
+          <a:xfrm>
+            <a:off x="932688" y="3721608"/>
+            <a:ext cx="10326319" cy="329184"/>
           </a:xfrm>
           <a:prstGeom prst="rect">
             <a:avLst/>
@@ -8780,66 +10647,66 @@
               </a:lnSpc>
             </a:pPr>
             <a:r>
-              <a:rPr sz="3000" b="1">
-                <a:solidFill>
-                  <a:srgbClr val="1A2027"/>
-                </a:solidFill>
-                <a:latin typeface="Calibri"/>
-              </a:rPr>
-              <a:t>0</a:t>
-            </a:r>
-          </a:p>
-        </p:txBody>
-      </p:sp>
-      <p:sp>
-        <p:nvSpPr>
-          <p:cNvPr id="11" name="TextBox 10"/>
-          <p:cNvSpPr txBox="1"/>
-          <p:nvPr/>
-        </p:nvSpPr>
-        <p:spPr>
-          <a:xfrm>
-            <a:off x="4643018" y="5148072"/>
-            <a:ext cx="2905658" cy="438912"/>
-          </a:xfrm>
-          <a:prstGeom prst="rect">
-            <a:avLst/>
-          </a:prstGeom>
-          <a:noFill/>
-        </p:spPr>
-        <p:txBody>
-          <a:bodyPr wrap="square" lIns="0" rIns="0" tIns="0" bIns="0">
-            <a:spAutoFit/>
-          </a:bodyPr>
-          <a:lstStyle/>
-          <a:p>
-            <a:pPr algn="l">
-              <a:lnSpc>
-                <a:spcPct val="115000"/>
-              </a:lnSpc>
-            </a:pPr>
-            <a:r>
-              <a:rPr sz="1200" b="0">
+              <a:rPr sz="1600" b="1">
+                <a:solidFill>
+                  <a:srgbClr val="C62828"/>
+                </a:solidFill>
+                <a:latin typeface="Calibri"/>
+              </a:rPr>
+              <a:t>Против least-connections — размен, не победа</a:t>
+            </a:r>
+          </a:p>
+        </p:txBody>
+      </p:sp>
+      <p:sp>
+        <p:nvSpPr>
+          <p:cNvPr id="9" name="TextBox 8"/>
+          <p:cNvSpPr txBox="1"/>
+          <p:nvPr/>
+        </p:nvSpPr>
+        <p:spPr>
+          <a:xfrm>
+            <a:off x="932688" y="4105656"/>
+            <a:ext cx="10326319" cy="475488"/>
+          </a:xfrm>
+          <a:prstGeom prst="rect">
+            <a:avLst/>
+          </a:prstGeom>
+          <a:noFill/>
+        </p:spPr>
+        <p:txBody>
+          <a:bodyPr wrap="square" lIns="0" rIns="0" tIns="0" bIns="0">
+            <a:spAutoFit/>
+          </a:bodyPr>
+          <a:lstStyle/>
+          <a:p>
+            <a:pPr algn="l">
+              <a:lnSpc>
+                <a:spcPct val="120000"/>
+              </a:lnSpc>
+            </a:pPr>
+            <a:r>
+              <a:rPr sz="1300" b="0">
                 <a:solidFill>
                   <a:srgbClr val="5B6B7A"/>
                 </a:solidFill>
                 <a:latin typeface="Calibri"/>
               </a:rPr>
-              <a:t>зависимостей, одна команда</a:t>
-            </a:r>
-          </a:p>
-        </p:txBody>
-      </p:sp>
-      <p:sp>
-        <p:nvSpPr>
-          <p:cNvPr id="12" name="Rounded Rectangle 11"/>
+              <a:t>Он выдаёт больше запросов в секунду, но у него тормозит 44 % лёгких обращений. Мы отдаём 20 % пропускной способности за шестикратное снижение хвоста.</a:t>
+            </a:r>
+          </a:p>
+        </p:txBody>
+      </p:sp>
+      <p:sp>
+        <p:nvSpPr>
+          <p:cNvPr id="10" name="Rounded Rectangle 9"/>
           <p:cNvSpPr/>
           <p:nvPr/>
         </p:nvSpPr>
         <p:spPr>
           <a:xfrm>
-            <a:off x="8024164" y="4343400"/>
-            <a:ext cx="3344570" cy="1371600"/>
+            <a:off x="713232" y="4800600"/>
+            <a:ext cx="10765231" cy="1078992"/>
           </a:xfrm>
           <a:prstGeom prst="roundRect">
             <a:avLst>
@@ -8878,14 +10745,14 @@
       </p:sp>
       <p:sp>
         <p:nvSpPr>
-          <p:cNvPr id="13" name="TextBox 12"/>
-          <p:cNvSpPr txBox="1"/>
-          <p:nvPr/>
-        </p:nvSpPr>
-        <p:spPr>
-          <a:xfrm>
-            <a:off x="8243620" y="4526280"/>
-            <a:ext cx="2905658" cy="603504"/>
+          <p:cNvPr id="11" name="TextBox 10"/>
+          <p:cNvSpPr txBox="1"/>
+          <p:nvPr/>
+        </p:nvSpPr>
+        <p:spPr>
+          <a:xfrm>
+            <a:off x="932688" y="4946904"/>
+            <a:ext cx="10326319" cy="329184"/>
           </a:xfrm>
           <a:prstGeom prst="rect">
             <a:avLst/>
@@ -8904,107 +10771,52 @@
               </a:lnSpc>
             </a:pPr>
             <a:r>
-              <a:rPr sz="3000" b="1">
-                <a:solidFill>
-                  <a:srgbClr val="1565C0"/>
-                </a:solidFill>
-                <a:latin typeface="Calibri"/>
-              </a:rPr>
-              <a:t>любой</a:t>
-            </a:r>
-          </a:p>
-        </p:txBody>
-      </p:sp>
-      <p:sp>
-        <p:nvSpPr>
-          <p:cNvPr id="14" name="TextBox 13"/>
-          <p:cNvSpPr txBox="1"/>
-          <p:nvPr/>
-        </p:nvSpPr>
-        <p:spPr>
-          <a:xfrm>
-            <a:off x="8243620" y="5148072"/>
-            <a:ext cx="2905658" cy="438912"/>
-          </a:xfrm>
-          <a:prstGeom prst="rect">
-            <a:avLst/>
-          </a:prstGeom>
-          <a:noFill/>
-        </p:spPr>
-        <p:txBody>
-          <a:bodyPr wrap="square" lIns="0" rIns="0" tIns="0" bIns="0">
-            <a:spAutoFit/>
-          </a:bodyPr>
-          <a:lstStyle/>
-          <a:p>
-            <a:pPr algn="l">
-              <a:lnSpc>
-                <a:spcPct val="115000"/>
-              </a:lnSpc>
-            </a:pPr>
-            <a:r>
-              <a:rPr sz="1200" b="0">
+              <a:rPr sz="1600" b="1">
+                <a:solidFill>
+                  <a:srgbClr val="C62828"/>
+                </a:solidFill>
+                <a:latin typeface="Calibri"/>
+              </a:rPr>
+              <a:t>При деградации самого движка — преимущество теряется</a:t>
+            </a:r>
+          </a:p>
+        </p:txBody>
+      </p:sp>
+      <p:sp>
+        <p:nvSpPr>
+          <p:cNvPr id="12" name="TextBox 11"/>
+          <p:cNvSpPr txBox="1"/>
+          <p:nvPr/>
+        </p:nvSpPr>
+        <p:spPr>
+          <a:xfrm>
+            <a:off x="932688" y="5330952"/>
+            <a:ext cx="10326319" cy="475488"/>
+          </a:xfrm>
+          <a:prstGeom prst="rect">
+            <a:avLst/>
+          </a:prstGeom>
+          <a:noFill/>
+        </p:spPr>
+        <p:txBody>
+          <a:bodyPr wrap="square" lIns="0" rIns="0" tIns="0" bIns="0">
+            <a:spAutoFit/>
+          </a:bodyPr>
+          <a:lstStyle/>
+          <a:p>
+            <a:pPr algn="l">
+              <a:lnSpc>
+                <a:spcPct val="120000"/>
+              </a:lnSpc>
+            </a:pPr>
+            <a:r>
+              <a:rPr sz="1300" b="0">
                 <a:solidFill>
                   <a:srgbClr val="5B6B7A"/>
                 </a:solidFill>
                 <a:latin typeface="Calibri"/>
               </a:rPr>
-              <a:t>стек: Node, Go, Java, PHP —</a:t>
-            </a:r>
-          </a:p>
-          <a:p>
-            <a:pPr algn="l">
-              <a:lnSpc>
-                <a:spcPct val="115000"/>
-              </a:lnSpc>
-            </a:pPr>
-            <a:r>
-              <a:rPr sz="1200" b="0">
-                <a:solidFill>
-                  <a:srgbClr val="5B6B7A"/>
-                </a:solidFill>
-                <a:latin typeface="Calibri"/>
-              </a:rPr>
-              <a:t>читается журнал, а не код</a:t>
-            </a:r>
-          </a:p>
-        </p:txBody>
-      </p:sp>
-      <p:sp>
-        <p:nvSpPr>
-          <p:cNvPr id="15" name="TextBox 14"/>
-          <p:cNvSpPr txBox="1"/>
-          <p:nvPr/>
-        </p:nvSpPr>
-        <p:spPr>
-          <a:xfrm>
-            <a:off x="822960" y="5897880"/>
-            <a:ext cx="10545775" cy="365760"/>
-          </a:xfrm>
-          <a:prstGeom prst="rect">
-            <a:avLst/>
-          </a:prstGeom>
-          <a:noFill/>
-        </p:spPr>
-        <p:txBody>
-          <a:bodyPr wrap="square" lIns="0" rIns="0" tIns="0" bIns="0">
-            <a:spAutoFit/>
-          </a:bodyPr>
-          <a:lstStyle/>
-          <a:p>
-            <a:pPr algn="l">
-              <a:lnSpc>
-                <a:spcPct val="100000"/>
-              </a:lnSpc>
-            </a:pPr>
-            <a:r>
-              <a:rPr sz="1500" b="0">
-                <a:solidFill>
-                  <a:srgbClr val="5B6B7A"/>
-                </a:solidFill>
-                <a:latin typeface="Calibri"/>
-              </a:rPr>
-              <a:t>python loadlens.py access.log --html report.html</a:t>
+              <a:t>Если асинхронный движок лишается процессорного времени, обычная балансировка становится лучше. Подход опирается на то, что движок остаётся таким, каким его измерили.</a:t>
             </a:r>
           </a:p>
         </p:txBody>
@@ -9069,7 +10881,7 @@
                 </a:solidFill>
                 <a:latin typeface="Calibri"/>
               </a:rPr>
-              <a:t>Инструмент выводит сложность из времён ответа</a:t>
+              <a:t>Вход в продукт — не прокси, а диагностика</a:t>
             </a:r>
           </a:p>
         </p:txBody>
@@ -9108,7 +10920,7 @@
                 </a:solidFill>
                 <a:latin typeface="Calibri"/>
               </a:rPr>
-              <a:t>На журнале нашего стенда LoadLens сам, ничего не зная об устройстве сервиса, восстановил</a:t>
+              <a:t>Никто не поставит незнакомый прокси в путь боевых запросов. Но журнал обращений есть у всех,</a:t>
             </a:r>
           </a:p>
           <a:p>
@@ -9124,7 +10936,7 @@
                 </a:solidFill>
                 <a:latin typeface="Calibri"/>
               </a:rPr>
-              <a:t>зависимость стоимости от параметра запроса.</a:t>
+              <a:t>и прочитать его — нулевой риск.</a:t>
             </a:r>
           </a:p>
         </p:txBody>
@@ -9138,7 +10950,7 @@
         <p:spPr>
           <a:xfrm>
             <a:off x="822960" y="2350008"/>
-            <a:ext cx="3553467" cy="310896"/>
+            <a:ext cx="10545775" cy="411480"/>
           </a:xfrm>
           <a:prstGeom prst="rect">
             <a:avLst/>
@@ -9157,13 +10969,13 @@
               </a:lnSpc>
             </a:pPr>
             <a:r>
-              <a:rPr sz="1200" b="1">
-                <a:solidFill>
-                  <a:srgbClr val="5B6B7A"/>
-                </a:solidFill>
-                <a:latin typeface="Calibri"/>
-              </a:rPr>
-              <a:t>Маршрут</a:t>
+              <a:rPr sz="2200" b="1">
+                <a:solidFill>
+                  <a:srgbClr val="1565C0"/>
+                </a:solidFill>
+                <a:latin typeface="Calibri"/>
+              </a:rPr>
+              <a:t>LoadLens Diagnose</a:t>
             </a:r>
           </a:p>
         </p:txBody>
@@ -9176,164 +10988,47 @@
         </p:nvSpPr>
         <p:spPr>
           <a:xfrm>
-            <a:off x="4376427" y="2350008"/>
-            <a:ext cx="1375535" cy="310896"/>
-          </a:xfrm>
-          <a:prstGeom prst="rect">
-            <a:avLst/>
-          </a:prstGeom>
-          <a:noFill/>
-        </p:spPr>
-        <p:txBody>
-          <a:bodyPr wrap="square" lIns="0" rIns="0" tIns="0" bIns="0">
-            <a:spAutoFit/>
-          </a:bodyPr>
-          <a:lstStyle/>
-          <a:p>
-            <a:pPr algn="l">
-              <a:lnSpc>
-                <a:spcPct val="100000"/>
-              </a:lnSpc>
-            </a:pPr>
-            <a:r>
-              <a:rPr sz="1200" b="1">
-                <a:solidFill>
-                  <a:srgbClr val="5B6B7A"/>
-                </a:solidFill>
-                <a:latin typeface="Calibri"/>
-              </a:rPr>
-              <a:t>Параметр</a:t>
-            </a:r>
-          </a:p>
-        </p:txBody>
-      </p:sp>
-      <p:sp>
-        <p:nvSpPr>
-          <p:cNvPr id="6" name="TextBox 5"/>
-          <p:cNvSpPr txBox="1"/>
-          <p:nvPr/>
-        </p:nvSpPr>
-        <p:spPr>
-          <a:xfrm>
-            <a:off x="5751963" y="2350008"/>
-            <a:ext cx="2177931" cy="310896"/>
-          </a:xfrm>
-          <a:prstGeom prst="rect">
-            <a:avLst/>
-          </a:prstGeom>
-          <a:noFill/>
-        </p:spPr>
-        <p:txBody>
-          <a:bodyPr wrap="square" lIns="0" rIns="0" tIns="0" bIns="0">
-            <a:spAutoFit/>
-          </a:bodyPr>
-          <a:lstStyle/>
-          <a:p>
-            <a:pPr algn="l">
-              <a:lnSpc>
-                <a:spcPct val="100000"/>
-              </a:lnSpc>
-            </a:pPr>
-            <a:r>
-              <a:rPr sz="1200" b="1">
-                <a:solidFill>
-                  <a:srgbClr val="5B6B7A"/>
-                </a:solidFill>
-                <a:latin typeface="Calibri"/>
-              </a:rPr>
-              <a:t>Найденный закон</a:t>
-            </a:r>
-          </a:p>
-        </p:txBody>
-      </p:sp>
-      <p:sp>
-        <p:nvSpPr>
-          <p:cNvPr id="7" name="TextBox 6"/>
-          <p:cNvSpPr txBox="1"/>
-          <p:nvPr/>
-        </p:nvSpPr>
-        <p:spPr>
-          <a:xfrm>
-            <a:off x="7929895" y="2350008"/>
-            <a:ext cx="2063303" cy="310896"/>
-          </a:xfrm>
-          <a:prstGeom prst="rect">
-            <a:avLst/>
-          </a:prstGeom>
-          <a:noFill/>
-        </p:spPr>
-        <p:txBody>
-          <a:bodyPr wrap="square" lIns="0" rIns="0" tIns="0" bIns="0">
-            <a:spAutoFit/>
-          </a:bodyPr>
-          <a:lstStyle/>
-          <a:p>
-            <a:pPr algn="l">
-              <a:lnSpc>
-                <a:spcPct val="100000"/>
-              </a:lnSpc>
-            </a:pPr>
-            <a:r>
-              <a:rPr sz="1200" b="1">
-                <a:solidFill>
-                  <a:srgbClr val="5B6B7A"/>
-                </a:solidFill>
-                <a:latin typeface="Calibri"/>
-              </a:rPr>
-              <a:t>Истинный показатель</a:t>
-            </a:r>
-          </a:p>
-        </p:txBody>
-      </p:sp>
-      <p:sp>
-        <p:nvSpPr>
-          <p:cNvPr id="8" name="TextBox 7"/>
-          <p:cNvSpPr txBox="1"/>
-          <p:nvPr/>
-        </p:nvSpPr>
-        <p:spPr>
-          <a:xfrm>
-            <a:off x="9993199" y="2350008"/>
-            <a:ext cx="1375535" cy="310896"/>
-          </a:xfrm>
-          <a:prstGeom prst="rect">
-            <a:avLst/>
-          </a:prstGeom>
-          <a:noFill/>
-        </p:spPr>
-        <p:txBody>
-          <a:bodyPr wrap="square" lIns="0" rIns="0" tIns="0" bIns="0">
-            <a:spAutoFit/>
-          </a:bodyPr>
-          <a:lstStyle/>
-          <a:p>
-            <a:pPr algn="l">
-              <a:lnSpc>
-                <a:spcPct val="100000"/>
-              </a:lnSpc>
-            </a:pPr>
-            <a:r>
-              <a:rPr sz="1200" b="1">
-                <a:solidFill>
-                  <a:srgbClr val="5B6B7A"/>
-                </a:solidFill>
-                <a:latin typeface="Calibri"/>
-              </a:rPr>
-              <a:t>Объясняет</a:t>
-            </a:r>
-          </a:p>
-        </p:txBody>
-      </p:sp>
-      <p:sp>
-        <p:nvSpPr>
-          <p:cNvPr id="9" name="Rounded Rectangle 8"/>
+            <a:off x="822960" y="2852928"/>
+            <a:ext cx="10545775" cy="1371600"/>
+          </a:xfrm>
+          <a:prstGeom prst="rect">
+            <a:avLst/>
+          </a:prstGeom>
+          <a:noFill/>
+        </p:spPr>
+        <p:txBody>
+          <a:bodyPr wrap="square" lIns="0" rIns="0" tIns="0" bIns="0">
+            <a:spAutoFit/>
+          </a:bodyPr>
+          <a:lstStyle/>
+          <a:p>
+            <a:pPr algn="l">
+              <a:lnSpc>
+                <a:spcPct val="135000"/>
+              </a:lnSpc>
+            </a:pPr>
+            <a:r>
+              <a:rPr sz="1600" b="0">
+                <a:solidFill>
+                  <a:srgbClr val="1A2027"/>
+                </a:solidFill>
+                <a:latin typeface="Calibri"/>
+              </a:rPr>
+              <a:t>Читает обычный журнал nginx, JSON или CSV и показывает: насколько стоимость различается внутри каждого маршрута, объясняется ли разброс параметрами запроса и во сколько раз ошибается оценка по маршруту.</a:t>
+            </a:r>
+          </a:p>
+        </p:txBody>
+      </p:sp>
+      <p:sp>
+        <p:nvSpPr>
+          <p:cNvPr id="6" name="Rounded Rectangle 5"/>
           <p:cNvSpPr/>
           <p:nvPr/>
         </p:nvSpPr>
         <p:spPr>
           <a:xfrm>
-            <a:off x="713232" y="2670048"/>
-            <a:ext cx="10765231" cy="457200"/>
+            <a:off x="822960" y="4343400"/>
+            <a:ext cx="3344570" cy="1371600"/>
           </a:xfrm>
           <a:prstGeom prst="roundRect">
             <a:avLst>
@@ -9372,14 +11067,14 @@
       </p:sp>
       <p:sp>
         <p:nvSpPr>
-          <p:cNvPr id="10" name="TextBox 9"/>
-          <p:cNvSpPr txBox="1"/>
-          <p:nvPr/>
-        </p:nvSpPr>
-        <p:spPr>
-          <a:xfrm>
-            <a:off x="822960" y="2743200"/>
-            <a:ext cx="3553467" cy="402336"/>
+          <p:cNvPr id="7" name="TextBox 6"/>
+          <p:cNvSpPr txBox="1"/>
+          <p:nvPr/>
+        </p:nvSpPr>
+        <p:spPr>
+          <a:xfrm>
+            <a:off x="1042416" y="4526280"/>
+            <a:ext cx="2905658" cy="603504"/>
           </a:xfrm>
           <a:prstGeom prst="rect">
             <a:avLst/>
@@ -9398,183 +11093,66 @@
               </a:lnSpc>
             </a:pPr>
             <a:r>
-              <a:rPr sz="1300" b="0">
+              <a:rPr sz="3000" b="1">
                 <a:solidFill>
                   <a:srgbClr val="1A2027"/>
                 </a:solidFill>
                 <a:latin typeface="Calibri"/>
               </a:rPr>
-              <a:t>/api/image/thumbnail</a:t>
-            </a:r>
-          </a:p>
-        </p:txBody>
-      </p:sp>
-      <p:sp>
-        <p:nvSpPr>
-          <p:cNvPr id="11" name="TextBox 10"/>
-          <p:cNvSpPr txBox="1"/>
-          <p:nvPr/>
-        </p:nvSpPr>
-        <p:spPr>
-          <a:xfrm>
-            <a:off x="4376427" y="2743200"/>
-            <a:ext cx="1375535" cy="402336"/>
-          </a:xfrm>
-          <a:prstGeom prst="rect">
-            <a:avLst/>
-          </a:prstGeom>
-          <a:noFill/>
-        </p:spPr>
-        <p:txBody>
-          <a:bodyPr wrap="square" lIns="0" rIns="0" tIns="0" bIns="0">
-            <a:spAutoFit/>
-          </a:bodyPr>
-          <a:lstStyle/>
-          <a:p>
-            <a:pPr algn="l">
-              <a:lnSpc>
-                <a:spcPct val="100000"/>
-              </a:lnSpc>
-            </a:pPr>
-            <a:r>
-              <a:rPr sz="1300" b="0">
-                <a:solidFill>
-                  <a:srgbClr val="1A2027"/>
-                </a:solidFill>
-                <a:latin typeface="Calibri"/>
-              </a:rPr>
-              <a:t>size</a:t>
-            </a:r>
-          </a:p>
-        </p:txBody>
-      </p:sp>
-      <p:sp>
-        <p:nvSpPr>
-          <p:cNvPr id="12" name="TextBox 11"/>
-          <p:cNvSpPr txBox="1"/>
-          <p:nvPr/>
-        </p:nvSpPr>
-        <p:spPr>
-          <a:xfrm>
-            <a:off x="5751963" y="2743200"/>
-            <a:ext cx="2177931" cy="402336"/>
-          </a:xfrm>
-          <a:prstGeom prst="rect">
-            <a:avLst/>
-          </a:prstGeom>
-          <a:noFill/>
-        </p:spPr>
-        <p:txBody>
-          <a:bodyPr wrap="square" lIns="0" rIns="0" tIns="0" bIns="0">
-            <a:spAutoFit/>
-          </a:bodyPr>
-          <a:lstStyle/>
-          <a:p>
-            <a:pPr algn="l">
-              <a:lnSpc>
-                <a:spcPct val="100000"/>
-              </a:lnSpc>
-            </a:pPr>
-            <a:r>
-              <a:rPr sz="1300" b="1">
-                <a:solidFill>
-                  <a:srgbClr val="2E7D32"/>
-                </a:solidFill>
-                <a:latin typeface="Calibri"/>
-              </a:rPr>
-              <a:t>~ size^1,91</a:t>
-            </a:r>
-          </a:p>
-        </p:txBody>
-      </p:sp>
-      <p:sp>
-        <p:nvSpPr>
-          <p:cNvPr id="13" name="TextBox 12"/>
-          <p:cNvSpPr txBox="1"/>
-          <p:nvPr/>
-        </p:nvSpPr>
-        <p:spPr>
-          <a:xfrm>
-            <a:off x="7929895" y="2743200"/>
-            <a:ext cx="2063303" cy="402336"/>
-          </a:xfrm>
-          <a:prstGeom prst="rect">
-            <a:avLst/>
-          </a:prstGeom>
-          <a:noFill/>
-        </p:spPr>
-        <p:txBody>
-          <a:bodyPr wrap="square" lIns="0" rIns="0" tIns="0" bIns="0">
-            <a:spAutoFit/>
-          </a:bodyPr>
-          <a:lstStyle/>
-          <a:p>
-            <a:pPr algn="l">
-              <a:lnSpc>
-                <a:spcPct val="100000"/>
-              </a:lnSpc>
-            </a:pPr>
-            <a:r>
-              <a:rPr sz="1300" b="0">
-                <a:solidFill>
-                  <a:srgbClr val="1A2027"/>
-                </a:solidFill>
-                <a:latin typeface="Calibri"/>
-              </a:rPr>
-              <a:t>2,00</a:t>
-            </a:r>
-          </a:p>
-        </p:txBody>
-      </p:sp>
-      <p:sp>
-        <p:nvSpPr>
-          <p:cNvPr id="14" name="TextBox 13"/>
-          <p:cNvSpPr txBox="1"/>
-          <p:nvPr/>
-        </p:nvSpPr>
-        <p:spPr>
-          <a:xfrm>
-            <a:off x="9993199" y="2743200"/>
-            <a:ext cx="1375535" cy="402336"/>
-          </a:xfrm>
-          <a:prstGeom prst="rect">
-            <a:avLst/>
-          </a:prstGeom>
-          <a:noFill/>
-        </p:spPr>
-        <p:txBody>
-          <a:bodyPr wrap="square" lIns="0" rIns="0" tIns="0" bIns="0">
-            <a:spAutoFit/>
-          </a:bodyPr>
-          <a:lstStyle/>
-          <a:p>
-            <a:pPr algn="l">
-              <a:lnSpc>
-                <a:spcPct val="100000"/>
-              </a:lnSpc>
-            </a:pPr>
-            <a:r>
-              <a:rPr sz="1300" b="0">
-                <a:solidFill>
-                  <a:srgbClr val="1A2027"/>
-                </a:solidFill>
-                <a:latin typeface="Calibri"/>
-              </a:rPr>
-              <a:t>99 %</a:t>
-            </a:r>
-          </a:p>
-        </p:txBody>
-      </p:sp>
-      <p:sp>
-        <p:nvSpPr>
-          <p:cNvPr id="15" name="Rounded Rectangle 14"/>
+              <a:t>0</a:t>
+            </a:r>
+          </a:p>
+        </p:txBody>
+      </p:sp>
+      <p:sp>
+        <p:nvSpPr>
+          <p:cNvPr id="8" name="TextBox 7"/>
+          <p:cNvSpPr txBox="1"/>
+          <p:nvPr/>
+        </p:nvSpPr>
+        <p:spPr>
+          <a:xfrm>
+            <a:off x="1042416" y="5148072"/>
+            <a:ext cx="2905658" cy="438912"/>
+          </a:xfrm>
+          <a:prstGeom prst="rect">
+            <a:avLst/>
+          </a:prstGeom>
+          <a:noFill/>
+        </p:spPr>
+        <p:txBody>
+          <a:bodyPr wrap="square" lIns="0" rIns="0" tIns="0" bIns="0">
+            <a:spAutoFit/>
+          </a:bodyPr>
+          <a:lstStyle/>
+          <a:p>
+            <a:pPr algn="l">
+              <a:lnSpc>
+                <a:spcPct val="115000"/>
+              </a:lnSpc>
+            </a:pPr>
+            <a:r>
+              <a:rPr sz="1200" b="0">
+                <a:solidFill>
+                  <a:srgbClr val="5B6B7A"/>
+                </a:solidFill>
+                <a:latin typeface="Calibri"/>
+              </a:rPr>
+              <a:t>изменений в коде сервиса</a:t>
+            </a:r>
+          </a:p>
+        </p:txBody>
+      </p:sp>
+      <p:sp>
+        <p:nvSpPr>
+          <p:cNvPr id="9" name="Rounded Rectangle 8"/>
           <p:cNvSpPr/>
           <p:nvPr/>
         </p:nvSpPr>
         <p:spPr>
           <a:xfrm>
-            <a:off x="713232" y="3127248"/>
-            <a:ext cx="10765231" cy="457200"/>
+            <a:off x="4423562" y="4343400"/>
+            <a:ext cx="3344570" cy="1371600"/>
           </a:xfrm>
           <a:prstGeom prst="roundRect">
             <a:avLst>
@@ -9582,7 +11160,7 @@
             </a:avLst>
           </a:prstGeom>
           <a:solidFill>
-            <a:srgbClr val="FFFFFF"/>
+            <a:srgbClr val="F2F5F8"/>
           </a:solidFill>
           <a:ln>
             <a:noFill/>
@@ -9613,14 +11191,14 @@
       </p:sp>
       <p:sp>
         <p:nvSpPr>
-          <p:cNvPr id="16" name="TextBox 15"/>
-          <p:cNvSpPr txBox="1"/>
-          <p:nvPr/>
-        </p:nvSpPr>
-        <p:spPr>
-          <a:xfrm>
-            <a:off x="822960" y="3200400"/>
-            <a:ext cx="3553467" cy="402336"/>
+          <p:cNvPr id="10" name="TextBox 9"/>
+          <p:cNvSpPr txBox="1"/>
+          <p:nvPr/>
+        </p:nvSpPr>
+        <p:spPr>
+          <a:xfrm>
+            <a:off x="4643018" y="4526280"/>
+            <a:ext cx="2905658" cy="603504"/>
           </a:xfrm>
           <a:prstGeom prst="rect">
             <a:avLst/>
@@ -9639,183 +11217,66 @@
               </a:lnSpc>
             </a:pPr>
             <a:r>
-              <a:rPr sz="1300" b="0">
+              <a:rPr sz="3000" b="1">
                 <a:solidFill>
                   <a:srgbClr val="1A2027"/>
                 </a:solidFill>
                 <a:latin typeface="Calibri"/>
               </a:rPr>
-              <a:t>/api/report/generate</a:t>
-            </a:r>
-          </a:p>
-        </p:txBody>
-      </p:sp>
-      <p:sp>
-        <p:nvSpPr>
-          <p:cNvPr id="17" name="TextBox 16"/>
-          <p:cNvSpPr txBox="1"/>
-          <p:nvPr/>
-        </p:nvSpPr>
-        <p:spPr>
-          <a:xfrm>
-            <a:off x="4376427" y="3200400"/>
-            <a:ext cx="1375535" cy="402336"/>
-          </a:xfrm>
-          <a:prstGeom prst="rect">
-            <a:avLst/>
-          </a:prstGeom>
-          <a:noFill/>
-        </p:spPr>
-        <p:txBody>
-          <a:bodyPr wrap="square" lIns="0" rIns="0" tIns="0" bIns="0">
-            <a:spAutoFit/>
-          </a:bodyPr>
-          <a:lstStyle/>
-          <a:p>
-            <a:pPr algn="l">
-              <a:lnSpc>
-                <a:spcPct val="100000"/>
-              </a:lnSpc>
-            </a:pPr>
-            <a:r>
-              <a:rPr sz="1300" b="0">
-                <a:solidFill>
-                  <a:srgbClr val="1A2027"/>
-                </a:solidFill>
-                <a:latin typeface="Calibri"/>
-              </a:rPr>
-              <a:t>days</a:t>
-            </a:r>
-          </a:p>
-        </p:txBody>
-      </p:sp>
-      <p:sp>
-        <p:nvSpPr>
-          <p:cNvPr id="18" name="TextBox 17"/>
-          <p:cNvSpPr txBox="1"/>
-          <p:nvPr/>
-        </p:nvSpPr>
-        <p:spPr>
-          <a:xfrm>
-            <a:off x="5751963" y="3200400"/>
-            <a:ext cx="2177931" cy="402336"/>
-          </a:xfrm>
-          <a:prstGeom prst="rect">
-            <a:avLst/>
-          </a:prstGeom>
-          <a:noFill/>
-        </p:spPr>
-        <p:txBody>
-          <a:bodyPr wrap="square" lIns="0" rIns="0" tIns="0" bIns="0">
-            <a:spAutoFit/>
-          </a:bodyPr>
-          <a:lstStyle/>
-          <a:p>
-            <a:pPr algn="l">
-              <a:lnSpc>
-                <a:spcPct val="100000"/>
-              </a:lnSpc>
-            </a:pPr>
-            <a:r>
-              <a:rPr sz="1300" b="1">
-                <a:solidFill>
-                  <a:srgbClr val="2E7D32"/>
-                </a:solidFill>
-                <a:latin typeface="Calibri"/>
-              </a:rPr>
-              <a:t>~ days^1,98</a:t>
-            </a:r>
-          </a:p>
-        </p:txBody>
-      </p:sp>
-      <p:sp>
-        <p:nvSpPr>
-          <p:cNvPr id="19" name="TextBox 18"/>
-          <p:cNvSpPr txBox="1"/>
-          <p:nvPr/>
-        </p:nvSpPr>
-        <p:spPr>
-          <a:xfrm>
-            <a:off x="7929895" y="3200400"/>
-            <a:ext cx="2063303" cy="402336"/>
-          </a:xfrm>
-          <a:prstGeom prst="rect">
-            <a:avLst/>
-          </a:prstGeom>
-          <a:noFill/>
-        </p:spPr>
-        <p:txBody>
-          <a:bodyPr wrap="square" lIns="0" rIns="0" tIns="0" bIns="0">
-            <a:spAutoFit/>
-          </a:bodyPr>
-          <a:lstStyle/>
-          <a:p>
-            <a:pPr algn="l">
-              <a:lnSpc>
-                <a:spcPct val="100000"/>
-              </a:lnSpc>
-            </a:pPr>
-            <a:r>
-              <a:rPr sz="1300" b="0">
-                <a:solidFill>
-                  <a:srgbClr val="1A2027"/>
-                </a:solidFill>
-                <a:latin typeface="Calibri"/>
-              </a:rPr>
-              <a:t>2,00</a:t>
-            </a:r>
-          </a:p>
-        </p:txBody>
-      </p:sp>
-      <p:sp>
-        <p:nvSpPr>
-          <p:cNvPr id="20" name="TextBox 19"/>
-          <p:cNvSpPr txBox="1"/>
-          <p:nvPr/>
-        </p:nvSpPr>
-        <p:spPr>
-          <a:xfrm>
-            <a:off x="9993199" y="3200400"/>
-            <a:ext cx="1375535" cy="402336"/>
-          </a:xfrm>
-          <a:prstGeom prst="rect">
-            <a:avLst/>
-          </a:prstGeom>
-          <a:noFill/>
-        </p:spPr>
-        <p:txBody>
-          <a:bodyPr wrap="square" lIns="0" rIns="0" tIns="0" bIns="0">
-            <a:spAutoFit/>
-          </a:bodyPr>
-          <a:lstStyle/>
-          <a:p>
-            <a:pPr algn="l">
-              <a:lnSpc>
-                <a:spcPct val="100000"/>
-              </a:lnSpc>
-            </a:pPr>
-            <a:r>
-              <a:rPr sz="1300" b="0">
-                <a:solidFill>
-                  <a:srgbClr val="1A2027"/>
-                </a:solidFill>
-                <a:latin typeface="Calibri"/>
-              </a:rPr>
-              <a:t>78 %</a:t>
-            </a:r>
-          </a:p>
-        </p:txBody>
-      </p:sp>
-      <p:sp>
-        <p:nvSpPr>
-          <p:cNvPr id="21" name="Rounded Rectangle 20"/>
+              <a:t>0</a:t>
+            </a:r>
+          </a:p>
+        </p:txBody>
+      </p:sp>
+      <p:sp>
+        <p:nvSpPr>
+          <p:cNvPr id="11" name="TextBox 10"/>
+          <p:cNvSpPr txBox="1"/>
+          <p:nvPr/>
+        </p:nvSpPr>
+        <p:spPr>
+          <a:xfrm>
+            <a:off x="4643018" y="5148072"/>
+            <a:ext cx="2905658" cy="438912"/>
+          </a:xfrm>
+          <a:prstGeom prst="rect">
+            <a:avLst/>
+          </a:prstGeom>
+          <a:noFill/>
+        </p:spPr>
+        <p:txBody>
+          <a:bodyPr wrap="square" lIns="0" rIns="0" tIns="0" bIns="0">
+            <a:spAutoFit/>
+          </a:bodyPr>
+          <a:lstStyle/>
+          <a:p>
+            <a:pPr algn="l">
+              <a:lnSpc>
+                <a:spcPct val="115000"/>
+              </a:lnSpc>
+            </a:pPr>
+            <a:r>
+              <a:rPr sz="1200" b="0">
+                <a:solidFill>
+                  <a:srgbClr val="5B6B7A"/>
+                </a:solidFill>
+                <a:latin typeface="Calibri"/>
+              </a:rPr>
+              <a:t>зависимостей, одна команда</a:t>
+            </a:r>
+          </a:p>
+        </p:txBody>
+      </p:sp>
+      <p:sp>
+        <p:nvSpPr>
+          <p:cNvPr id="12" name="Rounded Rectangle 11"/>
           <p:cNvSpPr/>
           <p:nvPr/>
         </p:nvSpPr>
         <p:spPr>
           <a:xfrm>
-            <a:off x="713232" y="3584448"/>
-            <a:ext cx="10765231" cy="457200"/>
+            <a:off x="8024164" y="4343400"/>
+            <a:ext cx="3344570" cy="1371600"/>
           </a:xfrm>
           <a:prstGeom prst="roundRect">
             <a:avLst>
@@ -9854,14 +11315,14 @@
       </p:sp>
       <p:sp>
         <p:nvSpPr>
-          <p:cNvPr id="22" name="TextBox 21"/>
-          <p:cNvSpPr txBox="1"/>
-          <p:nvPr/>
-        </p:nvSpPr>
-        <p:spPr>
-          <a:xfrm>
-            <a:off x="822960" y="3657600"/>
-            <a:ext cx="3553467" cy="402336"/>
+          <p:cNvPr id="13" name="TextBox 12"/>
+          <p:cNvSpPr txBox="1"/>
+          <p:nvPr/>
+        </p:nvSpPr>
+        <p:spPr>
+          <a:xfrm>
+            <a:off x="8243620" y="4526280"/>
+            <a:ext cx="2905658" cy="603504"/>
           </a:xfrm>
           <a:prstGeom prst="rect">
             <a:avLst/>
@@ -9880,27 +11341,82 @@
               </a:lnSpc>
             </a:pPr>
             <a:r>
-              <a:rPr sz="1300" b="0">
-                <a:solidFill>
-                  <a:srgbClr val="1A2027"/>
-                </a:solidFill>
-                <a:latin typeface="Calibri"/>
-              </a:rPr>
-              <a:t>/api/search</a:t>
-            </a:r>
-          </a:p>
-        </p:txBody>
-      </p:sp>
-      <p:sp>
-        <p:nvSpPr>
-          <p:cNvPr id="23" name="TextBox 22"/>
-          <p:cNvSpPr txBox="1"/>
-          <p:nvPr/>
-        </p:nvSpPr>
-        <p:spPr>
-          <a:xfrm>
-            <a:off x="4376427" y="3657600"/>
-            <a:ext cx="1375535" cy="402336"/>
+              <a:rPr sz="3000" b="1">
+                <a:solidFill>
+                  <a:srgbClr val="1565C0"/>
+                </a:solidFill>
+                <a:latin typeface="Calibri"/>
+              </a:rPr>
+              <a:t>любой</a:t>
+            </a:r>
+          </a:p>
+        </p:txBody>
+      </p:sp>
+      <p:sp>
+        <p:nvSpPr>
+          <p:cNvPr id="14" name="TextBox 13"/>
+          <p:cNvSpPr txBox="1"/>
+          <p:nvPr/>
+        </p:nvSpPr>
+        <p:spPr>
+          <a:xfrm>
+            <a:off x="8243620" y="5148072"/>
+            <a:ext cx="2905658" cy="438912"/>
+          </a:xfrm>
+          <a:prstGeom prst="rect">
+            <a:avLst/>
+          </a:prstGeom>
+          <a:noFill/>
+        </p:spPr>
+        <p:txBody>
+          <a:bodyPr wrap="square" lIns="0" rIns="0" tIns="0" bIns="0">
+            <a:spAutoFit/>
+          </a:bodyPr>
+          <a:lstStyle/>
+          <a:p>
+            <a:pPr algn="l">
+              <a:lnSpc>
+                <a:spcPct val="115000"/>
+              </a:lnSpc>
+            </a:pPr>
+            <a:r>
+              <a:rPr sz="1200" b="0">
+                <a:solidFill>
+                  <a:srgbClr val="5B6B7A"/>
+                </a:solidFill>
+                <a:latin typeface="Calibri"/>
+              </a:rPr>
+              <a:t>стек: Node, Go, Java, PHP —</a:t>
+            </a:r>
+          </a:p>
+          <a:p>
+            <a:pPr algn="l">
+              <a:lnSpc>
+                <a:spcPct val="115000"/>
+              </a:lnSpc>
+            </a:pPr>
+            <a:r>
+              <a:rPr sz="1200" b="0">
+                <a:solidFill>
+                  <a:srgbClr val="5B6B7A"/>
+                </a:solidFill>
+                <a:latin typeface="Calibri"/>
+              </a:rPr>
+              <a:t>читается журнал, а не код</a:t>
+            </a:r>
+          </a:p>
+        </p:txBody>
+      </p:sp>
+      <p:sp>
+        <p:nvSpPr>
+          <p:cNvPr id="15" name="TextBox 14"/>
+          <p:cNvSpPr txBox="1"/>
+          <p:nvPr/>
+        </p:nvSpPr>
+        <p:spPr>
+          <a:xfrm>
+            <a:off x="822960" y="5897880"/>
+            <a:ext cx="10545775" cy="365760"/>
           </a:xfrm>
           <a:prstGeom prst="rect">
             <a:avLst/>
@@ -9919,410 +11435,13 @@
               </a:lnSpc>
             </a:pPr>
             <a:r>
-              <a:rPr sz="1300" b="0">
-                <a:solidFill>
-                  <a:srgbClr val="1A2027"/>
-                </a:solidFill>
-                <a:latin typeface="Calibri"/>
-              </a:rPr>
-              <a:t>limit</a:t>
-            </a:r>
-          </a:p>
-        </p:txBody>
-      </p:sp>
-      <p:sp>
-        <p:nvSpPr>
-          <p:cNvPr id="24" name="TextBox 23"/>
-          <p:cNvSpPr txBox="1"/>
-          <p:nvPr/>
-        </p:nvSpPr>
-        <p:spPr>
-          <a:xfrm>
-            <a:off x="5751963" y="3657600"/>
-            <a:ext cx="2177931" cy="402336"/>
-          </a:xfrm>
-          <a:prstGeom prst="rect">
-            <a:avLst/>
-          </a:prstGeom>
-          <a:noFill/>
-        </p:spPr>
-        <p:txBody>
-          <a:bodyPr wrap="square" lIns="0" rIns="0" tIns="0" bIns="0">
-            <a:spAutoFit/>
-          </a:bodyPr>
-          <a:lstStyle/>
-          <a:p>
-            <a:pPr algn="l">
-              <a:lnSpc>
-                <a:spcPct val="100000"/>
-              </a:lnSpc>
-            </a:pPr>
-            <a:r>
-              <a:rPr sz="1300" b="0">
-                <a:solidFill>
-                  <a:srgbClr val="1A2027"/>
-                </a:solidFill>
-                <a:latin typeface="Calibri"/>
-              </a:rPr>
-              <a:t>~ limit^0,89</a:t>
-            </a:r>
-          </a:p>
-        </p:txBody>
-      </p:sp>
-      <p:sp>
-        <p:nvSpPr>
-          <p:cNvPr id="25" name="TextBox 24"/>
-          <p:cNvSpPr txBox="1"/>
-          <p:nvPr/>
-        </p:nvSpPr>
-        <p:spPr>
-          <a:xfrm>
-            <a:off x="7929895" y="3657600"/>
-            <a:ext cx="2063303" cy="402336"/>
-          </a:xfrm>
-          <a:prstGeom prst="rect">
-            <a:avLst/>
-          </a:prstGeom>
-          <a:noFill/>
-        </p:spPr>
-        <p:txBody>
-          <a:bodyPr wrap="square" lIns="0" rIns="0" tIns="0" bIns="0">
-            <a:spAutoFit/>
-          </a:bodyPr>
-          <a:lstStyle/>
-          <a:p>
-            <a:pPr algn="l">
-              <a:lnSpc>
-                <a:spcPct val="100000"/>
-              </a:lnSpc>
-            </a:pPr>
-            <a:r>
-              <a:rPr sz="1300" b="0">
-                <a:solidFill>
-                  <a:srgbClr val="1A2027"/>
-                </a:solidFill>
-                <a:latin typeface="Calibri"/>
-              </a:rPr>
-              <a:t>1,00</a:t>
-            </a:r>
-          </a:p>
-        </p:txBody>
-      </p:sp>
-      <p:sp>
-        <p:nvSpPr>
-          <p:cNvPr id="26" name="TextBox 25"/>
-          <p:cNvSpPr txBox="1"/>
-          <p:nvPr/>
-        </p:nvSpPr>
-        <p:spPr>
-          <a:xfrm>
-            <a:off x="9993199" y="3657600"/>
-            <a:ext cx="1375535" cy="402336"/>
-          </a:xfrm>
-          <a:prstGeom prst="rect">
-            <a:avLst/>
-          </a:prstGeom>
-          <a:noFill/>
-        </p:spPr>
-        <p:txBody>
-          <a:bodyPr wrap="square" lIns="0" rIns="0" tIns="0" bIns="0">
-            <a:spAutoFit/>
-          </a:bodyPr>
-          <a:lstStyle/>
-          <a:p>
-            <a:pPr algn="l">
-              <a:lnSpc>
-                <a:spcPct val="100000"/>
-              </a:lnSpc>
-            </a:pPr>
-            <a:r>
-              <a:rPr sz="1300" b="0">
-                <a:solidFill>
-                  <a:srgbClr val="1A2027"/>
-                </a:solidFill>
-                <a:latin typeface="Calibri"/>
-              </a:rPr>
-              <a:t>83 %</a:t>
-            </a:r>
-          </a:p>
-        </p:txBody>
-      </p:sp>
-      <p:sp>
-        <p:nvSpPr>
-          <p:cNvPr id="27" name="Rounded Rectangle 26"/>
-          <p:cNvSpPr/>
-          <p:nvPr/>
-        </p:nvSpPr>
-        <p:spPr>
-          <a:xfrm>
-            <a:off x="713232" y="4041648"/>
-            <a:ext cx="10765231" cy="457200"/>
-          </a:xfrm>
-          <a:prstGeom prst="roundRect">
-            <a:avLst>
-              <a:gd name="adj" fmla="val 6000"/>
-            </a:avLst>
-          </a:prstGeom>
-          <a:solidFill>
-            <a:srgbClr val="FFFFFF"/>
-          </a:solidFill>
-          <a:ln>
-            <a:noFill/>
-          </a:ln>
-          <a:effectLst/>
-        </p:spPr>
-        <p:style>
-          <a:lnRef idx="1">
-            <a:schemeClr val="accent1"/>
-          </a:lnRef>
-          <a:fillRef idx="3">
-            <a:schemeClr val="accent1"/>
-          </a:fillRef>
-          <a:effectRef idx="2">
-            <a:schemeClr val="accent1"/>
-          </a:effectRef>
-          <a:fontRef idx="minor">
-            <a:schemeClr val="lt1"/>
-          </a:fontRef>
-        </p:style>
-        <p:txBody>
-          <a:bodyPr rtlCol="0" anchor="ctr"/>
-          <a:lstStyle/>
-          <a:p>
-            <a:pPr algn="ctr"/>
-          </a:p>
-        </p:txBody>
-      </p:sp>
-      <p:sp>
-        <p:nvSpPr>
-          <p:cNvPr id="28" name="TextBox 27"/>
-          <p:cNvSpPr txBox="1"/>
-          <p:nvPr/>
-        </p:nvSpPr>
-        <p:spPr>
-          <a:xfrm>
-            <a:off x="822960" y="4114800"/>
-            <a:ext cx="3553467" cy="402336"/>
-          </a:xfrm>
-          <a:prstGeom prst="rect">
-            <a:avLst/>
-          </a:prstGeom>
-          <a:noFill/>
-        </p:spPr>
-        <p:txBody>
-          <a:bodyPr wrap="square" lIns="0" rIns="0" tIns="0" bIns="0">
-            <a:spAutoFit/>
-          </a:bodyPr>
-          <a:lstStyle/>
-          <a:p>
-            <a:pPr algn="l">
-              <a:lnSpc>
-                <a:spcPct val="100000"/>
-              </a:lnSpc>
-            </a:pPr>
-            <a:r>
-              <a:rPr sz="1300" b="0">
-                <a:solidFill>
-                  <a:srgbClr val="1A2027"/>
-                </a:solidFill>
-                <a:latin typeface="Calibri"/>
-              </a:rPr>
-              <a:t>/api/feed</a:t>
-            </a:r>
-          </a:p>
-        </p:txBody>
-      </p:sp>
-      <p:sp>
-        <p:nvSpPr>
-          <p:cNvPr id="29" name="TextBox 28"/>
-          <p:cNvSpPr txBox="1"/>
-          <p:nvPr/>
-        </p:nvSpPr>
-        <p:spPr>
-          <a:xfrm>
-            <a:off x="4376427" y="4114800"/>
-            <a:ext cx="1375535" cy="402336"/>
-          </a:xfrm>
-          <a:prstGeom prst="rect">
-            <a:avLst/>
-          </a:prstGeom>
-          <a:noFill/>
-        </p:spPr>
-        <p:txBody>
-          <a:bodyPr wrap="square" lIns="0" rIns="0" tIns="0" bIns="0">
-            <a:spAutoFit/>
-          </a:bodyPr>
-          <a:lstStyle/>
-          <a:p>
-            <a:pPr algn="l">
-              <a:lnSpc>
-                <a:spcPct val="100000"/>
-              </a:lnSpc>
-            </a:pPr>
-            <a:r>
-              <a:rPr sz="1300" b="0">
-                <a:solidFill>
-                  <a:srgbClr val="1A2027"/>
-                </a:solidFill>
-                <a:latin typeface="Calibri"/>
-              </a:rPr>
-              <a:t>limit</a:t>
-            </a:r>
-          </a:p>
-        </p:txBody>
-      </p:sp>
-      <p:sp>
-        <p:nvSpPr>
-          <p:cNvPr id="30" name="TextBox 29"/>
-          <p:cNvSpPr txBox="1"/>
-          <p:nvPr/>
-        </p:nvSpPr>
-        <p:spPr>
-          <a:xfrm>
-            <a:off x="5751963" y="4114800"/>
-            <a:ext cx="2177931" cy="402336"/>
-          </a:xfrm>
-          <a:prstGeom prst="rect">
-            <a:avLst/>
-          </a:prstGeom>
-          <a:noFill/>
-        </p:spPr>
-        <p:txBody>
-          <a:bodyPr wrap="square" lIns="0" rIns="0" tIns="0" bIns="0">
-            <a:spAutoFit/>
-          </a:bodyPr>
-          <a:lstStyle/>
-          <a:p>
-            <a:pPr algn="l">
-              <a:lnSpc>
-                <a:spcPct val="100000"/>
-              </a:lnSpc>
-            </a:pPr>
-            <a:r>
-              <a:rPr sz="1300" b="0">
-                <a:solidFill>
-                  <a:srgbClr val="1A2027"/>
-                </a:solidFill>
-                <a:latin typeface="Calibri"/>
-              </a:rPr>
-              <a:t>~ limit^0,77</a:t>
-            </a:r>
-          </a:p>
-        </p:txBody>
-      </p:sp>
-      <p:sp>
-        <p:nvSpPr>
-          <p:cNvPr id="31" name="TextBox 30"/>
-          <p:cNvSpPr txBox="1"/>
-          <p:nvPr/>
-        </p:nvSpPr>
-        <p:spPr>
-          <a:xfrm>
-            <a:off x="7929895" y="4114800"/>
-            <a:ext cx="2063303" cy="402336"/>
-          </a:xfrm>
-          <a:prstGeom prst="rect">
-            <a:avLst/>
-          </a:prstGeom>
-          <a:noFill/>
-        </p:spPr>
-        <p:txBody>
-          <a:bodyPr wrap="square" lIns="0" rIns="0" tIns="0" bIns="0">
-            <a:spAutoFit/>
-          </a:bodyPr>
-          <a:lstStyle/>
-          <a:p>
-            <a:pPr algn="l">
-              <a:lnSpc>
-                <a:spcPct val="100000"/>
-              </a:lnSpc>
-            </a:pPr>
-            <a:r>
-              <a:rPr sz="1300" b="0">
-                <a:solidFill>
-                  <a:srgbClr val="1A2027"/>
-                </a:solidFill>
-                <a:latin typeface="Calibri"/>
-              </a:rPr>
-              <a:t>1,00</a:t>
-            </a:r>
-          </a:p>
-        </p:txBody>
-      </p:sp>
-      <p:sp>
-        <p:nvSpPr>
-          <p:cNvPr id="32" name="TextBox 31"/>
-          <p:cNvSpPr txBox="1"/>
-          <p:nvPr/>
-        </p:nvSpPr>
-        <p:spPr>
-          <a:xfrm>
-            <a:off x="9993199" y="4114800"/>
-            <a:ext cx="1375535" cy="402336"/>
-          </a:xfrm>
-          <a:prstGeom prst="rect">
-            <a:avLst/>
-          </a:prstGeom>
-          <a:noFill/>
-        </p:spPr>
-        <p:txBody>
-          <a:bodyPr wrap="square" lIns="0" rIns="0" tIns="0" bIns="0">
-            <a:spAutoFit/>
-          </a:bodyPr>
-          <a:lstStyle/>
-          <a:p>
-            <a:pPr algn="l">
-              <a:lnSpc>
-                <a:spcPct val="100000"/>
-              </a:lnSpc>
-            </a:pPr>
-            <a:r>
-              <a:rPr sz="1300" b="0">
-                <a:solidFill>
-                  <a:srgbClr val="1A2027"/>
-                </a:solidFill>
-                <a:latin typeface="Calibri"/>
-              </a:rPr>
-              <a:t>81 %</a:t>
-            </a:r>
-          </a:p>
-        </p:txBody>
-      </p:sp>
-      <p:sp>
-        <p:nvSpPr>
-          <p:cNvPr id="33" name="TextBox 32"/>
-          <p:cNvSpPr txBox="1"/>
-          <p:nvPr/>
-        </p:nvSpPr>
-        <p:spPr>
-          <a:xfrm>
-            <a:off x="822960" y="4681728"/>
-            <a:ext cx="10545775" cy="1097280"/>
-          </a:xfrm>
-          <a:prstGeom prst="rect">
-            <a:avLst/>
-          </a:prstGeom>
-          <a:noFill/>
-        </p:spPr>
-        <p:txBody>
-          <a:bodyPr wrap="square" lIns="0" rIns="0" tIns="0" bIns="0">
-            <a:spAutoFit/>
-          </a:bodyPr>
-          <a:lstStyle/>
-          <a:p>
-            <a:pPr algn="l">
-              <a:lnSpc>
-                <a:spcPct val="135000"/>
-              </a:lnSpc>
-            </a:pPr>
-            <a:r>
-              <a:rPr sz="1600" b="0">
-                <a:solidFill>
-                  <a:srgbClr val="1A2027"/>
-                </a:solidFill>
-                <a:latin typeface="Calibri"/>
-              </a:rPr>
-              <a:t>Показатели 1,91 и 1,98 при истинном значении 2,00 — это квадратичная алгоритмическая сложность операций, выведенная из одних только времён ответа в журнале веб-сервера.</a:t>
+              <a:rPr sz="1500" b="0">
+                <a:solidFill>
+                  <a:srgbClr val="5B6B7A"/>
+                </a:solidFill>
+                <a:latin typeface="Calibri"/>
+              </a:rPr>
+              <a:t>python loadlens.py access.log --html report.html</a:t>
             </a:r>
           </a:p>
         </p:txBody>
@@ -10387,7 +11506,7 @@
                 </a:solidFill>
                 <a:latin typeface="Calibri"/>
               </a:rPr>
-              <a:t>Этап 2 — исправить то, что увидели</a:t>
+              <a:t>Инструмент выводит сложность из времён ответа</a:t>
             </a:r>
           </a:p>
         </p:txBody>
@@ -10426,7 +11545,23 @@
                 </a:solidFill>
                 <a:latin typeface="Calibri"/>
               </a:rPr>
-              <a:t>Шлюз, который оценивает нагрузку каждого запроса и раскладывает обращения по обработчикам.</a:t>
+              <a:t>На журнале нашего стенда LoadLens сам, ничего не зная об устройстве сервиса, восстановил</a:t>
+            </a:r>
+          </a:p>
+          <a:p>
+            <a:pPr algn="l">
+              <a:lnSpc>
+                <a:spcPct val="125000"/>
+              </a:lnSpc>
+            </a:pPr>
+            <a:r>
+              <a:rPr sz="1500" b="0">
+                <a:solidFill>
+                  <a:srgbClr val="5B6B7A"/>
+                </a:solidFill>
+                <a:latin typeface="Calibri"/>
+              </a:rPr>
+              <a:t>зависимость стоимости от параметра запроса.</a:t>
             </a:r>
           </a:p>
         </p:txBody>
@@ -10440,7 +11575,7 @@
         <p:spPr>
           <a:xfrm>
             <a:off x="822960" y="2350008"/>
-            <a:ext cx="10545775" cy="329184"/>
+            <a:ext cx="3553467" cy="310896"/>
           </a:xfrm>
           <a:prstGeom prst="rect">
             <a:avLst/>
@@ -10459,13 +11594,13 @@
               </a:lnSpc>
             </a:pPr>
             <a:r>
-              <a:rPr sz="1700" b="1">
-                <a:solidFill>
-                  <a:srgbClr val="1565C0"/>
-                </a:solidFill>
-                <a:latin typeface="Calibri"/>
-              </a:rPr>
-              <a:t>1. Оценка нагрузки запроса</a:t>
+              <a:rPr sz="1200" b="1">
+                <a:solidFill>
+                  <a:srgbClr val="5B6B7A"/>
+                </a:solidFill>
+                <a:latin typeface="Calibri"/>
+              </a:rPr>
+              <a:t>Маршрут</a:t>
             </a:r>
           </a:p>
         </p:txBody>
@@ -10478,33 +11613,33 @@
         </p:nvSpPr>
         <p:spPr>
           <a:xfrm>
-            <a:off x="822960" y="2752344"/>
-            <a:ext cx="10545775" cy="658368"/>
-          </a:xfrm>
-          <a:prstGeom prst="rect">
-            <a:avLst/>
-          </a:prstGeom>
-          <a:noFill/>
-        </p:spPr>
-        <p:txBody>
-          <a:bodyPr wrap="square" lIns="0" rIns="0" tIns="0" bIns="0">
-            <a:spAutoFit/>
-          </a:bodyPr>
-          <a:lstStyle/>
-          <a:p>
-            <a:pPr algn="l">
-              <a:lnSpc>
-                <a:spcPct val="125000"/>
-              </a:lnSpc>
-            </a:pPr>
-            <a:r>
-              <a:rPr sz="1400" b="0">
+            <a:off x="4376427" y="2350008"/>
+            <a:ext cx="1375535" cy="310896"/>
+          </a:xfrm>
+          <a:prstGeom prst="rect">
+            <a:avLst/>
+          </a:prstGeom>
+          <a:noFill/>
+        </p:spPr>
+        <p:txBody>
+          <a:bodyPr wrap="square" lIns="0" rIns="0" tIns="0" bIns="0">
+            <a:spAutoFit/>
+          </a:bodyPr>
+          <a:lstStyle/>
+          <a:p>
+            <a:pPr algn="l">
+              <a:lnSpc>
+                <a:spcPct val="100000"/>
+              </a:lnSpc>
+            </a:pPr>
+            <a:r>
+              <a:rPr sz="1200" b="1">
                 <a:solidFill>
                   <a:srgbClr val="5B6B7A"/>
                 </a:solidFill>
                 <a:latin typeface="Calibri"/>
               </a:rPr>
-              <a:t>По параметрам, которые прокси видит до обработки, предсказывается, на сколько миллисекунд запрос займёт движок для остальных.</a:t>
+              <a:t>Параметр</a:t>
             </a:r>
           </a:p>
         </p:txBody>
@@ -10517,8 +11652,8 @@
         </p:nvSpPr>
         <p:spPr>
           <a:xfrm>
-            <a:off x="822960" y="3557016"/>
-            <a:ext cx="10545775" cy="329184"/>
+            <a:off x="5751963" y="2350008"/>
+            <a:ext cx="2177931" cy="310896"/>
           </a:xfrm>
           <a:prstGeom prst="rect">
             <a:avLst/>
@@ -10537,13 +11672,13 @@
               </a:lnSpc>
             </a:pPr>
             <a:r>
-              <a:rPr sz="1700" b="1">
-                <a:solidFill>
-                  <a:srgbClr val="1565C0"/>
-                </a:solidFill>
-                <a:latin typeface="Calibri"/>
-              </a:rPr>
-              <a:t>2. Допуск</a:t>
+              <a:rPr sz="1200" b="1">
+                <a:solidFill>
+                  <a:srgbClr val="5B6B7A"/>
+                </a:solidFill>
+                <a:latin typeface="Calibri"/>
+              </a:rPr>
+              <a:t>Найденный закон</a:t>
             </a:r>
           </a:p>
         </p:txBody>
@@ -10556,33 +11691,33 @@
         </p:nvSpPr>
         <p:spPr>
           <a:xfrm>
-            <a:off x="822960" y="3959352"/>
-            <a:ext cx="10545775" cy="658368"/>
-          </a:xfrm>
-          <a:prstGeom prst="rect">
-            <a:avLst/>
-          </a:prstGeom>
-          <a:noFill/>
-        </p:spPr>
-        <p:txBody>
-          <a:bodyPr wrap="square" lIns="0" rIns="0" tIns="0" bIns="0">
-            <a:spAutoFit/>
-          </a:bodyPr>
-          <a:lstStyle/>
-          <a:p>
-            <a:pPr algn="l">
-              <a:lnSpc>
-                <a:spcPct val="125000"/>
-              </a:lnSpc>
-            </a:pPr>
-            <a:r>
-              <a:rPr sz="1400" b="0">
+            <a:off x="7929895" y="2350008"/>
+            <a:ext cx="2063303" cy="310896"/>
+          </a:xfrm>
+          <a:prstGeom prst="rect">
+            <a:avLst/>
+          </a:prstGeom>
+          <a:noFill/>
+        </p:spPr>
+        <p:txBody>
+          <a:bodyPr wrap="square" lIns="0" rIns="0" tIns="0" bIns="0">
+            <a:spAutoFit/>
+          </a:bodyPr>
+          <a:lstStyle/>
+          <a:p>
+            <a:pPr algn="l">
+              <a:lnSpc>
+                <a:spcPct val="100000"/>
+              </a:lnSpc>
+            </a:pPr>
+            <a:r>
+              <a:rPr sz="1200" b="1">
                 <a:solidFill>
                   <a:srgbClr val="5B6B7A"/>
                 </a:solidFill>
                 <a:latin typeface="Calibri"/>
               </a:rPr>
-              <a:t>Запрос пускается в асинхронный движок, только если предсказанная блокировка не превышает порога. Порог задаёт компромисс между пропускной способностью и хвостом задержек.</a:t>
+              <a:t>Истинный показатель</a:t>
             </a:r>
           </a:p>
         </p:txBody>
@@ -10595,8 +11730,8 @@
         </p:nvSpPr>
         <p:spPr>
           <a:xfrm>
-            <a:off x="822960" y="4764024"/>
-            <a:ext cx="10545775" cy="329184"/>
+            <a:off x="9993199" y="2350008"/>
+            <a:ext cx="1375535" cy="310896"/>
           </a:xfrm>
           <a:prstGeom prst="rect">
             <a:avLst/>
@@ -10615,52 +11750,1016 @@
               </a:lnSpc>
             </a:pPr>
             <a:r>
-              <a:rPr sz="1700" b="1">
-                <a:solidFill>
-                  <a:srgbClr val="1565C0"/>
-                </a:solidFill>
-                <a:latin typeface="Calibri"/>
-              </a:rPr>
-              <a:t>3. Выбор из допустимых</a:t>
-            </a:r>
-          </a:p>
-        </p:txBody>
-      </p:sp>
-      <p:sp>
-        <p:nvSpPr>
-          <p:cNvPr id="9" name="TextBox 8"/>
-          <p:cNvSpPr txBox="1"/>
-          <p:nvPr/>
-        </p:nvSpPr>
-        <p:spPr>
-          <a:xfrm>
-            <a:off x="822960" y="5166360"/>
-            <a:ext cx="10545775" cy="658368"/>
-          </a:xfrm>
-          <a:prstGeom prst="rect">
-            <a:avLst/>
-          </a:prstGeom>
-          <a:noFill/>
-        </p:spPr>
-        <p:txBody>
-          <a:bodyPr wrap="square" lIns="0" rIns="0" tIns="0" bIns="0">
-            <a:spAutoFit/>
-          </a:bodyPr>
-          <a:lstStyle/>
-          <a:p>
-            <a:pPr algn="l">
-              <a:lnSpc>
-                <a:spcPct val="125000"/>
-              </a:lnSpc>
-            </a:pPr>
-            <a:r>
-              <a:rPr sz="1400" b="0">
+              <a:rPr sz="1200" b="1">
                 <a:solidFill>
                   <a:srgbClr val="5B6B7A"/>
                 </a:solidFill>
                 <a:latin typeface="Calibri"/>
               </a:rPr>
-              <a:t>Среди допустимых движков выбирается менее занятый. Именно здесь, и только здесь, обучаемая модель даёт втрое меньше пострадавших запросов, чем правило.</a:t>
+              <a:t>Объясняет</a:t>
+            </a:r>
+          </a:p>
+        </p:txBody>
+      </p:sp>
+      <p:sp>
+        <p:nvSpPr>
+          <p:cNvPr id="9" name="Rounded Rectangle 8"/>
+          <p:cNvSpPr/>
+          <p:nvPr/>
+        </p:nvSpPr>
+        <p:spPr>
+          <a:xfrm>
+            <a:off x="713232" y="2670048"/>
+            <a:ext cx="10765231" cy="457200"/>
+          </a:xfrm>
+          <a:prstGeom prst="roundRect">
+            <a:avLst>
+              <a:gd name="adj" fmla="val 6000"/>
+            </a:avLst>
+          </a:prstGeom>
+          <a:solidFill>
+            <a:srgbClr val="F2F5F8"/>
+          </a:solidFill>
+          <a:ln>
+            <a:noFill/>
+          </a:ln>
+          <a:effectLst/>
+        </p:spPr>
+        <p:style>
+          <a:lnRef idx="1">
+            <a:schemeClr val="accent1"/>
+          </a:lnRef>
+          <a:fillRef idx="3">
+            <a:schemeClr val="accent1"/>
+          </a:fillRef>
+          <a:effectRef idx="2">
+            <a:schemeClr val="accent1"/>
+          </a:effectRef>
+          <a:fontRef idx="minor">
+            <a:schemeClr val="lt1"/>
+          </a:fontRef>
+        </p:style>
+        <p:txBody>
+          <a:bodyPr rtlCol="0" anchor="ctr"/>
+          <a:lstStyle/>
+          <a:p>
+            <a:pPr algn="ctr"/>
+          </a:p>
+        </p:txBody>
+      </p:sp>
+      <p:sp>
+        <p:nvSpPr>
+          <p:cNvPr id="10" name="TextBox 9"/>
+          <p:cNvSpPr txBox="1"/>
+          <p:nvPr/>
+        </p:nvSpPr>
+        <p:spPr>
+          <a:xfrm>
+            <a:off x="822960" y="2743200"/>
+            <a:ext cx="3553467" cy="402336"/>
+          </a:xfrm>
+          <a:prstGeom prst="rect">
+            <a:avLst/>
+          </a:prstGeom>
+          <a:noFill/>
+        </p:spPr>
+        <p:txBody>
+          <a:bodyPr wrap="square" lIns="0" rIns="0" tIns="0" bIns="0">
+            <a:spAutoFit/>
+          </a:bodyPr>
+          <a:lstStyle/>
+          <a:p>
+            <a:pPr algn="l">
+              <a:lnSpc>
+                <a:spcPct val="100000"/>
+              </a:lnSpc>
+            </a:pPr>
+            <a:r>
+              <a:rPr sz="1300" b="0">
+                <a:solidFill>
+                  <a:srgbClr val="1A2027"/>
+                </a:solidFill>
+                <a:latin typeface="Calibri"/>
+              </a:rPr>
+              <a:t>/api/image/thumbnail</a:t>
+            </a:r>
+          </a:p>
+        </p:txBody>
+      </p:sp>
+      <p:sp>
+        <p:nvSpPr>
+          <p:cNvPr id="11" name="TextBox 10"/>
+          <p:cNvSpPr txBox="1"/>
+          <p:nvPr/>
+        </p:nvSpPr>
+        <p:spPr>
+          <a:xfrm>
+            <a:off x="4376427" y="2743200"/>
+            <a:ext cx="1375535" cy="402336"/>
+          </a:xfrm>
+          <a:prstGeom prst="rect">
+            <a:avLst/>
+          </a:prstGeom>
+          <a:noFill/>
+        </p:spPr>
+        <p:txBody>
+          <a:bodyPr wrap="square" lIns="0" rIns="0" tIns="0" bIns="0">
+            <a:spAutoFit/>
+          </a:bodyPr>
+          <a:lstStyle/>
+          <a:p>
+            <a:pPr algn="l">
+              <a:lnSpc>
+                <a:spcPct val="100000"/>
+              </a:lnSpc>
+            </a:pPr>
+            <a:r>
+              <a:rPr sz="1300" b="0">
+                <a:solidFill>
+                  <a:srgbClr val="1A2027"/>
+                </a:solidFill>
+                <a:latin typeface="Calibri"/>
+              </a:rPr>
+              <a:t>size</a:t>
+            </a:r>
+          </a:p>
+        </p:txBody>
+      </p:sp>
+      <p:sp>
+        <p:nvSpPr>
+          <p:cNvPr id="12" name="TextBox 11"/>
+          <p:cNvSpPr txBox="1"/>
+          <p:nvPr/>
+        </p:nvSpPr>
+        <p:spPr>
+          <a:xfrm>
+            <a:off x="5751963" y="2743200"/>
+            <a:ext cx="2177931" cy="402336"/>
+          </a:xfrm>
+          <a:prstGeom prst="rect">
+            <a:avLst/>
+          </a:prstGeom>
+          <a:noFill/>
+        </p:spPr>
+        <p:txBody>
+          <a:bodyPr wrap="square" lIns="0" rIns="0" tIns="0" bIns="0">
+            <a:spAutoFit/>
+          </a:bodyPr>
+          <a:lstStyle/>
+          <a:p>
+            <a:pPr algn="l">
+              <a:lnSpc>
+                <a:spcPct val="100000"/>
+              </a:lnSpc>
+            </a:pPr>
+            <a:r>
+              <a:rPr sz="1300" b="1">
+                <a:solidFill>
+                  <a:srgbClr val="2E7D32"/>
+                </a:solidFill>
+                <a:latin typeface="Calibri"/>
+              </a:rPr>
+              <a:t>~ size^1,91</a:t>
+            </a:r>
+          </a:p>
+        </p:txBody>
+      </p:sp>
+      <p:sp>
+        <p:nvSpPr>
+          <p:cNvPr id="13" name="TextBox 12"/>
+          <p:cNvSpPr txBox="1"/>
+          <p:nvPr/>
+        </p:nvSpPr>
+        <p:spPr>
+          <a:xfrm>
+            <a:off x="7929895" y="2743200"/>
+            <a:ext cx="2063303" cy="402336"/>
+          </a:xfrm>
+          <a:prstGeom prst="rect">
+            <a:avLst/>
+          </a:prstGeom>
+          <a:noFill/>
+        </p:spPr>
+        <p:txBody>
+          <a:bodyPr wrap="square" lIns="0" rIns="0" tIns="0" bIns="0">
+            <a:spAutoFit/>
+          </a:bodyPr>
+          <a:lstStyle/>
+          <a:p>
+            <a:pPr algn="l">
+              <a:lnSpc>
+                <a:spcPct val="100000"/>
+              </a:lnSpc>
+            </a:pPr>
+            <a:r>
+              <a:rPr sz="1300" b="0">
+                <a:solidFill>
+                  <a:srgbClr val="1A2027"/>
+                </a:solidFill>
+                <a:latin typeface="Calibri"/>
+              </a:rPr>
+              <a:t>2,00</a:t>
+            </a:r>
+          </a:p>
+        </p:txBody>
+      </p:sp>
+      <p:sp>
+        <p:nvSpPr>
+          <p:cNvPr id="14" name="TextBox 13"/>
+          <p:cNvSpPr txBox="1"/>
+          <p:nvPr/>
+        </p:nvSpPr>
+        <p:spPr>
+          <a:xfrm>
+            <a:off x="9993199" y="2743200"/>
+            <a:ext cx="1375535" cy="402336"/>
+          </a:xfrm>
+          <a:prstGeom prst="rect">
+            <a:avLst/>
+          </a:prstGeom>
+          <a:noFill/>
+        </p:spPr>
+        <p:txBody>
+          <a:bodyPr wrap="square" lIns="0" rIns="0" tIns="0" bIns="0">
+            <a:spAutoFit/>
+          </a:bodyPr>
+          <a:lstStyle/>
+          <a:p>
+            <a:pPr algn="l">
+              <a:lnSpc>
+                <a:spcPct val="100000"/>
+              </a:lnSpc>
+            </a:pPr>
+            <a:r>
+              <a:rPr sz="1300" b="0">
+                <a:solidFill>
+                  <a:srgbClr val="1A2027"/>
+                </a:solidFill>
+                <a:latin typeface="Calibri"/>
+              </a:rPr>
+              <a:t>99 %</a:t>
+            </a:r>
+          </a:p>
+        </p:txBody>
+      </p:sp>
+      <p:sp>
+        <p:nvSpPr>
+          <p:cNvPr id="15" name="Rounded Rectangle 14"/>
+          <p:cNvSpPr/>
+          <p:nvPr/>
+        </p:nvSpPr>
+        <p:spPr>
+          <a:xfrm>
+            <a:off x="713232" y="3127248"/>
+            <a:ext cx="10765231" cy="457200"/>
+          </a:xfrm>
+          <a:prstGeom prst="roundRect">
+            <a:avLst>
+              <a:gd name="adj" fmla="val 6000"/>
+            </a:avLst>
+          </a:prstGeom>
+          <a:solidFill>
+            <a:srgbClr val="FFFFFF"/>
+          </a:solidFill>
+          <a:ln>
+            <a:noFill/>
+          </a:ln>
+          <a:effectLst/>
+        </p:spPr>
+        <p:style>
+          <a:lnRef idx="1">
+            <a:schemeClr val="accent1"/>
+          </a:lnRef>
+          <a:fillRef idx="3">
+            <a:schemeClr val="accent1"/>
+          </a:fillRef>
+          <a:effectRef idx="2">
+            <a:schemeClr val="accent1"/>
+          </a:effectRef>
+          <a:fontRef idx="minor">
+            <a:schemeClr val="lt1"/>
+          </a:fontRef>
+        </p:style>
+        <p:txBody>
+          <a:bodyPr rtlCol="0" anchor="ctr"/>
+          <a:lstStyle/>
+          <a:p>
+            <a:pPr algn="ctr"/>
+          </a:p>
+        </p:txBody>
+      </p:sp>
+      <p:sp>
+        <p:nvSpPr>
+          <p:cNvPr id="16" name="TextBox 15"/>
+          <p:cNvSpPr txBox="1"/>
+          <p:nvPr/>
+        </p:nvSpPr>
+        <p:spPr>
+          <a:xfrm>
+            <a:off x="822960" y="3200400"/>
+            <a:ext cx="3553467" cy="402336"/>
+          </a:xfrm>
+          <a:prstGeom prst="rect">
+            <a:avLst/>
+          </a:prstGeom>
+          <a:noFill/>
+        </p:spPr>
+        <p:txBody>
+          <a:bodyPr wrap="square" lIns="0" rIns="0" tIns="0" bIns="0">
+            <a:spAutoFit/>
+          </a:bodyPr>
+          <a:lstStyle/>
+          <a:p>
+            <a:pPr algn="l">
+              <a:lnSpc>
+                <a:spcPct val="100000"/>
+              </a:lnSpc>
+            </a:pPr>
+            <a:r>
+              <a:rPr sz="1300" b="0">
+                <a:solidFill>
+                  <a:srgbClr val="1A2027"/>
+                </a:solidFill>
+                <a:latin typeface="Calibri"/>
+              </a:rPr>
+              <a:t>/api/report/generate</a:t>
+            </a:r>
+          </a:p>
+        </p:txBody>
+      </p:sp>
+      <p:sp>
+        <p:nvSpPr>
+          <p:cNvPr id="17" name="TextBox 16"/>
+          <p:cNvSpPr txBox="1"/>
+          <p:nvPr/>
+        </p:nvSpPr>
+        <p:spPr>
+          <a:xfrm>
+            <a:off x="4376427" y="3200400"/>
+            <a:ext cx="1375535" cy="402336"/>
+          </a:xfrm>
+          <a:prstGeom prst="rect">
+            <a:avLst/>
+          </a:prstGeom>
+          <a:noFill/>
+        </p:spPr>
+        <p:txBody>
+          <a:bodyPr wrap="square" lIns="0" rIns="0" tIns="0" bIns="0">
+            <a:spAutoFit/>
+          </a:bodyPr>
+          <a:lstStyle/>
+          <a:p>
+            <a:pPr algn="l">
+              <a:lnSpc>
+                <a:spcPct val="100000"/>
+              </a:lnSpc>
+            </a:pPr>
+            <a:r>
+              <a:rPr sz="1300" b="0">
+                <a:solidFill>
+                  <a:srgbClr val="1A2027"/>
+                </a:solidFill>
+                <a:latin typeface="Calibri"/>
+              </a:rPr>
+              <a:t>days</a:t>
+            </a:r>
+          </a:p>
+        </p:txBody>
+      </p:sp>
+      <p:sp>
+        <p:nvSpPr>
+          <p:cNvPr id="18" name="TextBox 17"/>
+          <p:cNvSpPr txBox="1"/>
+          <p:nvPr/>
+        </p:nvSpPr>
+        <p:spPr>
+          <a:xfrm>
+            <a:off x="5751963" y="3200400"/>
+            <a:ext cx="2177931" cy="402336"/>
+          </a:xfrm>
+          <a:prstGeom prst="rect">
+            <a:avLst/>
+          </a:prstGeom>
+          <a:noFill/>
+        </p:spPr>
+        <p:txBody>
+          <a:bodyPr wrap="square" lIns="0" rIns="0" tIns="0" bIns="0">
+            <a:spAutoFit/>
+          </a:bodyPr>
+          <a:lstStyle/>
+          <a:p>
+            <a:pPr algn="l">
+              <a:lnSpc>
+                <a:spcPct val="100000"/>
+              </a:lnSpc>
+            </a:pPr>
+            <a:r>
+              <a:rPr sz="1300" b="1">
+                <a:solidFill>
+                  <a:srgbClr val="2E7D32"/>
+                </a:solidFill>
+                <a:latin typeface="Calibri"/>
+              </a:rPr>
+              <a:t>~ days^1,98</a:t>
+            </a:r>
+          </a:p>
+        </p:txBody>
+      </p:sp>
+      <p:sp>
+        <p:nvSpPr>
+          <p:cNvPr id="19" name="TextBox 18"/>
+          <p:cNvSpPr txBox="1"/>
+          <p:nvPr/>
+        </p:nvSpPr>
+        <p:spPr>
+          <a:xfrm>
+            <a:off x="7929895" y="3200400"/>
+            <a:ext cx="2063303" cy="402336"/>
+          </a:xfrm>
+          <a:prstGeom prst="rect">
+            <a:avLst/>
+          </a:prstGeom>
+          <a:noFill/>
+        </p:spPr>
+        <p:txBody>
+          <a:bodyPr wrap="square" lIns="0" rIns="0" tIns="0" bIns="0">
+            <a:spAutoFit/>
+          </a:bodyPr>
+          <a:lstStyle/>
+          <a:p>
+            <a:pPr algn="l">
+              <a:lnSpc>
+                <a:spcPct val="100000"/>
+              </a:lnSpc>
+            </a:pPr>
+            <a:r>
+              <a:rPr sz="1300" b="0">
+                <a:solidFill>
+                  <a:srgbClr val="1A2027"/>
+                </a:solidFill>
+                <a:latin typeface="Calibri"/>
+              </a:rPr>
+              <a:t>2,00</a:t>
+            </a:r>
+          </a:p>
+        </p:txBody>
+      </p:sp>
+      <p:sp>
+        <p:nvSpPr>
+          <p:cNvPr id="20" name="TextBox 19"/>
+          <p:cNvSpPr txBox="1"/>
+          <p:nvPr/>
+        </p:nvSpPr>
+        <p:spPr>
+          <a:xfrm>
+            <a:off x="9993199" y="3200400"/>
+            <a:ext cx="1375535" cy="402336"/>
+          </a:xfrm>
+          <a:prstGeom prst="rect">
+            <a:avLst/>
+          </a:prstGeom>
+          <a:noFill/>
+        </p:spPr>
+        <p:txBody>
+          <a:bodyPr wrap="square" lIns="0" rIns="0" tIns="0" bIns="0">
+            <a:spAutoFit/>
+          </a:bodyPr>
+          <a:lstStyle/>
+          <a:p>
+            <a:pPr algn="l">
+              <a:lnSpc>
+                <a:spcPct val="100000"/>
+              </a:lnSpc>
+            </a:pPr>
+            <a:r>
+              <a:rPr sz="1300" b="0">
+                <a:solidFill>
+                  <a:srgbClr val="1A2027"/>
+                </a:solidFill>
+                <a:latin typeface="Calibri"/>
+              </a:rPr>
+              <a:t>78 %</a:t>
+            </a:r>
+          </a:p>
+        </p:txBody>
+      </p:sp>
+      <p:sp>
+        <p:nvSpPr>
+          <p:cNvPr id="21" name="Rounded Rectangle 20"/>
+          <p:cNvSpPr/>
+          <p:nvPr/>
+        </p:nvSpPr>
+        <p:spPr>
+          <a:xfrm>
+            <a:off x="713232" y="3584448"/>
+            <a:ext cx="10765231" cy="457200"/>
+          </a:xfrm>
+          <a:prstGeom prst="roundRect">
+            <a:avLst>
+              <a:gd name="adj" fmla="val 6000"/>
+            </a:avLst>
+          </a:prstGeom>
+          <a:solidFill>
+            <a:srgbClr val="F2F5F8"/>
+          </a:solidFill>
+          <a:ln>
+            <a:noFill/>
+          </a:ln>
+          <a:effectLst/>
+        </p:spPr>
+        <p:style>
+          <a:lnRef idx="1">
+            <a:schemeClr val="accent1"/>
+          </a:lnRef>
+          <a:fillRef idx="3">
+            <a:schemeClr val="accent1"/>
+          </a:fillRef>
+          <a:effectRef idx="2">
+            <a:schemeClr val="accent1"/>
+          </a:effectRef>
+          <a:fontRef idx="minor">
+            <a:schemeClr val="lt1"/>
+          </a:fontRef>
+        </p:style>
+        <p:txBody>
+          <a:bodyPr rtlCol="0" anchor="ctr"/>
+          <a:lstStyle/>
+          <a:p>
+            <a:pPr algn="ctr"/>
+          </a:p>
+        </p:txBody>
+      </p:sp>
+      <p:sp>
+        <p:nvSpPr>
+          <p:cNvPr id="22" name="TextBox 21"/>
+          <p:cNvSpPr txBox="1"/>
+          <p:nvPr/>
+        </p:nvSpPr>
+        <p:spPr>
+          <a:xfrm>
+            <a:off x="822960" y="3657600"/>
+            <a:ext cx="3553467" cy="402336"/>
+          </a:xfrm>
+          <a:prstGeom prst="rect">
+            <a:avLst/>
+          </a:prstGeom>
+          <a:noFill/>
+        </p:spPr>
+        <p:txBody>
+          <a:bodyPr wrap="square" lIns="0" rIns="0" tIns="0" bIns="0">
+            <a:spAutoFit/>
+          </a:bodyPr>
+          <a:lstStyle/>
+          <a:p>
+            <a:pPr algn="l">
+              <a:lnSpc>
+                <a:spcPct val="100000"/>
+              </a:lnSpc>
+            </a:pPr>
+            <a:r>
+              <a:rPr sz="1300" b="0">
+                <a:solidFill>
+                  <a:srgbClr val="1A2027"/>
+                </a:solidFill>
+                <a:latin typeface="Calibri"/>
+              </a:rPr>
+              <a:t>/api/search</a:t>
+            </a:r>
+          </a:p>
+        </p:txBody>
+      </p:sp>
+      <p:sp>
+        <p:nvSpPr>
+          <p:cNvPr id="23" name="TextBox 22"/>
+          <p:cNvSpPr txBox="1"/>
+          <p:nvPr/>
+        </p:nvSpPr>
+        <p:spPr>
+          <a:xfrm>
+            <a:off x="4376427" y="3657600"/>
+            <a:ext cx="1375535" cy="402336"/>
+          </a:xfrm>
+          <a:prstGeom prst="rect">
+            <a:avLst/>
+          </a:prstGeom>
+          <a:noFill/>
+        </p:spPr>
+        <p:txBody>
+          <a:bodyPr wrap="square" lIns="0" rIns="0" tIns="0" bIns="0">
+            <a:spAutoFit/>
+          </a:bodyPr>
+          <a:lstStyle/>
+          <a:p>
+            <a:pPr algn="l">
+              <a:lnSpc>
+                <a:spcPct val="100000"/>
+              </a:lnSpc>
+            </a:pPr>
+            <a:r>
+              <a:rPr sz="1300" b="0">
+                <a:solidFill>
+                  <a:srgbClr val="1A2027"/>
+                </a:solidFill>
+                <a:latin typeface="Calibri"/>
+              </a:rPr>
+              <a:t>limit</a:t>
+            </a:r>
+          </a:p>
+        </p:txBody>
+      </p:sp>
+      <p:sp>
+        <p:nvSpPr>
+          <p:cNvPr id="24" name="TextBox 23"/>
+          <p:cNvSpPr txBox="1"/>
+          <p:nvPr/>
+        </p:nvSpPr>
+        <p:spPr>
+          <a:xfrm>
+            <a:off x="5751963" y="3657600"/>
+            <a:ext cx="2177931" cy="402336"/>
+          </a:xfrm>
+          <a:prstGeom prst="rect">
+            <a:avLst/>
+          </a:prstGeom>
+          <a:noFill/>
+        </p:spPr>
+        <p:txBody>
+          <a:bodyPr wrap="square" lIns="0" rIns="0" tIns="0" bIns="0">
+            <a:spAutoFit/>
+          </a:bodyPr>
+          <a:lstStyle/>
+          <a:p>
+            <a:pPr algn="l">
+              <a:lnSpc>
+                <a:spcPct val="100000"/>
+              </a:lnSpc>
+            </a:pPr>
+            <a:r>
+              <a:rPr sz="1300" b="0">
+                <a:solidFill>
+                  <a:srgbClr val="1A2027"/>
+                </a:solidFill>
+                <a:latin typeface="Calibri"/>
+              </a:rPr>
+              <a:t>~ limit^0,89</a:t>
+            </a:r>
+          </a:p>
+        </p:txBody>
+      </p:sp>
+      <p:sp>
+        <p:nvSpPr>
+          <p:cNvPr id="25" name="TextBox 24"/>
+          <p:cNvSpPr txBox="1"/>
+          <p:nvPr/>
+        </p:nvSpPr>
+        <p:spPr>
+          <a:xfrm>
+            <a:off x="7929895" y="3657600"/>
+            <a:ext cx="2063303" cy="402336"/>
+          </a:xfrm>
+          <a:prstGeom prst="rect">
+            <a:avLst/>
+          </a:prstGeom>
+          <a:noFill/>
+        </p:spPr>
+        <p:txBody>
+          <a:bodyPr wrap="square" lIns="0" rIns="0" tIns="0" bIns="0">
+            <a:spAutoFit/>
+          </a:bodyPr>
+          <a:lstStyle/>
+          <a:p>
+            <a:pPr algn="l">
+              <a:lnSpc>
+                <a:spcPct val="100000"/>
+              </a:lnSpc>
+            </a:pPr>
+            <a:r>
+              <a:rPr sz="1300" b="0">
+                <a:solidFill>
+                  <a:srgbClr val="1A2027"/>
+                </a:solidFill>
+                <a:latin typeface="Calibri"/>
+              </a:rPr>
+              <a:t>1,00</a:t>
+            </a:r>
+          </a:p>
+        </p:txBody>
+      </p:sp>
+      <p:sp>
+        <p:nvSpPr>
+          <p:cNvPr id="26" name="TextBox 25"/>
+          <p:cNvSpPr txBox="1"/>
+          <p:nvPr/>
+        </p:nvSpPr>
+        <p:spPr>
+          <a:xfrm>
+            <a:off x="9993199" y="3657600"/>
+            <a:ext cx="1375535" cy="402336"/>
+          </a:xfrm>
+          <a:prstGeom prst="rect">
+            <a:avLst/>
+          </a:prstGeom>
+          <a:noFill/>
+        </p:spPr>
+        <p:txBody>
+          <a:bodyPr wrap="square" lIns="0" rIns="0" tIns="0" bIns="0">
+            <a:spAutoFit/>
+          </a:bodyPr>
+          <a:lstStyle/>
+          <a:p>
+            <a:pPr algn="l">
+              <a:lnSpc>
+                <a:spcPct val="100000"/>
+              </a:lnSpc>
+            </a:pPr>
+            <a:r>
+              <a:rPr sz="1300" b="0">
+                <a:solidFill>
+                  <a:srgbClr val="1A2027"/>
+                </a:solidFill>
+                <a:latin typeface="Calibri"/>
+              </a:rPr>
+              <a:t>83 %</a:t>
+            </a:r>
+          </a:p>
+        </p:txBody>
+      </p:sp>
+      <p:sp>
+        <p:nvSpPr>
+          <p:cNvPr id="27" name="Rounded Rectangle 26"/>
+          <p:cNvSpPr/>
+          <p:nvPr/>
+        </p:nvSpPr>
+        <p:spPr>
+          <a:xfrm>
+            <a:off x="713232" y="4041648"/>
+            <a:ext cx="10765231" cy="457200"/>
+          </a:xfrm>
+          <a:prstGeom prst="roundRect">
+            <a:avLst>
+              <a:gd name="adj" fmla="val 6000"/>
+            </a:avLst>
+          </a:prstGeom>
+          <a:solidFill>
+            <a:srgbClr val="FFFFFF"/>
+          </a:solidFill>
+          <a:ln>
+            <a:noFill/>
+          </a:ln>
+          <a:effectLst/>
+        </p:spPr>
+        <p:style>
+          <a:lnRef idx="1">
+            <a:schemeClr val="accent1"/>
+          </a:lnRef>
+          <a:fillRef idx="3">
+            <a:schemeClr val="accent1"/>
+          </a:fillRef>
+          <a:effectRef idx="2">
+            <a:schemeClr val="accent1"/>
+          </a:effectRef>
+          <a:fontRef idx="minor">
+            <a:schemeClr val="lt1"/>
+          </a:fontRef>
+        </p:style>
+        <p:txBody>
+          <a:bodyPr rtlCol="0" anchor="ctr"/>
+          <a:lstStyle/>
+          <a:p>
+            <a:pPr algn="ctr"/>
+          </a:p>
+        </p:txBody>
+      </p:sp>
+      <p:sp>
+        <p:nvSpPr>
+          <p:cNvPr id="28" name="TextBox 27"/>
+          <p:cNvSpPr txBox="1"/>
+          <p:nvPr/>
+        </p:nvSpPr>
+        <p:spPr>
+          <a:xfrm>
+            <a:off x="822960" y="4114800"/>
+            <a:ext cx="3553467" cy="402336"/>
+          </a:xfrm>
+          <a:prstGeom prst="rect">
+            <a:avLst/>
+          </a:prstGeom>
+          <a:noFill/>
+        </p:spPr>
+        <p:txBody>
+          <a:bodyPr wrap="square" lIns="0" rIns="0" tIns="0" bIns="0">
+            <a:spAutoFit/>
+          </a:bodyPr>
+          <a:lstStyle/>
+          <a:p>
+            <a:pPr algn="l">
+              <a:lnSpc>
+                <a:spcPct val="100000"/>
+              </a:lnSpc>
+            </a:pPr>
+            <a:r>
+              <a:rPr sz="1300" b="0">
+                <a:solidFill>
+                  <a:srgbClr val="1A2027"/>
+                </a:solidFill>
+                <a:latin typeface="Calibri"/>
+              </a:rPr>
+              <a:t>/api/feed</a:t>
+            </a:r>
+          </a:p>
+        </p:txBody>
+      </p:sp>
+      <p:sp>
+        <p:nvSpPr>
+          <p:cNvPr id="29" name="TextBox 28"/>
+          <p:cNvSpPr txBox="1"/>
+          <p:nvPr/>
+        </p:nvSpPr>
+        <p:spPr>
+          <a:xfrm>
+            <a:off x="4376427" y="4114800"/>
+            <a:ext cx="1375535" cy="402336"/>
+          </a:xfrm>
+          <a:prstGeom prst="rect">
+            <a:avLst/>
+          </a:prstGeom>
+          <a:noFill/>
+        </p:spPr>
+        <p:txBody>
+          <a:bodyPr wrap="square" lIns="0" rIns="0" tIns="0" bIns="0">
+            <a:spAutoFit/>
+          </a:bodyPr>
+          <a:lstStyle/>
+          <a:p>
+            <a:pPr algn="l">
+              <a:lnSpc>
+                <a:spcPct val="100000"/>
+              </a:lnSpc>
+            </a:pPr>
+            <a:r>
+              <a:rPr sz="1300" b="0">
+                <a:solidFill>
+                  <a:srgbClr val="1A2027"/>
+                </a:solidFill>
+                <a:latin typeface="Calibri"/>
+              </a:rPr>
+              <a:t>limit</a:t>
+            </a:r>
+          </a:p>
+        </p:txBody>
+      </p:sp>
+      <p:sp>
+        <p:nvSpPr>
+          <p:cNvPr id="30" name="TextBox 29"/>
+          <p:cNvSpPr txBox="1"/>
+          <p:nvPr/>
+        </p:nvSpPr>
+        <p:spPr>
+          <a:xfrm>
+            <a:off x="5751963" y="4114800"/>
+            <a:ext cx="2177931" cy="402336"/>
+          </a:xfrm>
+          <a:prstGeom prst="rect">
+            <a:avLst/>
+          </a:prstGeom>
+          <a:noFill/>
+        </p:spPr>
+        <p:txBody>
+          <a:bodyPr wrap="square" lIns="0" rIns="0" tIns="0" bIns="0">
+            <a:spAutoFit/>
+          </a:bodyPr>
+          <a:lstStyle/>
+          <a:p>
+            <a:pPr algn="l">
+              <a:lnSpc>
+                <a:spcPct val="100000"/>
+              </a:lnSpc>
+            </a:pPr>
+            <a:r>
+              <a:rPr sz="1300" b="0">
+                <a:solidFill>
+                  <a:srgbClr val="1A2027"/>
+                </a:solidFill>
+                <a:latin typeface="Calibri"/>
+              </a:rPr>
+              <a:t>~ limit^0,77</a:t>
+            </a:r>
+          </a:p>
+        </p:txBody>
+      </p:sp>
+      <p:sp>
+        <p:nvSpPr>
+          <p:cNvPr id="31" name="TextBox 30"/>
+          <p:cNvSpPr txBox="1"/>
+          <p:nvPr/>
+        </p:nvSpPr>
+        <p:spPr>
+          <a:xfrm>
+            <a:off x="7929895" y="4114800"/>
+            <a:ext cx="2063303" cy="402336"/>
+          </a:xfrm>
+          <a:prstGeom prst="rect">
+            <a:avLst/>
+          </a:prstGeom>
+          <a:noFill/>
+        </p:spPr>
+        <p:txBody>
+          <a:bodyPr wrap="square" lIns="0" rIns="0" tIns="0" bIns="0">
+            <a:spAutoFit/>
+          </a:bodyPr>
+          <a:lstStyle/>
+          <a:p>
+            <a:pPr algn="l">
+              <a:lnSpc>
+                <a:spcPct val="100000"/>
+              </a:lnSpc>
+            </a:pPr>
+            <a:r>
+              <a:rPr sz="1300" b="0">
+                <a:solidFill>
+                  <a:srgbClr val="1A2027"/>
+                </a:solidFill>
+                <a:latin typeface="Calibri"/>
+              </a:rPr>
+              <a:t>1,00</a:t>
+            </a:r>
+          </a:p>
+        </p:txBody>
+      </p:sp>
+      <p:sp>
+        <p:nvSpPr>
+          <p:cNvPr id="32" name="TextBox 31"/>
+          <p:cNvSpPr txBox="1"/>
+          <p:nvPr/>
+        </p:nvSpPr>
+        <p:spPr>
+          <a:xfrm>
+            <a:off x="9993199" y="4114800"/>
+            <a:ext cx="1375535" cy="402336"/>
+          </a:xfrm>
+          <a:prstGeom prst="rect">
+            <a:avLst/>
+          </a:prstGeom>
+          <a:noFill/>
+        </p:spPr>
+        <p:txBody>
+          <a:bodyPr wrap="square" lIns="0" rIns="0" tIns="0" bIns="0">
+            <a:spAutoFit/>
+          </a:bodyPr>
+          <a:lstStyle/>
+          <a:p>
+            <a:pPr algn="l">
+              <a:lnSpc>
+                <a:spcPct val="100000"/>
+              </a:lnSpc>
+            </a:pPr>
+            <a:r>
+              <a:rPr sz="1300" b="0">
+                <a:solidFill>
+                  <a:srgbClr val="1A2027"/>
+                </a:solidFill>
+                <a:latin typeface="Calibri"/>
+              </a:rPr>
+              <a:t>81 %</a:t>
+            </a:r>
+          </a:p>
+        </p:txBody>
+      </p:sp>
+      <p:sp>
+        <p:nvSpPr>
+          <p:cNvPr id="33" name="TextBox 32"/>
+          <p:cNvSpPr txBox="1"/>
+          <p:nvPr/>
+        </p:nvSpPr>
+        <p:spPr>
+          <a:xfrm>
+            <a:off x="822960" y="4681728"/>
+            <a:ext cx="10545775" cy="1097280"/>
+          </a:xfrm>
+          <a:prstGeom prst="rect">
+            <a:avLst/>
+          </a:prstGeom>
+          <a:noFill/>
+        </p:spPr>
+        <p:txBody>
+          <a:bodyPr wrap="square" lIns="0" rIns="0" tIns="0" bIns="0">
+            <a:spAutoFit/>
+          </a:bodyPr>
+          <a:lstStyle/>
+          <a:p>
+            <a:pPr algn="l">
+              <a:lnSpc>
+                <a:spcPct val="135000"/>
+              </a:lnSpc>
+            </a:pPr>
+            <a:r>
+              <a:rPr sz="1600" b="0">
+                <a:solidFill>
+                  <a:srgbClr val="1A2027"/>
+                </a:solidFill>
+                <a:latin typeface="Calibri"/>
+              </a:rPr>
+              <a:t>Показатели 1,91 и 1,98 при истинном значении 2,00 — это квадратичная алгоритмическая сложность операций, выведенная из одних только времён ответа в журнале веб-сервера.</a:t>
             </a:r>
           </a:p>
         </p:txBody>
